--- a/slides/Lab1_Ex2.pptx
+++ b/slides/Lab1_Ex2.pptx
@@ -9,11 +9,12 @@
     <p:sldId id="265" r:id="rId3"/>
     <p:sldId id="258" r:id="rId4"/>
     <p:sldId id="266" r:id="rId5"/>
-    <p:sldId id="260" r:id="rId6"/>
-    <p:sldId id="267" r:id="rId7"/>
-    <p:sldId id="269" r:id="rId8"/>
-    <p:sldId id="264" r:id="rId9"/>
-    <p:sldId id="268" r:id="rId10"/>
+    <p:sldId id="270" r:id="rId6"/>
+    <p:sldId id="260" r:id="rId7"/>
+    <p:sldId id="267" r:id="rId8"/>
+    <p:sldId id="269" r:id="rId9"/>
+    <p:sldId id="264" r:id="rId10"/>
+    <p:sldId id="268" r:id="rId11"/>
   </p:sldIdLst>
   <p:sldSz cx="12192000" cy="6858000"/>
   <p:notesSz cx="6858000" cy="9144000"/>
@@ -251,7 +252,7 @@
           <a:p>
             <a:fld id="{E8B29431-73EE-4558-8BA6-40AB916516D5}" type="datetimeFigureOut">
               <a:rPr lang="pt-BR" smtClean="0"/>
-              <a:t>09/08/2025</a:t>
+              <a:t>07/08/2026</a:t>
             </a:fld>
             <a:endParaRPr lang="pt-BR"/>
           </a:p>
@@ -421,7 +422,7 @@
           <a:p>
             <a:fld id="{E8B29431-73EE-4558-8BA6-40AB916516D5}" type="datetimeFigureOut">
               <a:rPr lang="pt-BR" smtClean="0"/>
-              <a:t>09/08/2025</a:t>
+              <a:t>07/08/2026</a:t>
             </a:fld>
             <a:endParaRPr lang="pt-BR"/>
           </a:p>
@@ -601,7 +602,7 @@
           <a:p>
             <a:fld id="{E8B29431-73EE-4558-8BA6-40AB916516D5}" type="datetimeFigureOut">
               <a:rPr lang="pt-BR" smtClean="0"/>
-              <a:t>09/08/2025</a:t>
+              <a:t>07/08/2026</a:t>
             </a:fld>
             <a:endParaRPr lang="pt-BR"/>
           </a:p>
@@ -771,7 +772,7 @@
           <a:p>
             <a:fld id="{E8B29431-73EE-4558-8BA6-40AB916516D5}" type="datetimeFigureOut">
               <a:rPr lang="pt-BR" smtClean="0"/>
-              <a:t>09/08/2025</a:t>
+              <a:t>07/08/2026</a:t>
             </a:fld>
             <a:endParaRPr lang="pt-BR"/>
           </a:p>
@@ -1017,7 +1018,7 @@
           <a:p>
             <a:fld id="{E8B29431-73EE-4558-8BA6-40AB916516D5}" type="datetimeFigureOut">
               <a:rPr lang="pt-BR" smtClean="0"/>
-              <a:t>09/08/2025</a:t>
+              <a:t>07/08/2026</a:t>
             </a:fld>
             <a:endParaRPr lang="pt-BR"/>
           </a:p>
@@ -1249,7 +1250,7 @@
           <a:p>
             <a:fld id="{E8B29431-73EE-4558-8BA6-40AB916516D5}" type="datetimeFigureOut">
               <a:rPr lang="pt-BR" smtClean="0"/>
-              <a:t>09/08/2025</a:t>
+              <a:t>07/08/2026</a:t>
             </a:fld>
             <a:endParaRPr lang="pt-BR"/>
           </a:p>
@@ -1616,7 +1617,7 @@
           <a:p>
             <a:fld id="{E8B29431-73EE-4558-8BA6-40AB916516D5}" type="datetimeFigureOut">
               <a:rPr lang="pt-BR" smtClean="0"/>
-              <a:t>09/08/2025</a:t>
+              <a:t>07/08/2026</a:t>
             </a:fld>
             <a:endParaRPr lang="pt-BR"/>
           </a:p>
@@ -1734,7 +1735,7 @@
           <a:p>
             <a:fld id="{E8B29431-73EE-4558-8BA6-40AB916516D5}" type="datetimeFigureOut">
               <a:rPr lang="pt-BR" smtClean="0"/>
-              <a:t>09/08/2025</a:t>
+              <a:t>07/08/2026</a:t>
             </a:fld>
             <a:endParaRPr lang="pt-BR"/>
           </a:p>
@@ -1829,7 +1830,7 @@
           <a:p>
             <a:fld id="{E8B29431-73EE-4558-8BA6-40AB916516D5}" type="datetimeFigureOut">
               <a:rPr lang="pt-BR" smtClean="0"/>
-              <a:t>09/08/2025</a:t>
+              <a:t>07/08/2026</a:t>
             </a:fld>
             <a:endParaRPr lang="pt-BR"/>
           </a:p>
@@ -2106,7 +2107,7 @@
           <a:p>
             <a:fld id="{E8B29431-73EE-4558-8BA6-40AB916516D5}" type="datetimeFigureOut">
               <a:rPr lang="pt-BR" smtClean="0"/>
-              <a:t>09/08/2025</a:t>
+              <a:t>07/08/2026</a:t>
             </a:fld>
             <a:endParaRPr lang="pt-BR"/>
           </a:p>
@@ -2359,7 +2360,7 @@
           <a:p>
             <a:fld id="{E8B29431-73EE-4558-8BA6-40AB916516D5}" type="datetimeFigureOut">
               <a:rPr lang="pt-BR" smtClean="0"/>
-              <a:t>09/08/2025</a:t>
+              <a:t>07/08/2026</a:t>
             </a:fld>
             <a:endParaRPr lang="pt-BR"/>
           </a:p>
@@ -2572,7 +2573,7 @@
           <a:p>
             <a:fld id="{E8B29431-73EE-4558-8BA6-40AB916516D5}" type="datetimeFigureOut">
               <a:rPr lang="pt-BR" smtClean="0"/>
-              <a:t>09/08/2025</a:t>
+              <a:t>07/08/2026</a:t>
             </a:fld>
             <a:endParaRPr lang="pt-BR"/>
           </a:p>
@@ -2993,9 +2994,12 @@
           <a:lstStyle/>
           <a:p>
             <a:r>
-              <a:rPr lang="pt-BR" dirty="0"/>
+              <a:rPr lang="pt-BR" dirty="0">
+                <a:hlinkClick r:id="rId2"/>
+              </a:rPr>
               <a:t>Laboratório #1</a:t>
             </a:r>
+            <a:endParaRPr lang="pt-BR" dirty="0"/>
           </a:p>
         </p:txBody>
       </p:sp>
@@ -3036,6 +3040,1413 @@
 </p:sld>
 </file>
 
+<file path=ppt/slides/slide10.xml><?xml version="1.0" encoding="utf-8"?>
+<p:sld xmlns:a="http://schemas.openxmlformats.org/drawingml/2006/main" xmlns:r="http://schemas.openxmlformats.org/officeDocument/2006/relationships" xmlns:p="http://schemas.openxmlformats.org/presentationml/2006/main">
+  <p:cSld>
+    <p:spTree>
+      <p:nvGrpSpPr>
+        <p:cNvPr id="1" name=""/>
+        <p:cNvGrpSpPr/>
+        <p:nvPr/>
+      </p:nvGrpSpPr>
+      <p:grpSpPr>
+        <a:xfrm>
+          <a:off x="0" y="0"/>
+          <a:ext cx="0" cy="0"/>
+          <a:chOff x="0" y="0"/>
+          <a:chExt cx="0" cy="0"/>
+        </a:xfrm>
+      </p:grpSpPr>
+      <p:sp>
+        <p:nvSpPr>
+          <p:cNvPr id="2" name="Título 1"/>
+          <p:cNvSpPr>
+            <a:spLocks noGrp="1"/>
+          </p:cNvSpPr>
+          <p:nvPr>
+            <p:ph type="title"/>
+          </p:nvPr>
+        </p:nvSpPr>
+        <p:spPr/>
+        <p:txBody>
+          <a:bodyPr/>
+          <a:lstStyle/>
+          <a:p>
+            <a:r>
+              <a:rPr lang="pt-BR" dirty="0"/>
+              <a:t>Objetivo do curso</a:t>
+            </a:r>
+            <a:endParaRPr lang="en-US" dirty="0"/>
+          </a:p>
+        </p:txBody>
+      </p:sp>
+      <mc:AlternateContent xmlns:mc="http://schemas.openxmlformats.org/markup-compatibility/2006" xmlns:a14="http://schemas.microsoft.com/office/drawing/2010/main">
+        <mc:Choice Requires="a14">
+          <p:sp>
+            <p:nvSpPr>
+              <p:cNvPr id="4" name="Retângulo 3"/>
+              <p:cNvSpPr/>
+              <p:nvPr/>
+            </p:nvSpPr>
+            <p:spPr>
+              <a:xfrm>
+                <a:off x="7567749" y="2200433"/>
+                <a:ext cx="4484914" cy="2862322"/>
+              </a:xfrm>
+              <a:prstGeom prst="rect">
+                <a:avLst/>
+              </a:prstGeom>
+            </p:spPr>
+            <p:txBody>
+              <a:bodyPr wrap="square">
+                <a:spAutoFit/>
+              </a:bodyPr>
+              <a:lstStyle/>
+              <a:p>
+                <a:r>
+                  <a:rPr lang="pt-BR" dirty="0" err="1"/>
+                  <a:t>def</a:t>
+                </a:r>
+                <a:r>
+                  <a:rPr lang="pt-BR" dirty="0"/>
+                  <a:t> </a:t>
+                </a:r>
+                <a:r>
+                  <a:rPr lang="pt-BR" i="1" dirty="0" err="1"/>
+                  <a:t>predict</a:t>
+                </a:r>
+                <a:r>
+                  <a:rPr lang="pt-BR" dirty="0"/>
+                  <a:t>(</a:t>
+                </a:r>
+                <a14:m>
+                  <m:oMath xmlns:m="http://schemas.openxmlformats.org/officeDocument/2006/math">
+                    <m:r>
+                      <a:rPr lang="pt-BR" b="1" i="1">
+                        <a:latin typeface="Cambria Math" panose="02040503050406030204" pitchFamily="18" charset="0"/>
+                      </a:rPr>
+                      <m:t>𝒙</m:t>
+                    </m:r>
+                  </m:oMath>
+                </a14:m>
+                <a:r>
+                  <a:rPr lang="pt-BR" dirty="0"/>
+                  <a:t>):</a:t>
+                </a:r>
+              </a:p>
+              <a:p>
+                <a:r>
+                  <a:rPr lang="pt-BR" dirty="0"/>
+                  <a:t>    </a:t>
+                </a:r>
+                <a:r>
+                  <a:rPr lang="pt-BR" dirty="0" err="1"/>
+                  <a:t>if</a:t>
+                </a:r>
+                <a:r>
+                  <a:rPr lang="pt-BR" dirty="0"/>
+                  <a:t>(</a:t>
+                </a:r>
+                <a14:m>
+                  <m:oMath xmlns:m="http://schemas.openxmlformats.org/officeDocument/2006/math">
+                    <m:sSub>
+                      <m:sSubPr>
+                        <m:ctrlPr>
+                          <a:rPr lang="pt-BR" i="1">
+                            <a:latin typeface="Cambria Math" panose="02040503050406030204" pitchFamily="18" charset="0"/>
+                          </a:rPr>
+                        </m:ctrlPr>
+                      </m:sSubPr>
+                      <m:e>
+                        <m:r>
+                          <a:rPr lang="pt-BR" i="1">
+                            <a:latin typeface="Cambria Math" panose="02040503050406030204" pitchFamily="18" charset="0"/>
+                          </a:rPr>
+                          <m:t>𝑔</m:t>
+                        </m:r>
+                      </m:e>
+                      <m:sub>
+                        <m:r>
+                          <a:rPr lang="pt-BR" i="1">
+                            <a:latin typeface="Cambria Math" panose="02040503050406030204" pitchFamily="18" charset="0"/>
+                          </a:rPr>
+                          <m:t>1</m:t>
+                        </m:r>
+                      </m:sub>
+                    </m:sSub>
+                    <m:d>
+                      <m:dPr>
+                        <m:ctrlPr>
+                          <a:rPr lang="pt-BR" b="1" i="1">
+                            <a:latin typeface="Cambria Math" panose="02040503050406030204" pitchFamily="18" charset="0"/>
+                          </a:rPr>
+                        </m:ctrlPr>
+                      </m:dPr>
+                      <m:e>
+                        <m:r>
+                          <a:rPr lang="pt-BR" b="1" i="1">
+                            <a:latin typeface="Cambria Math" panose="02040503050406030204" pitchFamily="18" charset="0"/>
+                          </a:rPr>
+                          <m:t>𝒙</m:t>
+                        </m:r>
+                      </m:e>
+                    </m:d>
+                  </m:oMath>
+                </a14:m>
+                <a:r>
+                  <a:rPr lang="pt-BR" dirty="0"/>
+                  <a:t> &gt;= 0):</a:t>
+                </a:r>
+              </a:p>
+              <a:p>
+                <a:r>
+                  <a:rPr lang="pt-BR" dirty="0"/>
+                  <a:t>        </a:t>
+                </a:r>
+                <a:r>
+                  <a:rPr lang="pt-BR" dirty="0" err="1"/>
+                  <a:t>y_pred</a:t>
+                </a:r>
+                <a:r>
+                  <a:rPr lang="pt-BR" dirty="0"/>
+                  <a:t>[i] = 0</a:t>
+                </a:r>
+              </a:p>
+              <a:p>
+                <a:r>
+                  <a:rPr lang="pt-BR" dirty="0"/>
+                  <a:t>    # Caso quando </a:t>
+                </a:r>
+                <a14:m>
+                  <m:oMath xmlns:m="http://schemas.openxmlformats.org/officeDocument/2006/math">
+                    <m:sSub>
+                      <m:sSubPr>
+                        <m:ctrlPr>
+                          <a:rPr lang="pt-BR" i="1">
+                            <a:latin typeface="Cambria Math" panose="02040503050406030204" pitchFamily="18" charset="0"/>
+                          </a:rPr>
+                        </m:ctrlPr>
+                      </m:sSubPr>
+                      <m:e>
+                        <m:r>
+                          <a:rPr lang="pt-BR" i="1">
+                            <a:latin typeface="Cambria Math" panose="02040503050406030204" pitchFamily="18" charset="0"/>
+                          </a:rPr>
+                          <m:t>𝑔</m:t>
+                        </m:r>
+                      </m:e>
+                      <m:sub>
+                        <m:r>
+                          <a:rPr lang="pt-BR" i="1">
+                            <a:latin typeface="Cambria Math" panose="02040503050406030204" pitchFamily="18" charset="0"/>
+                          </a:rPr>
+                          <m:t>1</m:t>
+                        </m:r>
+                      </m:sub>
+                    </m:sSub>
+                    <m:d>
+                      <m:dPr>
+                        <m:ctrlPr>
+                          <a:rPr lang="pt-BR" b="1" i="1">
+                            <a:latin typeface="Cambria Math" panose="02040503050406030204" pitchFamily="18" charset="0"/>
+                          </a:rPr>
+                        </m:ctrlPr>
+                      </m:dPr>
+                      <m:e>
+                        <m:r>
+                          <a:rPr lang="pt-BR" b="1" i="1">
+                            <a:latin typeface="Cambria Math" panose="02040503050406030204" pitchFamily="18" charset="0"/>
+                          </a:rPr>
+                          <m:t>𝒙</m:t>
+                        </m:r>
+                      </m:e>
+                    </m:d>
+                  </m:oMath>
+                </a14:m>
+                <a:r>
+                  <a:rPr lang="pt-BR" dirty="0"/>
+                  <a:t> &lt; 0</a:t>
+                </a:r>
+              </a:p>
+              <a:p>
+                <a:r>
+                  <a:rPr lang="pt-BR" dirty="0"/>
+                  <a:t>    </a:t>
+                </a:r>
+                <a:r>
+                  <a:rPr lang="pt-BR" dirty="0" err="1"/>
+                  <a:t>else</a:t>
+                </a:r>
+                <a:r>
+                  <a:rPr lang="pt-BR" dirty="0"/>
+                  <a:t>:</a:t>
+                </a:r>
+              </a:p>
+              <a:p>
+                <a:r>
+                  <a:rPr lang="pt-BR" dirty="0"/>
+                  <a:t>        </a:t>
+                </a:r>
+                <a:r>
+                  <a:rPr lang="pt-BR" dirty="0" err="1"/>
+                  <a:t>if</a:t>
+                </a:r>
+                <a:r>
+                  <a:rPr lang="pt-BR" dirty="0"/>
+                  <a:t>(</a:t>
+                </a:r>
+                <a14:m>
+                  <m:oMath xmlns:m="http://schemas.openxmlformats.org/officeDocument/2006/math">
+                    <m:sSub>
+                      <m:sSubPr>
+                        <m:ctrlPr>
+                          <a:rPr lang="pt-BR" i="1">
+                            <a:latin typeface="Cambria Math" panose="02040503050406030204" pitchFamily="18" charset="0"/>
+                          </a:rPr>
+                        </m:ctrlPr>
+                      </m:sSubPr>
+                      <m:e>
+                        <m:r>
+                          <a:rPr lang="pt-BR" i="1">
+                            <a:latin typeface="Cambria Math" panose="02040503050406030204" pitchFamily="18" charset="0"/>
+                          </a:rPr>
+                          <m:t>𝑔</m:t>
+                        </m:r>
+                      </m:e>
+                      <m:sub>
+                        <m:r>
+                          <a:rPr lang="pt-BR" i="1">
+                            <a:latin typeface="Cambria Math" panose="02040503050406030204" pitchFamily="18" charset="0"/>
+                          </a:rPr>
+                          <m:t>2</m:t>
+                        </m:r>
+                      </m:sub>
+                    </m:sSub>
+                    <m:d>
+                      <m:dPr>
+                        <m:ctrlPr>
+                          <a:rPr lang="pt-BR" b="1" i="1">
+                            <a:latin typeface="Cambria Math" panose="02040503050406030204" pitchFamily="18" charset="0"/>
+                          </a:rPr>
+                        </m:ctrlPr>
+                      </m:dPr>
+                      <m:e>
+                        <m:r>
+                          <a:rPr lang="pt-BR" b="1" i="1">
+                            <a:latin typeface="Cambria Math" panose="02040503050406030204" pitchFamily="18" charset="0"/>
+                          </a:rPr>
+                          <m:t>𝒙</m:t>
+                        </m:r>
+                      </m:e>
+                    </m:d>
+                  </m:oMath>
+                </a14:m>
+                <a:r>
+                  <a:rPr lang="pt-BR" dirty="0"/>
+                  <a:t> &lt; 0):</a:t>
+                </a:r>
+              </a:p>
+              <a:p>
+                <a:r>
+                  <a:rPr lang="pt-BR" dirty="0"/>
+                  <a:t>            </a:t>
+                </a:r>
+                <a:r>
+                  <a:rPr lang="pt-BR" dirty="0" err="1"/>
+                  <a:t>y_pred</a:t>
+                </a:r>
+                <a:r>
+                  <a:rPr lang="pt-BR" dirty="0"/>
+                  <a:t>[i] = 1</a:t>
+                </a:r>
+              </a:p>
+              <a:p>
+                <a:r>
+                  <a:rPr lang="pt-BR" dirty="0"/>
+                  <a:t>        # caso quando # </a:t>
+                </a:r>
+                <a14:m>
+                  <m:oMath xmlns:m="http://schemas.openxmlformats.org/officeDocument/2006/math">
+                    <m:sSub>
+                      <m:sSubPr>
+                        <m:ctrlPr>
+                          <a:rPr lang="pt-BR" i="1">
+                            <a:latin typeface="Cambria Math" panose="02040503050406030204" pitchFamily="18" charset="0"/>
+                          </a:rPr>
+                        </m:ctrlPr>
+                      </m:sSubPr>
+                      <m:e>
+                        <m:r>
+                          <a:rPr lang="pt-BR" i="1">
+                            <a:latin typeface="Cambria Math" panose="02040503050406030204" pitchFamily="18" charset="0"/>
+                          </a:rPr>
+                          <m:t>𝑔</m:t>
+                        </m:r>
+                      </m:e>
+                      <m:sub>
+                        <m:r>
+                          <a:rPr lang="pt-BR" i="1">
+                            <a:latin typeface="Cambria Math" panose="02040503050406030204" pitchFamily="18" charset="0"/>
+                          </a:rPr>
+                          <m:t>2</m:t>
+                        </m:r>
+                      </m:sub>
+                    </m:sSub>
+                    <m:d>
+                      <m:dPr>
+                        <m:ctrlPr>
+                          <a:rPr lang="pt-BR" b="1" i="1" smtClean="0">
+                            <a:latin typeface="Cambria Math" panose="02040503050406030204" pitchFamily="18" charset="0"/>
+                          </a:rPr>
+                        </m:ctrlPr>
+                      </m:dPr>
+                      <m:e>
+                        <m:r>
+                          <a:rPr lang="pt-BR" b="1" i="1" smtClean="0">
+                            <a:latin typeface="Cambria Math" panose="02040503050406030204" pitchFamily="18" charset="0"/>
+                          </a:rPr>
+                          <m:t>𝒙</m:t>
+                        </m:r>
+                      </m:e>
+                    </m:d>
+                  </m:oMath>
+                </a14:m>
+                <a:r>
+                  <a:rPr lang="pt-BR" dirty="0"/>
+                  <a:t> &gt;= 0</a:t>
+                </a:r>
+              </a:p>
+              <a:p>
+                <a:r>
+                  <a:rPr lang="pt-BR" dirty="0"/>
+                  <a:t>        </a:t>
+                </a:r>
+                <a:r>
+                  <a:rPr lang="pt-BR" dirty="0" err="1"/>
+                  <a:t>else</a:t>
+                </a:r>
+                <a:r>
+                  <a:rPr lang="pt-BR" dirty="0"/>
+                  <a:t>: </a:t>
+                </a:r>
+              </a:p>
+              <a:p>
+                <a:r>
+                  <a:rPr lang="pt-BR" dirty="0"/>
+                  <a:t>            </a:t>
+                </a:r>
+                <a:r>
+                  <a:rPr lang="pt-BR" dirty="0" err="1"/>
+                  <a:t>y_pred</a:t>
+                </a:r>
+                <a:r>
+                  <a:rPr lang="pt-BR" dirty="0"/>
+                  <a:t>[i] = 2</a:t>
+                </a:r>
+              </a:p>
+            </p:txBody>
+          </p:sp>
+        </mc:Choice>
+        <mc:Fallback xmlns="">
+          <p:sp>
+            <p:nvSpPr>
+              <p:cNvPr id="4" name="Retângulo 3"/>
+              <p:cNvSpPr>
+                <a:spLocks noRot="1" noChangeAspect="1" noMove="1" noResize="1" noEditPoints="1" noAdjustHandles="1" noChangeArrowheads="1" noChangeShapeType="1" noTextEdit="1"/>
+              </p:cNvSpPr>
+              <p:nvPr/>
+            </p:nvSpPr>
+            <p:spPr>
+              <a:xfrm>
+                <a:off x="7567749" y="2200433"/>
+                <a:ext cx="4484914" cy="2862322"/>
+              </a:xfrm>
+              <a:prstGeom prst="rect">
+                <a:avLst/>
+              </a:prstGeom>
+              <a:blipFill rotWithShape="0">
+                <a:blip r:embed="rId2"/>
+                <a:stretch>
+                  <a:fillRect l="-1087" t="-1277" b="-2340"/>
+                </a:stretch>
+              </a:blipFill>
+            </p:spPr>
+            <p:txBody>
+              <a:bodyPr/>
+              <a:lstStyle/>
+              <a:p>
+                <a:r>
+                  <a:rPr lang="pt-BR">
+                    <a:noFill/>
+                  </a:rPr>
+                  <a:t> </a:t>
+                </a:r>
+              </a:p>
+            </p:txBody>
+          </p:sp>
+        </mc:Fallback>
+      </mc:AlternateContent>
+      <p:sp>
+        <p:nvSpPr>
+          <p:cNvPr id="5" name="Retângulo 4"/>
+          <p:cNvSpPr/>
+          <p:nvPr/>
+        </p:nvSpPr>
+        <p:spPr>
+          <a:xfrm>
+            <a:off x="1188013" y="2696427"/>
+            <a:ext cx="2011680" cy="1262743"/>
+          </a:xfrm>
+          <a:prstGeom prst="rect">
+            <a:avLst/>
+          </a:prstGeom>
+          <a:noFill/>
+          <a:ln w="28575">
+            <a:solidFill>
+              <a:schemeClr val="tx1"/>
+            </a:solidFill>
+          </a:ln>
+        </p:spPr>
+        <p:style>
+          <a:lnRef idx="2">
+            <a:schemeClr val="accent1">
+              <a:shade val="50000"/>
+            </a:schemeClr>
+          </a:lnRef>
+          <a:fillRef idx="1">
+            <a:schemeClr val="accent1"/>
+          </a:fillRef>
+          <a:effectRef idx="0">
+            <a:schemeClr val="accent1"/>
+          </a:effectRef>
+          <a:fontRef idx="minor">
+            <a:schemeClr val="lt1"/>
+          </a:fontRef>
+        </p:style>
+        <p:txBody>
+          <a:bodyPr rtlCol="0" anchor="ctr"/>
+          <a:lstStyle/>
+          <a:p>
+            <a:pPr algn="ctr"/>
+            <a:r>
+              <a:rPr lang="pt-BR" dirty="0">
+                <a:solidFill>
+                  <a:schemeClr val="tx1"/>
+                </a:solidFill>
+              </a:rPr>
+              <a:t>Modelo de ML</a:t>
+            </a:r>
+          </a:p>
+          <a:p>
+            <a:pPr algn="ctr"/>
+            <a:r>
+              <a:rPr lang="pt-BR" dirty="0">
+                <a:solidFill>
+                  <a:schemeClr val="tx1"/>
+                </a:solidFill>
+              </a:rPr>
+              <a:t>(Classificador)</a:t>
+            </a:r>
+            <a:endParaRPr lang="en-US" dirty="0">
+              <a:solidFill>
+                <a:schemeClr val="tx1"/>
+              </a:solidFill>
+            </a:endParaRPr>
+          </a:p>
+        </p:txBody>
+      </p:sp>
+      <p:sp>
+        <p:nvSpPr>
+          <p:cNvPr id="6" name="Seta para a direita 5"/>
+          <p:cNvSpPr/>
+          <p:nvPr/>
+        </p:nvSpPr>
+        <p:spPr>
+          <a:xfrm>
+            <a:off x="787419" y="3127501"/>
+            <a:ext cx="400594" cy="400594"/>
+          </a:xfrm>
+          <a:prstGeom prst="rightArrow">
+            <a:avLst/>
+          </a:prstGeom>
+          <a:noFill/>
+          <a:ln w="28575">
+            <a:solidFill>
+              <a:schemeClr val="tx1"/>
+            </a:solidFill>
+          </a:ln>
+        </p:spPr>
+        <p:style>
+          <a:lnRef idx="2">
+            <a:schemeClr val="accent1">
+              <a:shade val="50000"/>
+            </a:schemeClr>
+          </a:lnRef>
+          <a:fillRef idx="1">
+            <a:schemeClr val="accent1"/>
+          </a:fillRef>
+          <a:effectRef idx="0">
+            <a:schemeClr val="accent1"/>
+          </a:effectRef>
+          <a:fontRef idx="minor">
+            <a:schemeClr val="lt1"/>
+          </a:fontRef>
+        </p:style>
+        <p:txBody>
+          <a:bodyPr rtlCol="0" anchor="ctr"/>
+          <a:lstStyle/>
+          <a:p>
+            <a:pPr algn="ctr"/>
+            <a:endParaRPr lang="en-US"/>
+          </a:p>
+        </p:txBody>
+      </p:sp>
+      <mc:AlternateContent xmlns:mc="http://schemas.openxmlformats.org/markup-compatibility/2006" xmlns:a14="http://schemas.microsoft.com/office/drawing/2010/main">
+        <mc:Choice Requires="a14">
+          <p:sp>
+            <p:nvSpPr>
+              <p:cNvPr id="8" name="Retângulo 7"/>
+              <p:cNvSpPr/>
+              <p:nvPr/>
+            </p:nvSpPr>
+            <p:spPr>
+              <a:xfrm>
+                <a:off x="263433" y="3066188"/>
+                <a:ext cx="473206" cy="523220"/>
+              </a:xfrm>
+              <a:prstGeom prst="rect">
+                <a:avLst/>
+              </a:prstGeom>
+            </p:spPr>
+            <p:txBody>
+              <a:bodyPr wrap="none">
+                <a:spAutoFit/>
+              </a:bodyPr>
+              <a:lstStyle/>
+              <a:p>
+                <a:pPr/>
+                <a14:m>
+                  <m:oMathPara xmlns:m="http://schemas.openxmlformats.org/officeDocument/2006/math">
+                    <m:oMath>
+                      <m:r>
+                        <a:rPr lang="pt-BR" sz="2800" b="1" i="1">
+                          <a:latin typeface="Cambria Math" panose="02040503050406030204" pitchFamily="18" charset="0"/>
+                        </a:rPr>
+                        <m:t>𝒙</m:t>
+                      </m:r>
+                    </m:oMath>
+                  </m:oMathPara>
+                </a14:m>
+                <a:endParaRPr lang="en-US" sz="2800" dirty="0"/>
+              </a:p>
+            </p:txBody>
+          </p:sp>
+        </mc:Choice>
+        <mc:Fallback xmlns="">
+          <p:sp>
+            <p:nvSpPr>
+              <p:cNvPr id="8" name="Retângulo 7"/>
+              <p:cNvSpPr>
+                <a:spLocks noRot="1" noChangeAspect="1" noMove="1" noResize="1" noEditPoints="1" noAdjustHandles="1" noChangeArrowheads="1" noChangeShapeType="1" noTextEdit="1"/>
+              </p:cNvSpPr>
+              <p:nvPr/>
+            </p:nvSpPr>
+            <p:spPr>
+              <a:xfrm>
+                <a:off x="263433" y="3066188"/>
+                <a:ext cx="473206" cy="523220"/>
+              </a:xfrm>
+              <a:prstGeom prst="rect">
+                <a:avLst/>
+              </a:prstGeom>
+              <a:blipFill rotWithShape="0">
+                <a:blip r:embed="rId3"/>
+                <a:stretch>
+                  <a:fillRect/>
+                </a:stretch>
+              </a:blipFill>
+            </p:spPr>
+            <p:txBody>
+              <a:bodyPr/>
+              <a:lstStyle/>
+              <a:p>
+                <a:r>
+                  <a:rPr lang="pt-BR">
+                    <a:noFill/>
+                  </a:rPr>
+                  <a:t> </a:t>
+                </a:r>
+              </a:p>
+            </p:txBody>
+          </p:sp>
+        </mc:Fallback>
+      </mc:AlternateContent>
+      <mc:AlternateContent xmlns:mc="http://schemas.openxmlformats.org/markup-compatibility/2006" xmlns:a14="http://schemas.microsoft.com/office/drawing/2010/main">
+        <mc:Choice Requires="a14">
+          <p:sp>
+            <p:nvSpPr>
+              <p:cNvPr id="9" name="Retângulo 8"/>
+              <p:cNvSpPr/>
+              <p:nvPr/>
+            </p:nvSpPr>
+            <p:spPr>
+              <a:xfrm>
+                <a:off x="3168471" y="3219547"/>
+                <a:ext cx="1111651" cy="561820"/>
+              </a:xfrm>
+              <a:prstGeom prst="rect">
+                <a:avLst/>
+              </a:prstGeom>
+            </p:spPr>
+            <p:txBody>
+              <a:bodyPr wrap="none">
+                <a:spAutoFit/>
+              </a:bodyPr>
+              <a:lstStyle/>
+              <a:p>
+                <a:pPr/>
+                <a14:m>
+                  <m:oMathPara xmlns:m="http://schemas.openxmlformats.org/officeDocument/2006/math">
+                    <m:oMath>
+                      <m:sSub>
+                        <m:sSubPr>
+                          <m:ctrlPr>
+                            <a:rPr lang="pt-BR" sz="2800" b="0" i="1" smtClean="0">
+                              <a:latin typeface="Cambria Math" panose="02040503050406030204" pitchFamily="18" charset="0"/>
+                            </a:rPr>
+                          </m:ctrlPr>
+                        </m:sSubPr>
+                        <m:e>
+                          <m:r>
+                            <a:rPr lang="pt-BR" sz="2800" b="0" i="1" smtClean="0">
+                              <a:latin typeface="Cambria Math" panose="02040503050406030204" pitchFamily="18" charset="0"/>
+                            </a:rPr>
+                            <m:t>𝑦</m:t>
+                          </m:r>
+                        </m:e>
+                        <m:sub>
+                          <m:r>
+                            <a:rPr lang="pt-BR" sz="2800" b="0" i="1" smtClean="0">
+                              <a:latin typeface="Cambria Math" panose="02040503050406030204" pitchFamily="18" charset="0"/>
+                            </a:rPr>
+                            <m:t>𝑝𝑟𝑒𝑑</m:t>
+                          </m:r>
+                        </m:sub>
+                      </m:sSub>
+                    </m:oMath>
+                  </m:oMathPara>
+                </a14:m>
+                <a:endParaRPr lang="en-US" sz="2800" dirty="0"/>
+              </a:p>
+            </p:txBody>
+          </p:sp>
+        </mc:Choice>
+        <mc:Fallback xmlns="">
+          <p:sp>
+            <p:nvSpPr>
+              <p:cNvPr id="9" name="Retângulo 8"/>
+              <p:cNvSpPr>
+                <a:spLocks noRot="1" noChangeAspect="1" noMove="1" noResize="1" noEditPoints="1" noAdjustHandles="1" noChangeArrowheads="1" noChangeShapeType="1" noTextEdit="1"/>
+              </p:cNvSpPr>
+              <p:nvPr/>
+            </p:nvSpPr>
+            <p:spPr>
+              <a:xfrm>
+                <a:off x="3168471" y="3219547"/>
+                <a:ext cx="1111651" cy="561820"/>
+              </a:xfrm>
+              <a:prstGeom prst="rect">
+                <a:avLst/>
+              </a:prstGeom>
+              <a:blipFill rotWithShape="0">
+                <a:blip r:embed="rId4"/>
+                <a:stretch>
+                  <a:fillRect/>
+                </a:stretch>
+              </a:blipFill>
+            </p:spPr>
+            <p:txBody>
+              <a:bodyPr/>
+              <a:lstStyle/>
+              <a:p>
+                <a:r>
+                  <a:rPr lang="pt-BR">
+                    <a:noFill/>
+                  </a:rPr>
+                  <a:t> </a:t>
+                </a:r>
+              </a:p>
+            </p:txBody>
+          </p:sp>
+        </mc:Fallback>
+      </mc:AlternateContent>
+      <p:sp>
+        <p:nvSpPr>
+          <p:cNvPr id="10" name="CaixaDeTexto 9"/>
+          <p:cNvSpPr txBox="1"/>
+          <p:nvPr/>
+        </p:nvSpPr>
+        <p:spPr>
+          <a:xfrm>
+            <a:off x="838200" y="5295501"/>
+            <a:ext cx="11059391" cy="954107"/>
+          </a:xfrm>
+          <a:prstGeom prst="rect">
+            <a:avLst/>
+          </a:prstGeom>
+          <a:noFill/>
+        </p:spPr>
+        <p:txBody>
+          <a:bodyPr wrap="square" rtlCol="0">
+            <a:spAutoFit/>
+          </a:bodyPr>
+          <a:lstStyle/>
+          <a:p>
+            <a:pPr algn="ctr"/>
+            <a:r>
+              <a:rPr lang="pt-BR" sz="2800" dirty="0"/>
+              <a:t>Ou seja, o objetivo é </a:t>
+            </a:r>
+            <a:r>
+              <a:rPr lang="pt-BR" sz="2800" b="1" i="1" dirty="0">
+                <a:solidFill>
+                  <a:srgbClr val="7030A0"/>
+                </a:solidFill>
+              </a:rPr>
+              <a:t>encontrar</a:t>
+            </a:r>
+            <a:r>
+              <a:rPr lang="pt-BR" sz="2800" dirty="0"/>
+              <a:t> </a:t>
+            </a:r>
+            <a:r>
+              <a:rPr lang="pt-BR" sz="2800" b="1" i="1" dirty="0"/>
+              <a:t>funções discriminantes </a:t>
+            </a:r>
+            <a:r>
+              <a:rPr lang="pt-BR" sz="2800" dirty="0"/>
+              <a:t>(i.e., equações e seus respectivos pesos)</a:t>
+            </a:r>
+            <a:r>
+              <a:rPr lang="pt-BR" sz="2800" b="1" i="1" dirty="0"/>
+              <a:t> </a:t>
+            </a:r>
+            <a:r>
+              <a:rPr lang="pt-BR" sz="2800" dirty="0"/>
+              <a:t>que </a:t>
+            </a:r>
+            <a:r>
+              <a:rPr lang="pt-BR" sz="2800" b="1" i="1" dirty="0">
+                <a:solidFill>
+                  <a:schemeClr val="accent2"/>
+                </a:solidFill>
+              </a:rPr>
+              <a:t>minimizem</a:t>
+            </a:r>
+            <a:r>
+              <a:rPr lang="pt-BR" sz="2800" dirty="0"/>
+              <a:t> o </a:t>
+            </a:r>
+            <a:r>
+              <a:rPr lang="pt-BR" sz="2800" b="1" i="1" dirty="0"/>
+              <a:t>erro de classificação</a:t>
+            </a:r>
+            <a:r>
+              <a:rPr lang="pt-BR" sz="2800" dirty="0"/>
+              <a:t>.</a:t>
+            </a:r>
+            <a:endParaRPr lang="en-US" sz="2800" dirty="0"/>
+          </a:p>
+        </p:txBody>
+      </p:sp>
+      <mc:AlternateContent xmlns:mc="http://schemas.openxmlformats.org/markup-compatibility/2006" xmlns:a14="http://schemas.microsoft.com/office/drawing/2010/main">
+        <mc:Choice Requires="a14">
+          <p:sp>
+            <p:nvSpPr>
+              <p:cNvPr id="12" name="Retângulo 11"/>
+              <p:cNvSpPr/>
+              <p:nvPr/>
+            </p:nvSpPr>
+            <p:spPr>
+              <a:xfrm>
+                <a:off x="6338855" y="2998696"/>
+                <a:ext cx="628698" cy="646331"/>
+              </a:xfrm>
+              <a:prstGeom prst="rect">
+                <a:avLst/>
+              </a:prstGeom>
+            </p:spPr>
+            <p:txBody>
+              <a:bodyPr wrap="none">
+                <a:spAutoFit/>
+              </a:bodyPr>
+              <a:lstStyle/>
+              <a:p>
+                <a:pPr/>
+                <a14:m>
+                  <m:oMathPara xmlns:m="http://schemas.openxmlformats.org/officeDocument/2006/math">
+                    <m:oMath>
+                      <m:r>
+                        <a:rPr lang="en-US" sz="3600" i="1" smtClean="0">
+                          <a:latin typeface="Cambria Math" panose="02040503050406030204" pitchFamily="18" charset="0"/>
+                          <a:ea typeface="Cambria Math" panose="02040503050406030204" pitchFamily="18" charset="0"/>
+                        </a:rPr>
+                        <m:t>≈</m:t>
+                      </m:r>
+                    </m:oMath>
+                  </m:oMathPara>
+                </a14:m>
+                <a:endParaRPr lang="en-US" sz="3600" dirty="0"/>
+              </a:p>
+            </p:txBody>
+          </p:sp>
+        </mc:Choice>
+        <mc:Fallback xmlns="">
+          <p:sp>
+            <p:nvSpPr>
+              <p:cNvPr id="12" name="Retângulo 11"/>
+              <p:cNvSpPr>
+                <a:spLocks noRot="1" noChangeAspect="1" noMove="1" noResize="1" noEditPoints="1" noAdjustHandles="1" noChangeArrowheads="1" noChangeShapeType="1" noTextEdit="1"/>
+              </p:cNvSpPr>
+              <p:nvPr/>
+            </p:nvSpPr>
+            <p:spPr>
+              <a:xfrm>
+                <a:off x="6338855" y="2998696"/>
+                <a:ext cx="628698" cy="646331"/>
+              </a:xfrm>
+              <a:prstGeom prst="rect">
+                <a:avLst/>
+              </a:prstGeom>
+              <a:blipFill rotWithShape="0">
+                <a:blip r:embed="rId6"/>
+                <a:stretch>
+                  <a:fillRect/>
+                </a:stretch>
+              </a:blipFill>
+            </p:spPr>
+            <p:txBody>
+              <a:bodyPr/>
+              <a:lstStyle/>
+              <a:p>
+                <a:r>
+                  <a:rPr lang="pt-BR">
+                    <a:noFill/>
+                  </a:rPr>
+                  <a:t> </a:t>
+                </a:r>
+              </a:p>
+            </p:txBody>
+          </p:sp>
+        </mc:Fallback>
+      </mc:AlternateContent>
+      <mc:AlternateContent xmlns:mc="http://schemas.openxmlformats.org/markup-compatibility/2006" xmlns:a14="http://schemas.microsoft.com/office/drawing/2010/main">
+        <mc:Choice Requires="a14">
+          <p:sp>
+            <p:nvSpPr>
+              <p:cNvPr id="14" name="Retângulo 13"/>
+              <p:cNvSpPr/>
+              <p:nvPr/>
+            </p:nvSpPr>
+            <p:spPr>
+              <a:xfrm>
+                <a:off x="3600287" y="2169865"/>
+                <a:ext cx="1678793" cy="556434"/>
+              </a:xfrm>
+              <a:prstGeom prst="rect">
+                <a:avLst/>
+              </a:prstGeom>
+            </p:spPr>
+            <p:txBody>
+              <a:bodyPr wrap="none">
+                <a:spAutoFit/>
+              </a:bodyPr>
+              <a:lstStyle/>
+              <a:p>
+                <a:pPr/>
+                <a14:m>
+                  <m:oMathPara xmlns:m="http://schemas.openxmlformats.org/officeDocument/2006/math">
+                    <m:oMath>
+                      <m:sSub>
+                        <m:sSubPr>
+                          <m:ctrlPr>
+                            <a:rPr lang="pt-BR" sz="2800" b="0" i="1" smtClean="0">
+                              <a:latin typeface="Cambria Math" panose="02040503050406030204" pitchFamily="18" charset="0"/>
+                            </a:rPr>
+                          </m:ctrlPr>
+                        </m:sSubPr>
+                        <m:e>
+                          <m:r>
+                            <a:rPr lang="pt-BR" sz="2800" b="0" i="1" smtClean="0">
+                              <a:latin typeface="Cambria Math" panose="02040503050406030204" pitchFamily="18" charset="0"/>
+                            </a:rPr>
+                            <m:t>𝑦</m:t>
+                          </m:r>
+                        </m:e>
+                        <m:sub>
+                          <m:r>
+                            <a:rPr lang="pt-BR" sz="2800" b="0" i="1" smtClean="0">
+                              <a:latin typeface="Cambria Math" panose="02040503050406030204" pitchFamily="18" charset="0"/>
+                            </a:rPr>
+                            <m:t>𝑒𝑠𝑝𝑒𝑟𝑎𝑑𝑜</m:t>
+                          </m:r>
+                        </m:sub>
+                      </m:sSub>
+                    </m:oMath>
+                  </m:oMathPara>
+                </a14:m>
+                <a:endParaRPr lang="en-US" sz="2800" dirty="0"/>
+              </a:p>
+            </p:txBody>
+          </p:sp>
+        </mc:Choice>
+        <mc:Fallback xmlns="">
+          <p:sp>
+            <p:nvSpPr>
+              <p:cNvPr id="14" name="Retângulo 13"/>
+              <p:cNvSpPr>
+                <a:spLocks noRot="1" noChangeAspect="1" noMove="1" noResize="1" noEditPoints="1" noAdjustHandles="1" noChangeArrowheads="1" noChangeShapeType="1" noTextEdit="1"/>
+              </p:cNvSpPr>
+              <p:nvPr/>
+            </p:nvSpPr>
+            <p:spPr>
+              <a:xfrm>
+                <a:off x="3600287" y="2169865"/>
+                <a:ext cx="1678793" cy="556434"/>
+              </a:xfrm>
+              <a:prstGeom prst="rect">
+                <a:avLst/>
+              </a:prstGeom>
+              <a:blipFill rotWithShape="0">
+                <a:blip r:embed="rId7"/>
+                <a:stretch>
+                  <a:fillRect/>
+                </a:stretch>
+              </a:blipFill>
+            </p:spPr>
+            <p:txBody>
+              <a:bodyPr/>
+              <a:lstStyle/>
+              <a:p>
+                <a:r>
+                  <a:rPr lang="pt-BR">
+                    <a:noFill/>
+                  </a:rPr>
+                  <a:t> </a:t>
+                </a:r>
+              </a:p>
+            </p:txBody>
+          </p:sp>
+        </mc:Fallback>
+      </mc:AlternateContent>
+      <p:sp>
+        <p:nvSpPr>
+          <p:cNvPr id="15" name="Elipse 14"/>
+          <p:cNvSpPr/>
+          <p:nvPr/>
+        </p:nvSpPr>
+        <p:spPr>
+          <a:xfrm>
+            <a:off x="4210420" y="3087861"/>
+            <a:ext cx="468000" cy="468000"/>
+          </a:xfrm>
+          <a:prstGeom prst="ellipse">
+            <a:avLst/>
+          </a:prstGeom>
+          <a:noFill/>
+          <a:ln w="28575">
+            <a:solidFill>
+              <a:schemeClr val="tx1"/>
+            </a:solidFill>
+          </a:ln>
+        </p:spPr>
+        <p:style>
+          <a:lnRef idx="2">
+            <a:schemeClr val="accent1">
+              <a:shade val="50000"/>
+            </a:schemeClr>
+          </a:lnRef>
+          <a:fillRef idx="1">
+            <a:schemeClr val="accent1"/>
+          </a:fillRef>
+          <a:effectRef idx="0">
+            <a:schemeClr val="accent1"/>
+          </a:effectRef>
+          <a:fontRef idx="minor">
+            <a:schemeClr val="lt1"/>
+          </a:fontRef>
+        </p:style>
+        <p:txBody>
+          <a:bodyPr rtlCol="0" anchor="ctr"/>
+          <a:lstStyle/>
+          <a:p>
+            <a:pPr algn="ctr"/>
+            <a:endParaRPr lang="pt-BR"/>
+          </a:p>
+        </p:txBody>
+      </p:sp>
+      <p:sp>
+        <p:nvSpPr>
+          <p:cNvPr id="16" name="Menos 15"/>
+          <p:cNvSpPr/>
+          <p:nvPr/>
+        </p:nvSpPr>
+        <p:spPr>
+          <a:xfrm>
+            <a:off x="4280122" y="3183791"/>
+            <a:ext cx="328311" cy="276139"/>
+          </a:xfrm>
+          <a:prstGeom prst="mathMinus">
+            <a:avLst/>
+          </a:prstGeom>
+        </p:spPr>
+        <p:style>
+          <a:lnRef idx="2">
+            <a:schemeClr val="dk1">
+              <a:shade val="50000"/>
+            </a:schemeClr>
+          </a:lnRef>
+          <a:fillRef idx="1">
+            <a:schemeClr val="dk1"/>
+          </a:fillRef>
+          <a:effectRef idx="0">
+            <a:schemeClr val="dk1"/>
+          </a:effectRef>
+          <a:fontRef idx="minor">
+            <a:schemeClr val="lt1"/>
+          </a:fontRef>
+        </p:style>
+        <p:txBody>
+          <a:bodyPr rtlCol="0" anchor="ctr"/>
+          <a:lstStyle/>
+          <a:p>
+            <a:pPr algn="ctr"/>
+            <a:endParaRPr lang="pt-BR"/>
+          </a:p>
+        </p:txBody>
+      </p:sp>
+      <mc:AlternateContent xmlns:mc="http://schemas.openxmlformats.org/markup-compatibility/2006" xmlns:a14="http://schemas.microsoft.com/office/drawing/2010/main">
+        <mc:Choice Requires="a14">
+          <p:sp>
+            <p:nvSpPr>
+              <p:cNvPr id="18" name="Retângulo 17"/>
+              <p:cNvSpPr/>
+              <p:nvPr/>
+            </p:nvSpPr>
+            <p:spPr>
+              <a:xfrm>
+                <a:off x="4970918" y="3016979"/>
+                <a:ext cx="986039" cy="523220"/>
+              </a:xfrm>
+              <a:prstGeom prst="rect">
+                <a:avLst/>
+              </a:prstGeom>
+            </p:spPr>
+            <p:txBody>
+              <a:bodyPr wrap="none">
+                <a:spAutoFit/>
+              </a:bodyPr>
+              <a:lstStyle/>
+              <a:p>
+                <a:pPr/>
+                <a14:m>
+                  <m:oMathPara xmlns:m="http://schemas.openxmlformats.org/officeDocument/2006/math">
+                    <m:oMath>
+                      <m:r>
+                        <a:rPr lang="pt-BR" sz="2800" b="0" i="1" smtClean="0">
+                          <a:latin typeface="Cambria Math" panose="02040503050406030204" pitchFamily="18" charset="0"/>
+                        </a:rPr>
+                        <m:t>𝑒𝑟𝑟𝑜</m:t>
+                      </m:r>
+                    </m:oMath>
+                  </m:oMathPara>
+                </a14:m>
+                <a:endParaRPr lang="en-US" sz="2800" dirty="0"/>
+              </a:p>
+            </p:txBody>
+          </p:sp>
+        </mc:Choice>
+        <mc:Fallback xmlns="">
+          <p:sp>
+            <p:nvSpPr>
+              <p:cNvPr id="18" name="Retângulo 17"/>
+              <p:cNvSpPr>
+                <a:spLocks noRot="1" noChangeAspect="1" noMove="1" noResize="1" noEditPoints="1" noAdjustHandles="1" noChangeArrowheads="1" noChangeShapeType="1" noTextEdit="1"/>
+              </p:cNvSpPr>
+              <p:nvPr/>
+            </p:nvSpPr>
+            <p:spPr>
+              <a:xfrm>
+                <a:off x="4970918" y="3016979"/>
+                <a:ext cx="986039" cy="523220"/>
+              </a:xfrm>
+              <a:prstGeom prst="rect">
+                <a:avLst/>
+              </a:prstGeom>
+              <a:blipFill rotWithShape="0">
+                <a:blip r:embed="rId8"/>
+                <a:stretch>
+                  <a:fillRect/>
+                </a:stretch>
+              </a:blipFill>
+            </p:spPr>
+            <p:txBody>
+              <a:bodyPr/>
+              <a:lstStyle/>
+              <a:p>
+                <a:r>
+                  <a:rPr lang="pt-BR">
+                    <a:noFill/>
+                  </a:rPr>
+                  <a:t> </a:t>
+                </a:r>
+              </a:p>
+            </p:txBody>
+          </p:sp>
+        </mc:Fallback>
+      </mc:AlternateContent>
+      <p:cxnSp>
+        <p:nvCxnSpPr>
+          <p:cNvPr id="20" name="Conector de seta reta 19"/>
+          <p:cNvCxnSpPr>
+            <a:stCxn id="5" idx="3"/>
+            <a:endCxn id="15" idx="2"/>
+          </p:cNvCxnSpPr>
+          <p:nvPr/>
+        </p:nvCxnSpPr>
+        <p:spPr>
+          <a:xfrm flipV="1">
+            <a:off x="3199693" y="3321861"/>
+            <a:ext cx="1010727" cy="5938"/>
+          </a:xfrm>
+          <a:prstGeom prst="straightConnector1">
+            <a:avLst/>
+          </a:prstGeom>
+          <a:ln>
+            <a:solidFill>
+              <a:schemeClr val="tx1"/>
+            </a:solidFill>
+            <a:tailEnd type="triangle"/>
+          </a:ln>
+        </p:spPr>
+        <p:style>
+          <a:lnRef idx="1">
+            <a:schemeClr val="accent1"/>
+          </a:lnRef>
+          <a:fillRef idx="0">
+            <a:schemeClr val="accent1"/>
+          </a:fillRef>
+          <a:effectRef idx="0">
+            <a:schemeClr val="accent1"/>
+          </a:effectRef>
+          <a:fontRef idx="minor">
+            <a:schemeClr val="tx1"/>
+          </a:fontRef>
+        </p:style>
+      </p:cxnSp>
+      <p:cxnSp>
+        <p:nvCxnSpPr>
+          <p:cNvPr id="22" name="Conector de seta reta 21"/>
+          <p:cNvCxnSpPr>
+            <a:stCxn id="14" idx="2"/>
+            <a:endCxn id="15" idx="0"/>
+          </p:cNvCxnSpPr>
+          <p:nvPr/>
+        </p:nvCxnSpPr>
+        <p:spPr>
+          <a:xfrm>
+            <a:off x="4439684" y="2726299"/>
+            <a:ext cx="4736" cy="361562"/>
+          </a:xfrm>
+          <a:prstGeom prst="straightConnector1">
+            <a:avLst/>
+          </a:prstGeom>
+          <a:ln>
+            <a:solidFill>
+              <a:schemeClr val="tx1"/>
+            </a:solidFill>
+            <a:tailEnd type="triangle"/>
+          </a:ln>
+        </p:spPr>
+        <p:style>
+          <a:lnRef idx="1">
+            <a:schemeClr val="accent1"/>
+          </a:lnRef>
+          <a:fillRef idx="0">
+            <a:schemeClr val="accent1"/>
+          </a:fillRef>
+          <a:effectRef idx="0">
+            <a:schemeClr val="accent1"/>
+          </a:effectRef>
+          <a:fontRef idx="minor">
+            <a:schemeClr val="tx1"/>
+          </a:fontRef>
+        </p:style>
+      </p:cxnSp>
+      <p:cxnSp>
+        <p:nvCxnSpPr>
+          <p:cNvPr id="27" name="Conector de seta reta 26"/>
+          <p:cNvCxnSpPr/>
+          <p:nvPr/>
+        </p:nvCxnSpPr>
+        <p:spPr>
+          <a:xfrm flipV="1">
+            <a:off x="4700318" y="3321861"/>
+            <a:ext cx="360000" cy="1"/>
+          </a:xfrm>
+          <a:prstGeom prst="straightConnector1">
+            <a:avLst/>
+          </a:prstGeom>
+          <a:ln>
+            <a:solidFill>
+              <a:schemeClr val="tx1"/>
+            </a:solidFill>
+            <a:tailEnd type="triangle"/>
+          </a:ln>
+        </p:spPr>
+        <p:style>
+          <a:lnRef idx="1">
+            <a:schemeClr val="accent1"/>
+          </a:lnRef>
+          <a:fillRef idx="0">
+            <a:schemeClr val="accent1"/>
+          </a:fillRef>
+          <a:effectRef idx="0">
+            <a:schemeClr val="accent1"/>
+          </a:effectRef>
+          <a:fontRef idx="minor">
+            <a:schemeClr val="tx1"/>
+          </a:fontRef>
+        </p:style>
+      </p:cxnSp>
+      <p:cxnSp>
+        <p:nvCxnSpPr>
+          <p:cNvPr id="34" name="Conector angulado 33"/>
+          <p:cNvCxnSpPr>
+            <a:stCxn id="18" idx="2"/>
+          </p:cNvCxnSpPr>
+          <p:nvPr/>
+        </p:nvCxnSpPr>
+        <p:spPr>
+          <a:xfrm rot="5400000">
+            <a:off x="3039029" y="2060004"/>
+            <a:ext cx="944715" cy="3905104"/>
+          </a:xfrm>
+          <a:prstGeom prst="bentConnector2">
+            <a:avLst/>
+          </a:prstGeom>
+          <a:ln>
+            <a:solidFill>
+              <a:schemeClr val="tx1"/>
+            </a:solidFill>
+            <a:prstDash val="dash"/>
+            <a:headEnd type="none" w="med" len="med"/>
+            <a:tailEnd type="none" w="med" len="med"/>
+          </a:ln>
+        </p:spPr>
+        <p:style>
+          <a:lnRef idx="1">
+            <a:schemeClr val="accent1"/>
+          </a:lnRef>
+          <a:fillRef idx="0">
+            <a:schemeClr val="accent1"/>
+          </a:fillRef>
+          <a:effectRef idx="0">
+            <a:schemeClr val="accent1"/>
+          </a:effectRef>
+          <a:fontRef idx="minor">
+            <a:schemeClr val="tx1"/>
+          </a:fontRef>
+        </p:style>
+      </p:cxnSp>
+      <p:cxnSp>
+        <p:nvCxnSpPr>
+          <p:cNvPr id="36" name="Conector de seta reta 35"/>
+          <p:cNvCxnSpPr/>
+          <p:nvPr/>
+        </p:nvCxnSpPr>
+        <p:spPr>
+          <a:xfrm flipV="1">
+            <a:off x="1547239" y="2088150"/>
+            <a:ext cx="1478069" cy="2393451"/>
+          </a:xfrm>
+          <a:prstGeom prst="straightConnector1">
+            <a:avLst/>
+          </a:prstGeom>
+          <a:ln>
+            <a:solidFill>
+              <a:schemeClr val="tx1"/>
+            </a:solidFill>
+            <a:prstDash val="dash"/>
+            <a:tailEnd type="triangle"/>
+          </a:ln>
+        </p:spPr>
+        <p:style>
+          <a:lnRef idx="1">
+            <a:schemeClr val="accent1"/>
+          </a:lnRef>
+          <a:fillRef idx="0">
+            <a:schemeClr val="accent1"/>
+          </a:fillRef>
+          <a:effectRef idx="0">
+            <a:schemeClr val="accent1"/>
+          </a:effectRef>
+          <a:fontRef idx="minor">
+            <a:schemeClr val="tx1"/>
+          </a:fontRef>
+        </p:style>
+      </p:cxnSp>
+      <p:sp>
+        <p:nvSpPr>
+          <p:cNvPr id="7" name="Retângulo 6">
+            <a:extLst>
+              <a:ext uri="{FF2B5EF4-FFF2-40B4-BE49-F238E27FC236}">
+                <a16:creationId xmlns:a16="http://schemas.microsoft.com/office/drawing/2014/main" id="{89C6F2DB-4F63-9370-1ABE-3E6486AFB9C3}"/>
+              </a:ext>
+            </a:extLst>
+          </p:cNvPr>
+          <p:cNvSpPr/>
+          <p:nvPr/>
+        </p:nvSpPr>
+        <p:spPr>
+          <a:xfrm>
+            <a:off x="1547239" y="1766442"/>
+            <a:ext cx="3227743" cy="400110"/>
+          </a:xfrm>
+          <a:prstGeom prst="rect">
+            <a:avLst/>
+          </a:prstGeom>
+        </p:spPr>
+        <p:txBody>
+          <a:bodyPr wrap="none">
+            <a:spAutoFit/>
+          </a:bodyPr>
+          <a:lstStyle/>
+          <a:p>
+            <a:r>
+              <a:rPr lang="pt-BR" sz="2000" b="1" dirty="0">
+                <a:solidFill>
+                  <a:srgbClr val="00B050"/>
+                </a:solidFill>
+              </a:rPr>
+              <a:t>Treinamento supervisionado</a:t>
+            </a:r>
+          </a:p>
+        </p:txBody>
+      </p:sp>
+    </p:spTree>
+    <p:extLst>
+      <p:ext uri="{BB962C8B-B14F-4D97-AF65-F5344CB8AC3E}">
+        <p14:creationId xmlns:p14="http://schemas.microsoft.com/office/powerpoint/2010/main" val="2524151315"/>
+      </p:ext>
+    </p:extLst>
+  </p:cSld>
+  <p:clrMapOvr>
+    <a:masterClrMapping/>
+  </p:clrMapOvr>
+</p:sld>
+</file>
+
 <file path=ppt/slides/slide2.xml><?xml version="1.0" encoding="utf-8"?>
 <p:sld xmlns:a="http://schemas.openxmlformats.org/drawingml/2006/main" xmlns:r="http://schemas.openxmlformats.org/officeDocument/2006/relationships" xmlns:p="http://schemas.openxmlformats.org/presentationml/2006/main">
   <p:cSld>
@@ -3058,7 +4469,7 @@
           <p:cNvPr id="2" name="Título 1">
             <a:extLst>
               <a:ext uri="{FF2B5EF4-FFF2-40B4-BE49-F238E27FC236}">
-                <a16:creationId xmlns:a16="http://schemas.microsoft.com/office/drawing/2014/main" xmlns="" id="{440ACFCC-0010-827E-604F-A60D3A5F07E6}"/>
+                <a16:creationId xmlns:a16="http://schemas.microsoft.com/office/drawing/2014/main" id="{440ACFCC-0010-827E-604F-A60D3A5F07E6}"/>
               </a:ext>
             </a:extLst>
           </p:cNvPr>
@@ -3088,7 +4499,7 @@
               <p:cNvPr id="3" name="Espaço Reservado para Conteúdo 2">
                 <a:extLst>
                   <a:ext uri="{FF2B5EF4-FFF2-40B4-BE49-F238E27FC236}">
-                    <a16:creationId xmlns:a16="http://schemas.microsoft.com/office/drawing/2014/main" xmlns="" id="{7788F1DE-0E28-0BA3-29BC-ABE4DC94443F}"/>
+                    <a16:creationId xmlns:a16="http://schemas.microsoft.com/office/drawing/2014/main" id="{7788F1DE-0E28-0BA3-29BC-ABE4DC94443F}"/>
                   </a:ext>
                 </a:extLst>
               </p:cNvPr>
@@ -3207,7 +4618,7 @@
                     <m:d>
                       <m:dPr>
                         <m:ctrlPr>
-                          <a:rPr lang="pt-BR" i="1">
+                          <a:rPr lang="pt-BR" b="1" i="1">
                             <a:latin typeface="Cambria Math" panose="02040503050406030204" pitchFamily="18" charset="0"/>
                           </a:rPr>
                         </m:ctrlPr>
@@ -3257,7 +4668,7 @@
                     <m:d>
                       <m:dPr>
                         <m:ctrlPr>
-                          <a:rPr lang="pt-BR" i="1">
+                          <a:rPr lang="pt-BR" b="1" i="1">
                             <a:latin typeface="Cambria Math" panose="02040503050406030204" pitchFamily="18" charset="0"/>
                           </a:rPr>
                         </m:ctrlPr>
@@ -3307,7 +4718,7 @@
                     <m:sSub>
                       <m:sSubPr>
                         <m:ctrlPr>
-                          <a:rPr lang="pt-BR" i="1">
+                          <a:rPr lang="pt-BR" i="1" smtClean="0">
                             <a:latin typeface="Cambria Math" panose="02040503050406030204" pitchFamily="18" charset="0"/>
                           </a:rPr>
                         </m:ctrlPr>
@@ -3316,7 +4727,7 @@
                         <m:sSub>
                           <m:sSubPr>
                             <m:ctrlPr>
-                              <a:rPr lang="pt-BR" i="1" smtClean="0">
+                              <a:rPr lang="pt-BR" b="0" i="1" smtClean="0">
                                 <a:latin typeface="Cambria Math" panose="02040503050406030204" pitchFamily="18" charset="0"/>
                               </a:rPr>
                             </m:ctrlPr>
@@ -3341,7 +4752,7 @@
                         <m:d>
                           <m:dPr>
                             <m:ctrlPr>
-                              <a:rPr lang="pt-BR" b="0" i="1" smtClean="0">
+                              <a:rPr lang="pt-BR" b="1" i="1" smtClean="0">
                                 <a:latin typeface="Cambria Math" panose="02040503050406030204" pitchFamily="18" charset="0"/>
                               </a:rPr>
                             </m:ctrlPr>
@@ -3576,7 +4987,7 @@
           <p:cNvPr id="4" name="Picture 4">
             <a:extLst>
               <a:ext uri="{FF2B5EF4-FFF2-40B4-BE49-F238E27FC236}">
-                <a16:creationId xmlns:a16="http://schemas.microsoft.com/office/drawing/2014/main" xmlns="" id="{9EEE6852-8EF8-5B56-C5DB-25BB718D4EB5}"/>
+                <a16:creationId xmlns:a16="http://schemas.microsoft.com/office/drawing/2014/main" id="{9EEE6852-8EF8-5B56-C5DB-25BB718D4EB5}"/>
               </a:ext>
             </a:extLst>
           </p:cNvPr>
@@ -3663,7 +5074,7 @@
                     <m:sSub>
                       <m:sSubPr>
                         <m:ctrlPr>
-                          <a:rPr lang="pt-BR" i="1" smtClean="0">
+                          <a:rPr lang="pt-BR" b="0" i="1" smtClean="0">
                             <a:latin typeface="Cambria Math" panose="02040503050406030204" pitchFamily="18" charset="0"/>
                           </a:rPr>
                         </m:ctrlPr>
@@ -3749,7 +5160,7 @@
           <p:cNvPr id="4" name="Agrupar 3">
             <a:extLst>
               <a:ext uri="{FF2B5EF4-FFF2-40B4-BE49-F238E27FC236}">
-                <a16:creationId xmlns:a16="http://schemas.microsoft.com/office/drawing/2014/main" xmlns="" id="{4DEC4497-8603-7324-292B-C4298E566650}"/>
+                <a16:creationId xmlns:a16="http://schemas.microsoft.com/office/drawing/2014/main" id="{4DEC4497-8603-7324-292B-C4298E566650}"/>
               </a:ext>
             </a:extLst>
           </p:cNvPr>
@@ -3871,14 +5282,11 @@
                   <a:pPr/>
                   <a14:m>
                     <m:oMathPara xmlns:m="http://schemas.openxmlformats.org/officeDocument/2006/math">
-                      <m:oMathParaPr>
-                        <m:jc m:val="centerGroup"/>
-                      </m:oMathParaPr>
-                      <m:oMath xmlns:m="http://schemas.openxmlformats.org/officeDocument/2006/math">
+                      <m:oMath>
                         <m:sSub>
                           <m:sSubPr>
                             <m:ctrlPr>
-                              <a:rPr lang="pt-BR" i="1" smtClean="0">
+                              <a:rPr lang="pt-BR" b="0" i="1" smtClean="0">
                                 <a:latin typeface="Cambria Math" panose="02040503050406030204" pitchFamily="18" charset="0"/>
                               </a:rPr>
                             </m:ctrlPr>
@@ -4034,14 +5442,11 @@
                   <a:pPr/>
                   <a14:m>
                     <m:oMathPara xmlns:m="http://schemas.openxmlformats.org/officeDocument/2006/math">
-                      <m:oMathParaPr>
-                        <m:jc m:val="centerGroup"/>
-                      </m:oMathParaPr>
-                      <m:oMath xmlns:m="http://schemas.openxmlformats.org/officeDocument/2006/math">
+                      <m:oMath>
                         <m:sSub>
                           <m:sSubPr>
                             <m:ctrlPr>
-                              <a:rPr lang="pt-BR" i="1" smtClean="0">
+                              <a:rPr lang="pt-BR" b="0" i="1" smtClean="0">
                                 <a:latin typeface="Cambria Math" panose="02040503050406030204" pitchFamily="18" charset="0"/>
                               </a:rPr>
                             </m:ctrlPr>
@@ -4159,14 +5564,11 @@
                   <a:pPr/>
                   <a14:m>
                     <m:oMathPara xmlns:m="http://schemas.openxmlformats.org/officeDocument/2006/math">
-                      <m:oMathParaPr>
-                        <m:jc m:val="centerGroup"/>
-                      </m:oMathParaPr>
-                      <m:oMath xmlns:m="http://schemas.openxmlformats.org/officeDocument/2006/math">
+                      <m:oMath>
                         <m:sSub>
                           <m:sSubPr>
                             <m:ctrlPr>
-                              <a:rPr lang="pt-BR" i="1" smtClean="0">
+                              <a:rPr lang="pt-BR" b="0" i="1" smtClean="0">
                                 <a:latin typeface="Cambria Math" panose="02040503050406030204" pitchFamily="18" charset="0"/>
                               </a:rPr>
                             </m:ctrlPr>
@@ -4259,14 +5661,14 @@
           </mc:Fallback>
         </mc:AlternateContent>
       </p:grpSp>
-      <mc:AlternateContent xmlns:mc="http://schemas.openxmlformats.org/markup-compatibility/2006" xmlns:a14="http://schemas.microsoft.com/office/drawing/2010/main">
-        <mc:Choice Requires="a14">
+      <mc:AlternateContent xmlns:mc="http://schemas.openxmlformats.org/markup-compatibility/2006">
+        <mc:Choice xmlns:a14="http://schemas.microsoft.com/office/drawing/2010/main" Requires="a14">
           <p:sp>
             <p:nvSpPr>
               <p:cNvPr id="3" name="Espaço Reservado para Conteúdo 2">
                 <a:extLst>
                   <a:ext uri="{FF2B5EF4-FFF2-40B4-BE49-F238E27FC236}">
-                    <a16:creationId xmlns:a16="http://schemas.microsoft.com/office/drawing/2014/main" xmlns="" id="{91E224F6-D964-96CA-FD1A-13C692AEC7D4}"/>
+                    <a16:creationId xmlns:a16="http://schemas.microsoft.com/office/drawing/2014/main" id="{91E224F6-D964-96CA-FD1A-13C692AEC7D4}"/>
                   </a:ext>
                 </a:extLst>
               </p:cNvPr>
@@ -4280,7 +5682,7 @@
             <p:spPr>
               <a:xfrm>
                 <a:off x="5274367" y="1825624"/>
-                <a:ext cx="6768281" cy="5032375"/>
+                <a:ext cx="6917633" cy="5032375"/>
               </a:xfrm>
             </p:spPr>
             <p:txBody>
@@ -4302,7 +5704,7 @@
                     <m:sSub>
                       <m:sSubPr>
                         <m:ctrlPr>
-                          <a:rPr lang="pt-BR" i="1" smtClean="0">
+                          <a:rPr lang="pt-BR" b="0" i="1" smtClean="0">
                             <a:latin typeface="Cambria Math" panose="02040503050406030204" pitchFamily="18" charset="0"/>
                           </a:rPr>
                         </m:ctrlPr>
@@ -4346,7 +5748,31 @@
                 </a14:m>
                 <a:r>
                   <a:rPr lang="pt-BR" dirty="0"/>
-                  <a:t> primeiro, pois ela separa a classe 0 perfeitamente das outras duas (1 e 2).</a:t>
+                  <a:t> </a:t>
+                </a:r>
+                <a:r>
+                  <a:rPr lang="pt-BR" b="1" dirty="0">
+                    <a:solidFill>
+                      <a:schemeClr val="accent2"/>
+                    </a:solidFill>
+                  </a:rPr>
+                  <a:t>primeiro</a:t>
+                </a:r>
+                <a:r>
+                  <a:rPr lang="pt-BR" dirty="0"/>
+                  <a:t>, pois ela </a:t>
+                </a:r>
+                <a:r>
+                  <a:rPr lang="pt-BR" b="1" dirty="0">
+                    <a:solidFill>
+                      <a:srgbClr val="00B050"/>
+                    </a:solidFill>
+                  </a:rPr>
+                  <a:t>separa a classe 0 perfeitamente </a:t>
+                </a:r>
+                <a:r>
+                  <a:rPr lang="pt-BR" dirty="0"/>
+                  <a:t>das outras duas (1 e 2).</a:t>
                 </a:r>
               </a:p>
               <a:p>
@@ -4373,14 +5799,11 @@
                 </a:pPr>
                 <a14:m>
                   <m:oMathPara xmlns:m="http://schemas.openxmlformats.org/officeDocument/2006/math">
-                    <m:oMathParaPr>
-                      <m:jc m:val="centerGroup"/>
-                    </m:oMathParaPr>
-                    <m:oMath xmlns:m="http://schemas.openxmlformats.org/officeDocument/2006/math">
+                    <m:oMath>
                       <m:sSub>
                         <m:sSubPr>
                           <m:ctrlPr>
-                            <a:rPr lang="pt-BR" i="1" smtClean="0">
+                            <a:rPr lang="pt-BR" b="0" i="1" smtClean="0">
                               <a:latin typeface="Cambria Math" panose="02040503050406030204" pitchFamily="18" charset="0"/>
                             </a:rPr>
                           </m:ctrlPr>
@@ -4405,7 +5828,7 @@
                       <m:d>
                         <m:dPr>
                           <m:ctrlPr>
-                            <a:rPr lang="pt-BR" b="0" i="1" smtClean="0">
+                            <a:rPr lang="pt-BR" b="1" i="1" smtClean="0">
                               <a:latin typeface="Cambria Math" panose="02040503050406030204" pitchFamily="18" charset="0"/>
                             </a:rPr>
                           </m:ctrlPr>
@@ -4587,7 +6010,7 @@
                     <m:sSub>
                       <m:sSubPr>
                         <m:ctrlPr>
-                          <a:rPr lang="pt-BR" sz="1700" i="1">
+                          <a:rPr lang="pt-BR" sz="1700" b="0" i="1" smtClean="0">
                             <a:latin typeface="Cambria Math" panose="02040503050406030204" pitchFamily="18" charset="0"/>
                           </a:rPr>
                         </m:ctrlPr>
@@ -4596,7 +6019,7 @@
                         <m:d>
                           <m:dPr>
                             <m:ctrlPr>
-                              <a:rPr lang="pt-BR" sz="1700" b="0" i="1" smtClean="0">
+                              <a:rPr lang="pt-BR" sz="1700" i="1">
                                 <a:latin typeface="Cambria Math" panose="02040503050406030204" pitchFamily="18" charset="0"/>
                               </a:rPr>
                             </m:ctrlPr>
@@ -4704,7 +6127,7 @@
                     <m:sSub>
                       <m:sSubPr>
                         <m:ctrlPr>
-                          <a:rPr lang="pt-BR" sz="1700" i="1">
+                          <a:rPr lang="pt-BR" sz="1700" b="0" i="1" smtClean="0">
                             <a:latin typeface="Cambria Math" panose="02040503050406030204" pitchFamily="18" charset="0"/>
                           </a:rPr>
                         </m:ctrlPr>
@@ -4811,7 +6234,7 @@
                     <m:sSub>
                       <m:sSubPr>
                         <m:ctrlPr>
-                          <a:rPr lang="pt-BR" sz="1700" i="1">
+                          <a:rPr lang="pt-BR" sz="1700" b="0" i="1" smtClean="0">
                             <a:latin typeface="Cambria Math" panose="02040503050406030204" pitchFamily="18" charset="0"/>
                           </a:rPr>
                         </m:ctrlPr>
@@ -4820,7 +6243,7 @@
                         <m:d>
                           <m:dPr>
                             <m:ctrlPr>
-                              <a:rPr lang="pt-BR" sz="1700" b="0" i="1" smtClean="0">
+                              <a:rPr lang="pt-BR" sz="1700" i="1">
                                 <a:latin typeface="Cambria Math" panose="02040503050406030204" pitchFamily="18" charset="0"/>
                               </a:rPr>
                             </m:ctrlPr>
@@ -4977,7 +6400,7 @@
                     <m:sSub>
                       <m:sSubPr>
                         <m:ctrlPr>
-                          <a:rPr lang="pt-BR" sz="1700" i="1">
+                          <a:rPr lang="pt-BR" sz="1700" b="0" i="1" smtClean="0">
                             <a:latin typeface="Cambria Math" panose="02040503050406030204" pitchFamily="18" charset="0"/>
                           </a:rPr>
                         </m:ctrlPr>
@@ -5046,7 +6469,7 @@
                     <m:d>
                       <m:dPr>
                         <m:ctrlPr>
-                          <a:rPr lang="pt-BR" sz="1700" b="0" i="1" smtClean="0">
+                          <a:rPr lang="pt-BR" sz="1700" i="1">
                             <a:latin typeface="Cambria Math" panose="02040503050406030204" pitchFamily="18" charset="0"/>
                           </a:rPr>
                         </m:ctrlPr>
@@ -5267,7 +6690,7 @@
                     <m:sSub>
                       <m:sSubPr>
                         <m:ctrlPr>
-                          <a:rPr lang="pt-BR" sz="1700" i="1" smtClean="0">
+                          <a:rPr lang="pt-BR" sz="1700" b="0" i="1" smtClean="0">
                             <a:latin typeface="Cambria Math" panose="02040503050406030204" pitchFamily="18" charset="0"/>
                           </a:rPr>
                         </m:ctrlPr>
@@ -5583,14 +7006,11 @@
                 </a:pPr>
                 <a14:m>
                   <m:oMathPara xmlns:m="http://schemas.openxmlformats.org/officeDocument/2006/math">
-                    <m:oMathParaPr>
-                      <m:jc m:val="centerGroup"/>
-                    </m:oMathParaPr>
-                    <m:oMath xmlns:m="http://schemas.openxmlformats.org/officeDocument/2006/math">
+                    <m:oMath>
                       <m:sSub>
                         <m:sSubPr>
                           <m:ctrlPr>
-                            <a:rPr lang="pt-BR" i="1" smtClean="0">
+                            <a:rPr lang="pt-BR" b="0" i="1" smtClean="0">
                               <a:latin typeface="Cambria Math" panose="02040503050406030204" pitchFamily="18" charset="0"/>
                             </a:rPr>
                           </m:ctrlPr>
@@ -5615,7 +7035,7 @@
                       <m:d>
                         <m:dPr>
                           <m:ctrlPr>
-                            <a:rPr lang="pt-BR" b="0" i="1" smtClean="0">
+                            <a:rPr lang="pt-BR" b="1" i="1" smtClean="0">
                               <a:latin typeface="Cambria Math" panose="02040503050406030204" pitchFamily="18" charset="0"/>
                             </a:rPr>
                           </m:ctrlPr>
@@ -5712,7 +7132,7 @@
                     <m:sSub>
                       <m:sSubPr>
                         <m:ctrlPr>
-                          <a:rPr lang="pt-BR" i="1" smtClean="0">
+                          <a:rPr lang="pt-BR" b="0" i="1" smtClean="0">
                             <a:latin typeface="Cambria Math" panose="02040503050406030204" pitchFamily="18" charset="0"/>
                           </a:rPr>
                         </m:ctrlPr>
@@ -5737,7 +7157,7 @@
                     <m:d>
                       <m:dPr>
                         <m:ctrlPr>
-                          <a:rPr lang="pt-BR" b="0" i="1" smtClean="0">
+                          <a:rPr lang="pt-BR" b="1" i="1" smtClean="0">
                             <a:latin typeface="Cambria Math" panose="02040503050406030204" pitchFamily="18" charset="0"/>
                           </a:rPr>
                         </m:ctrlPr>
@@ -5755,13 +7175,25 @@
                 </a14:m>
                 <a:r>
                   <a:rPr lang="pt-BR" dirty="0"/>
-                  <a:t>, encontramos as regiões das duas classes que ela separa: classe 0 e a união das classes 1 e 2.</a:t>
+                  <a:t>, encontramos as regiões das duas classes que ela separa: classe 0 e a </a:t>
+                </a:r>
+                <a:r>
+                  <a:rPr lang="pt-BR" b="1" dirty="0">
+                    <a:solidFill>
+                      <a:srgbClr val="7030A0"/>
+                    </a:solidFill>
+                  </a:rPr>
+                  <a:t>união</a:t>
+                </a:r>
+                <a:r>
+                  <a:rPr lang="pt-BR" dirty="0"/>
+                  <a:t> das classes 1 e 2.</a:t>
                 </a:r>
               </a:p>
             </p:txBody>
           </p:sp>
         </mc:Choice>
-        <mc:Fallback xmlns="">
+        <mc:Fallback>
           <p:sp>
             <p:nvSpPr>
               <p:cNvPr id="3" name="Espaço Reservado para Conteúdo 2">
@@ -5781,12 +7213,12 @@
             <p:spPr>
               <a:xfrm>
                 <a:off x="5274367" y="1825624"/>
-                <a:ext cx="6768281" cy="5032375"/>
+                <a:ext cx="6917633" cy="5032375"/>
               </a:xfrm>
               <a:blipFill>
                 <a:blip r:embed="rId7"/>
                 <a:stretch>
-                  <a:fillRect l="-1350" t="-3027" r="-1170" b="-2058"/>
+                  <a:fillRect l="-1322" t="-3027" r="-2203" b="-2058"/>
                 </a:stretch>
               </a:blipFill>
             </p:spPr>
@@ -5795,7 +7227,7 @@
               <a:lstStyle/>
               <a:p>
                 <a:r>
-                  <a:rPr lang="pt-BR">
+                  <a:rPr lang="en-US">
                     <a:noFill/>
                   </a:rPr>
                   <a:t> </a:t>
@@ -5842,7 +7274,7 @@
               <p:cNvPr id="2" name="Título 1">
                 <a:extLst>
                   <a:ext uri="{FF2B5EF4-FFF2-40B4-BE49-F238E27FC236}">
-                    <a16:creationId xmlns:a16="http://schemas.microsoft.com/office/drawing/2014/main" xmlns="" id="{B39BFB32-1BA5-2CF6-363B-0929BBCB34E9}"/>
+                    <a16:creationId xmlns:a16="http://schemas.microsoft.com/office/drawing/2014/main" id="{B39BFB32-1BA5-2CF6-363B-0929BBCB34E9}"/>
                   </a:ext>
                 </a:extLst>
               </p:cNvPr>
@@ -5867,7 +7299,7 @@
                     <m:sSub>
                       <m:sSubPr>
                         <m:ctrlPr>
-                          <a:rPr lang="pt-BR" i="1" smtClean="0">
+                          <a:rPr lang="pt-BR" b="0" i="1" smtClean="0">
                             <a:latin typeface="Cambria Math" panose="02040503050406030204" pitchFamily="18" charset="0"/>
                           </a:rPr>
                         </m:ctrlPr>
@@ -5961,7 +7393,7 @@
               <p:cNvPr id="3" name="Espaço Reservado para Conteúdo 2">
                 <a:extLst>
                   <a:ext uri="{FF2B5EF4-FFF2-40B4-BE49-F238E27FC236}">
-                    <a16:creationId xmlns:a16="http://schemas.microsoft.com/office/drawing/2014/main" xmlns="" id="{D7290504-067B-0E2C-4C67-E1B8BAB5A122}"/>
+                    <a16:creationId xmlns:a16="http://schemas.microsoft.com/office/drawing/2014/main" id="{D7290504-067B-0E2C-4C67-E1B8BAB5A122}"/>
                   </a:ext>
                 </a:extLst>
               </p:cNvPr>
@@ -5997,7 +7429,7 @@
                     <m:sSub>
                       <m:sSubPr>
                         <m:ctrlPr>
-                          <a:rPr lang="pt-BR" i="1" smtClean="0">
+                          <a:rPr lang="pt-BR" b="0" i="1" smtClean="0">
                             <a:latin typeface="Cambria Math" panose="02040503050406030204" pitchFamily="18" charset="0"/>
                           </a:rPr>
                         </m:ctrlPr>
@@ -6068,14 +7500,11 @@
                 </a:pPr>
                 <a14:m>
                   <m:oMathPara xmlns:m="http://schemas.openxmlformats.org/officeDocument/2006/math">
-                    <m:oMathParaPr>
-                      <m:jc m:val="centerGroup"/>
-                    </m:oMathParaPr>
-                    <m:oMath xmlns:m="http://schemas.openxmlformats.org/officeDocument/2006/math">
+                    <m:oMath>
                       <m:sSub>
                         <m:sSubPr>
                           <m:ctrlPr>
-                            <a:rPr lang="pt-BR" i="1" smtClean="0">
+                            <a:rPr lang="pt-BR" b="0" i="1" smtClean="0">
                               <a:latin typeface="Cambria Math" panose="02040503050406030204" pitchFamily="18" charset="0"/>
                             </a:rPr>
                           </m:ctrlPr>
@@ -6100,7 +7529,7 @@
                       <m:d>
                         <m:dPr>
                           <m:ctrlPr>
-                            <a:rPr lang="pt-BR" b="0" i="1" smtClean="0">
+                            <a:rPr lang="pt-BR" b="1" i="1" smtClean="0">
                               <a:latin typeface="Cambria Math" panose="02040503050406030204" pitchFamily="18" charset="0"/>
                             </a:rPr>
                           </m:ctrlPr>
@@ -6282,7 +7711,7 @@
                     <m:sSub>
                       <m:sSubPr>
                         <m:ctrlPr>
-                          <a:rPr lang="pt-BR" sz="2200" i="1">
+                          <a:rPr lang="pt-BR" sz="2200" b="0" i="1" smtClean="0">
                             <a:latin typeface="Cambria Math" panose="02040503050406030204" pitchFamily="18" charset="0"/>
                           </a:rPr>
                         </m:ctrlPr>
@@ -6291,7 +7720,7 @@
                         <m:d>
                           <m:dPr>
                             <m:ctrlPr>
-                              <a:rPr lang="pt-BR" sz="2200" b="0" i="1" smtClean="0">
+                              <a:rPr lang="pt-BR" sz="2200" i="1">
                                 <a:latin typeface="Cambria Math" panose="02040503050406030204" pitchFamily="18" charset="0"/>
                               </a:rPr>
                             </m:ctrlPr>
@@ -6406,7 +7835,7 @@
                     <m:sSub>
                       <m:sSubPr>
                         <m:ctrlPr>
-                          <a:rPr lang="pt-BR" sz="2200" i="1">
+                          <a:rPr lang="pt-BR" sz="2200" b="0" i="1" smtClean="0">
                             <a:latin typeface="Cambria Math" panose="02040503050406030204" pitchFamily="18" charset="0"/>
                           </a:rPr>
                         </m:ctrlPr>
@@ -6415,7 +7844,7 @@
                         <m:d>
                           <m:dPr>
                             <m:ctrlPr>
-                              <a:rPr lang="pt-BR" sz="2200" b="0" i="1" smtClean="0">
+                              <a:rPr lang="pt-BR" sz="2200" i="1">
                                 <a:latin typeface="Cambria Math" panose="02040503050406030204" pitchFamily="18" charset="0"/>
                               </a:rPr>
                             </m:ctrlPr>
@@ -6635,7 +8064,7 @@
                     <m:sSub>
                       <m:sSubPr>
                         <m:ctrlPr>
-                          <a:rPr lang="pt-BR" sz="2200" i="1" smtClean="0">
+                          <a:rPr lang="pt-BR" sz="2200" i="1">
                             <a:latin typeface="Cambria Math" panose="02040503050406030204" pitchFamily="18" charset="0"/>
                           </a:rPr>
                         </m:ctrlPr>
@@ -6808,7 +8237,7 @@
                     <m:sSub>
                       <m:sSubPr>
                         <m:ctrlPr>
-                          <a:rPr lang="pt-BR" sz="2200" i="1" smtClean="0">
+                          <a:rPr lang="pt-BR" sz="2200" b="0" i="1" smtClean="0">
                             <a:latin typeface="Cambria Math" panose="02040503050406030204" pitchFamily="18" charset="0"/>
                           </a:rPr>
                         </m:ctrlPr>
@@ -6845,7 +8274,7 @@
                     <m:sSub>
                       <m:sSubPr>
                         <m:ctrlPr>
-                          <a:rPr lang="pt-BR" sz="2200" i="1">
+                          <a:rPr lang="pt-BR" sz="2200" b="0" i="1" smtClean="0">
                             <a:latin typeface="Cambria Math" panose="02040503050406030204" pitchFamily="18" charset="0"/>
                           </a:rPr>
                         </m:ctrlPr>
@@ -6914,7 +8343,7 @@
                     <m:sSub>
                       <m:sSubPr>
                         <m:ctrlPr>
-                          <a:rPr lang="pt-BR" sz="2200" i="1" smtClean="0">
+                          <a:rPr lang="pt-BR" sz="2200" i="1">
                             <a:latin typeface="Cambria Math" panose="02040503050406030204" pitchFamily="18" charset="0"/>
                           </a:rPr>
                         </m:ctrlPr>
@@ -7085,14 +8514,11 @@
                 </a:pPr>
                 <a14:m>
                   <m:oMathPara xmlns:m="http://schemas.openxmlformats.org/officeDocument/2006/math">
-                    <m:oMathParaPr>
-                      <m:jc m:val="centerGroup"/>
-                    </m:oMathParaPr>
-                    <m:oMath xmlns:m="http://schemas.openxmlformats.org/officeDocument/2006/math">
+                    <m:oMath>
                       <m:sSub>
                         <m:sSubPr>
                           <m:ctrlPr>
-                            <a:rPr lang="pt-BR" i="1" smtClean="0">
+                            <a:rPr lang="pt-BR" b="0" i="1" smtClean="0">
                               <a:latin typeface="Cambria Math" panose="02040503050406030204" pitchFamily="18" charset="0"/>
                             </a:rPr>
                           </m:ctrlPr>
@@ -7117,7 +8543,7 @@
                       <m:d>
                         <m:dPr>
                           <m:ctrlPr>
-                            <a:rPr lang="pt-BR" b="0" i="1" smtClean="0">
+                            <a:rPr lang="pt-BR" b="1" i="1" smtClean="0">
                               <a:latin typeface="Cambria Math" panose="02040503050406030204" pitchFamily="18" charset="0"/>
                             </a:rPr>
                           </m:ctrlPr>
@@ -7250,7 +8676,7 @@
           <p:cNvPr id="4" name="Agrupar 3">
             <a:extLst>
               <a:ext uri="{FF2B5EF4-FFF2-40B4-BE49-F238E27FC236}">
-                <a16:creationId xmlns:a16="http://schemas.microsoft.com/office/drawing/2014/main" xmlns="" id="{1807672C-B502-DFF3-E3BD-B42FA13DA683}"/>
+                <a16:creationId xmlns:a16="http://schemas.microsoft.com/office/drawing/2014/main" id="{1807672C-B502-DFF3-E3BD-B42FA13DA683}"/>
               </a:ext>
             </a:extLst>
           </p:cNvPr>
@@ -7270,7 +8696,7 @@
             <p:cNvPr id="5" name="Group 2">
               <a:extLst>
                 <a:ext uri="{FF2B5EF4-FFF2-40B4-BE49-F238E27FC236}">
-                  <a16:creationId xmlns:a16="http://schemas.microsoft.com/office/drawing/2014/main" xmlns="" id="{C090EAA9-37F8-A84C-4FCA-CE5BE1ADAA9E}"/>
+                  <a16:creationId xmlns:a16="http://schemas.microsoft.com/office/drawing/2014/main" id="{C090EAA9-37F8-A84C-4FCA-CE5BE1ADAA9E}"/>
                 </a:ext>
               </a:extLst>
             </p:cNvPr>
@@ -7290,7 +8716,7 @@
               <p:cNvPr id="10" name="Picture 4">
                 <a:extLst>
                   <a:ext uri="{FF2B5EF4-FFF2-40B4-BE49-F238E27FC236}">
-                    <a16:creationId xmlns:a16="http://schemas.microsoft.com/office/drawing/2014/main" xmlns="" id="{CD2F7C45-35D1-FB0F-61E3-3BE458B5BAEE}"/>
+                    <a16:creationId xmlns:a16="http://schemas.microsoft.com/office/drawing/2014/main" id="{CD2F7C45-35D1-FB0F-61E3-3BE458B5BAEE}"/>
                   </a:ext>
                 </a:extLst>
               </p:cNvPr>
@@ -7326,7 +8752,7 @@
               <p:cNvPr id="11" name="Straight Connector 6">
                 <a:extLst>
                   <a:ext uri="{FF2B5EF4-FFF2-40B4-BE49-F238E27FC236}">
-                    <a16:creationId xmlns:a16="http://schemas.microsoft.com/office/drawing/2014/main" xmlns="" id="{5E214E94-E88B-4C15-9C56-4102AA975637}"/>
+                    <a16:creationId xmlns:a16="http://schemas.microsoft.com/office/drawing/2014/main" id="{5E214E94-E88B-4C15-9C56-4102AA975637}"/>
                   </a:ext>
                 </a:extLst>
               </p:cNvPr>
@@ -7371,7 +8797,7 @@
                 <p:cNvPr id="6" name="Rectangle 7">
                   <a:extLst>
                     <a:ext uri="{FF2B5EF4-FFF2-40B4-BE49-F238E27FC236}">
-                      <a16:creationId xmlns:a16="http://schemas.microsoft.com/office/drawing/2014/main" xmlns="" id="{2B4811CA-A247-D8E6-18FB-F64056FE1C24}"/>
+                      <a16:creationId xmlns:a16="http://schemas.microsoft.com/office/drawing/2014/main" id="{2B4811CA-A247-D8E6-18FB-F64056FE1C24}"/>
                     </a:ext>
                   </a:extLst>
                 </p:cNvPr>
@@ -7396,14 +8822,11 @@
                   <a:pPr/>
                   <a14:m>
                     <m:oMathPara xmlns:m="http://schemas.openxmlformats.org/officeDocument/2006/math">
-                      <m:oMathParaPr>
-                        <m:jc m:val="centerGroup"/>
-                      </m:oMathParaPr>
-                      <m:oMath xmlns:m="http://schemas.openxmlformats.org/officeDocument/2006/math">
+                      <m:oMath>
                         <m:sSub>
                           <m:sSubPr>
                             <m:ctrlPr>
-                              <a:rPr lang="pt-BR" i="1" smtClean="0">
+                              <a:rPr lang="pt-BR" b="0" i="1" smtClean="0">
                                 <a:latin typeface="Cambria Math" panose="02040503050406030204" pitchFamily="18" charset="0"/>
                               </a:rPr>
                             </m:ctrlPr>
@@ -7506,7 +8929,7 @@
             <p:cNvPr id="7" name="Curved Connector 8">
               <a:extLst>
                 <a:ext uri="{FF2B5EF4-FFF2-40B4-BE49-F238E27FC236}">
-                  <a16:creationId xmlns:a16="http://schemas.microsoft.com/office/drawing/2014/main" xmlns="" id="{B7021C86-1F27-63E1-99D7-D23D1E259459}"/>
+                  <a16:creationId xmlns:a16="http://schemas.microsoft.com/office/drawing/2014/main" id="{B7021C86-1F27-63E1-99D7-D23D1E259459}"/>
                 </a:ext>
               </a:extLst>
             </p:cNvPr>
@@ -7553,7 +8976,7 @@
                 <p:cNvPr id="8" name="Rectangle 9">
                   <a:extLst>
                     <a:ext uri="{FF2B5EF4-FFF2-40B4-BE49-F238E27FC236}">
-                      <a16:creationId xmlns:a16="http://schemas.microsoft.com/office/drawing/2014/main" xmlns="" id="{AFA52A7A-3F40-3310-98A6-91945A12D3B3}"/>
+                      <a16:creationId xmlns:a16="http://schemas.microsoft.com/office/drawing/2014/main" id="{AFA52A7A-3F40-3310-98A6-91945A12D3B3}"/>
                     </a:ext>
                   </a:extLst>
                 </p:cNvPr>
@@ -7578,14 +9001,11 @@
                   <a:pPr/>
                   <a14:m>
                     <m:oMathPara xmlns:m="http://schemas.openxmlformats.org/officeDocument/2006/math">
-                      <m:oMathParaPr>
-                        <m:jc m:val="centerGroup"/>
-                      </m:oMathParaPr>
-                      <m:oMath xmlns:m="http://schemas.openxmlformats.org/officeDocument/2006/math">
+                      <m:oMath>
                         <m:sSub>
                           <m:sSubPr>
                             <m:ctrlPr>
-                              <a:rPr lang="pt-BR" i="1" smtClean="0">
+                              <a:rPr lang="pt-BR" b="0" i="1" smtClean="0">
                                 <a:latin typeface="Cambria Math" panose="02040503050406030204" pitchFamily="18" charset="0"/>
                               </a:rPr>
                             </m:ctrlPr>
@@ -7690,7 +9110,7 @@
                 <p:cNvPr id="9" name="Rectangle 10">
                   <a:extLst>
                     <a:ext uri="{FF2B5EF4-FFF2-40B4-BE49-F238E27FC236}">
-                      <a16:creationId xmlns:a16="http://schemas.microsoft.com/office/drawing/2014/main" xmlns="" id="{B4F5FB02-B149-867C-A388-FDB46341ECD4}"/>
+                      <a16:creationId xmlns:a16="http://schemas.microsoft.com/office/drawing/2014/main" id="{B4F5FB02-B149-867C-A388-FDB46341ECD4}"/>
                     </a:ext>
                   </a:extLst>
                 </p:cNvPr>
@@ -7715,14 +9135,11 @@
                   <a:pPr/>
                   <a14:m>
                     <m:oMathPara xmlns:m="http://schemas.openxmlformats.org/officeDocument/2006/math">
-                      <m:oMathParaPr>
-                        <m:jc m:val="centerGroup"/>
-                      </m:oMathParaPr>
-                      <m:oMath xmlns:m="http://schemas.openxmlformats.org/officeDocument/2006/math">
+                      <m:oMath>
                         <m:sSub>
                           <m:sSubPr>
                             <m:ctrlPr>
-                              <a:rPr lang="pt-BR" i="1" smtClean="0">
+                              <a:rPr lang="pt-BR" b="0" i="1" smtClean="0">
                                 <a:latin typeface="Cambria Math" panose="02040503050406030204" pitchFamily="18" charset="0"/>
                               </a:rPr>
                             </m:ctrlPr>
@@ -7853,443 +9270,47 @@
       </p:grpSpPr>
       <p:sp>
         <p:nvSpPr>
-          <p:cNvPr id="2" name="Title 1"/>
+          <p:cNvPr id="3" name="Espaço Reservado para Conteúdo 2">
+            <a:extLst>
+              <a:ext uri="{FF2B5EF4-FFF2-40B4-BE49-F238E27FC236}">
+                <a16:creationId xmlns:a16="http://schemas.microsoft.com/office/drawing/2014/main" id="{2F8301EA-2842-B778-35AE-500DA81AF477}"/>
+              </a:ext>
+            </a:extLst>
+          </p:cNvPr>
           <p:cNvSpPr>
             <a:spLocks noGrp="1"/>
           </p:cNvSpPr>
           <p:nvPr>
-            <p:ph type="title"/>
+            <p:ph idx="1"/>
           </p:nvPr>
         </p:nvSpPr>
-        <p:spPr/>
+        <p:spPr>
+          <a:xfrm>
+            <a:off x="521277" y="2502621"/>
+            <a:ext cx="11149446" cy="1852757"/>
+          </a:xfrm>
+        </p:spPr>
         <p:txBody>
-          <a:bodyPr/>
+          <a:bodyPr>
+            <a:normAutofit/>
+          </a:bodyPr>
           <a:lstStyle/>
           <a:p>
+            <a:pPr marL="0" indent="0" algn="ctr">
+              <a:buNone/>
+            </a:pPr>
             <a:r>
-              <a:rPr lang="pt-BR" dirty="0"/>
-              <a:t>Trecho da função </a:t>
+              <a:rPr lang="pt-BR" sz="6000" i="1" dirty="0"/>
+              <a:t>Como usamos as duas funções para classificar as amostras?</a:t>
             </a:r>
-            <a:r>
-              <a:rPr lang="pt-BR" i="1" dirty="0" err="1"/>
-              <a:t>predict</a:t>
-            </a:r>
-            <a:endParaRPr lang="pt-BR" i="1" dirty="0"/>
+            <a:endParaRPr lang="en-US" sz="6000" i="1" dirty="0"/>
           </a:p>
         </p:txBody>
       </p:sp>
-      <mc:AlternateContent xmlns:mc="http://schemas.openxmlformats.org/markup-compatibility/2006" xmlns:a14="http://schemas.microsoft.com/office/drawing/2010/main">
-        <mc:Choice Requires="a14">
-          <p:sp>
-            <p:nvSpPr>
-              <p:cNvPr id="3" name="Content Placeholder 2"/>
-              <p:cNvSpPr>
-                <a:spLocks noGrp="1"/>
-              </p:cNvSpPr>
-              <p:nvPr>
-                <p:ph idx="1"/>
-              </p:nvPr>
-            </p:nvSpPr>
-            <p:spPr>
-              <a:xfrm>
-                <a:off x="838199" y="1825624"/>
-                <a:ext cx="11092543" cy="4758055"/>
-              </a:xfrm>
-            </p:spPr>
-            <p:txBody>
-              <a:bodyPr>
-                <a:normAutofit fontScale="92500" lnSpcReduction="10000"/>
-              </a:bodyPr>
-              <a:lstStyle/>
-              <a:p>
-                <a:pPr marL="0" indent="0">
-                  <a:buNone/>
-                </a:pPr>
-                <a:r>
-                  <a:rPr lang="pt-BR" dirty="0"/>
-                  <a:t># Usamos </a:t>
-                </a:r>
-                <a14:m>
-                  <m:oMath xmlns:m="http://schemas.openxmlformats.org/officeDocument/2006/math">
-                    <m:sSub>
-                      <m:sSubPr>
-                        <m:ctrlPr>
-                          <a:rPr lang="pt-BR" i="1">
-                            <a:latin typeface="Cambria Math" panose="02040503050406030204" pitchFamily="18" charset="0"/>
-                          </a:rPr>
-                        </m:ctrlPr>
-                      </m:sSubPr>
-                      <m:e>
-                        <m:r>
-                          <a:rPr lang="pt-BR" i="1">
-                            <a:latin typeface="Cambria Math" panose="02040503050406030204" pitchFamily="18" charset="0"/>
-                          </a:rPr>
-                          <m:t>𝑔</m:t>
-                        </m:r>
-                      </m:e>
-                      <m:sub>
-                        <m:r>
-                          <a:rPr lang="pt-BR" i="1">
-                            <a:latin typeface="Cambria Math" panose="02040503050406030204" pitchFamily="18" charset="0"/>
-                          </a:rPr>
-                          <m:t>1</m:t>
-                        </m:r>
-                      </m:sub>
-                    </m:sSub>
-                    <m:d>
-                      <m:dPr>
-                        <m:ctrlPr>
-                          <a:rPr lang="pt-BR" i="1">
-                            <a:latin typeface="Cambria Math" panose="02040503050406030204" pitchFamily="18" charset="0"/>
-                          </a:rPr>
-                        </m:ctrlPr>
-                      </m:dPr>
-                      <m:e>
-                        <m:r>
-                          <a:rPr lang="pt-BR" b="1" i="1">
-                            <a:latin typeface="Cambria Math" panose="02040503050406030204" pitchFamily="18" charset="0"/>
-                          </a:rPr>
-                          <m:t>𝒙</m:t>
-                        </m:r>
-                      </m:e>
-                    </m:d>
-                  </m:oMath>
-                </a14:m>
-                <a:r>
-                  <a:rPr lang="pt-BR" dirty="0"/>
-                  <a:t> primeiro, pois ela separa exatamente a classe 0 das demais.</a:t>
-                </a:r>
-              </a:p>
-              <a:p>
-                <a:pPr marL="0" indent="0">
-                  <a:buNone/>
-                </a:pPr>
-                <a:r>
-                  <a:rPr lang="pt-BR" dirty="0" err="1"/>
-                  <a:t>if</a:t>
-                </a:r>
-                <a:r>
-                  <a:rPr lang="pt-BR" dirty="0"/>
-                  <a:t>(</a:t>
-                </a:r>
-                <a14:m>
-                  <m:oMath xmlns:m="http://schemas.openxmlformats.org/officeDocument/2006/math">
-                    <m:sSub>
-                      <m:sSubPr>
-                        <m:ctrlPr>
-                          <a:rPr lang="pt-BR" i="1" smtClean="0">
-                            <a:latin typeface="Cambria Math" panose="02040503050406030204" pitchFamily="18" charset="0"/>
-                          </a:rPr>
-                        </m:ctrlPr>
-                      </m:sSubPr>
-                      <m:e>
-                        <m:r>
-                          <a:rPr lang="pt-BR" b="0" i="1" smtClean="0">
-                            <a:latin typeface="Cambria Math" panose="02040503050406030204" pitchFamily="18" charset="0"/>
-                          </a:rPr>
-                          <m:t>𝑔</m:t>
-                        </m:r>
-                      </m:e>
-                      <m:sub>
-                        <m:r>
-                          <a:rPr lang="pt-BR" b="0" i="1" smtClean="0">
-                            <a:latin typeface="Cambria Math" panose="02040503050406030204" pitchFamily="18" charset="0"/>
-                          </a:rPr>
-                          <m:t>1</m:t>
-                        </m:r>
-                      </m:sub>
-                    </m:sSub>
-                    <m:d>
-                      <m:dPr>
-                        <m:ctrlPr>
-                          <a:rPr lang="pt-BR" b="0" i="1" smtClean="0">
-                            <a:latin typeface="Cambria Math" panose="02040503050406030204" pitchFamily="18" charset="0"/>
-                          </a:rPr>
-                        </m:ctrlPr>
-                      </m:dPr>
-                      <m:e>
-                        <m:r>
-                          <a:rPr lang="pt-BR" b="1" i="1" smtClean="0">
-                            <a:latin typeface="Cambria Math" panose="02040503050406030204" pitchFamily="18" charset="0"/>
-                          </a:rPr>
-                          <m:t>𝒙</m:t>
-                        </m:r>
-                      </m:e>
-                    </m:d>
-                  </m:oMath>
-                </a14:m>
-                <a:r>
-                  <a:rPr lang="pt-BR" dirty="0"/>
-                  <a:t> &gt;= 0):</a:t>
-                </a:r>
-              </a:p>
-              <a:p>
-                <a:pPr marL="0" indent="0">
-                  <a:buNone/>
-                </a:pPr>
-                <a:r>
-                  <a:rPr lang="pt-BR" dirty="0"/>
-                  <a:t>	y_pred[i] = 0</a:t>
-                </a:r>
-              </a:p>
-              <a:p>
-                <a:pPr marL="0" indent="0">
-                  <a:buNone/>
-                </a:pPr>
-                <a:r>
-                  <a:rPr lang="pt-BR" dirty="0"/>
-                  <a:t># Caso quando </a:t>
-                </a:r>
-                <a14:m>
-                  <m:oMath xmlns:m="http://schemas.openxmlformats.org/officeDocument/2006/math">
-                    <m:sSub>
-                      <m:sSubPr>
-                        <m:ctrlPr>
-                          <a:rPr lang="pt-BR" i="1" smtClean="0">
-                            <a:latin typeface="Cambria Math" panose="02040503050406030204" pitchFamily="18" charset="0"/>
-                          </a:rPr>
-                        </m:ctrlPr>
-                      </m:sSubPr>
-                      <m:e>
-                        <m:r>
-                          <a:rPr lang="pt-BR" b="0" i="1" smtClean="0">
-                            <a:latin typeface="Cambria Math" panose="02040503050406030204" pitchFamily="18" charset="0"/>
-                          </a:rPr>
-                          <m:t>𝑔</m:t>
-                        </m:r>
-                      </m:e>
-                      <m:sub>
-                        <m:r>
-                          <a:rPr lang="pt-BR" b="0" i="1" smtClean="0">
-                            <a:latin typeface="Cambria Math" panose="02040503050406030204" pitchFamily="18" charset="0"/>
-                          </a:rPr>
-                          <m:t>1</m:t>
-                        </m:r>
-                      </m:sub>
-                    </m:sSub>
-                    <m:d>
-                      <m:dPr>
-                        <m:ctrlPr>
-                          <a:rPr lang="pt-BR" b="0" i="1" smtClean="0">
-                            <a:latin typeface="Cambria Math" panose="02040503050406030204" pitchFamily="18" charset="0"/>
-                          </a:rPr>
-                        </m:ctrlPr>
-                      </m:dPr>
-                      <m:e>
-                        <m:r>
-                          <a:rPr lang="pt-BR" b="1" i="1" smtClean="0">
-                            <a:latin typeface="Cambria Math" panose="02040503050406030204" pitchFamily="18" charset="0"/>
-                          </a:rPr>
-                          <m:t>𝒙</m:t>
-                        </m:r>
-                      </m:e>
-                    </m:d>
-                  </m:oMath>
-                </a14:m>
-                <a:r>
-                  <a:rPr lang="pt-BR" dirty="0"/>
-                  <a:t> &lt; 0</a:t>
-                </a:r>
-              </a:p>
-              <a:p>
-                <a:pPr marL="0" indent="0">
-                  <a:buNone/>
-                </a:pPr>
-                <a:r>
-                  <a:rPr lang="pt-BR" dirty="0"/>
-                  <a:t>else: </a:t>
-                </a:r>
-              </a:p>
-              <a:p>
-                <a:pPr marL="0" indent="0">
-                  <a:buNone/>
-                </a:pPr>
-                <a:r>
-                  <a:rPr lang="pt-BR" dirty="0"/>
-                  <a:t>	if(</a:t>
-                </a:r>
-                <a14:m>
-                  <m:oMath xmlns:m="http://schemas.openxmlformats.org/officeDocument/2006/math">
-                    <m:sSub>
-                      <m:sSubPr>
-                        <m:ctrlPr>
-                          <a:rPr lang="pt-BR" i="1" smtClean="0">
-                            <a:latin typeface="Cambria Math" panose="02040503050406030204" pitchFamily="18" charset="0"/>
-                          </a:rPr>
-                        </m:ctrlPr>
-                      </m:sSubPr>
-                      <m:e>
-                        <m:r>
-                          <a:rPr lang="pt-BR" b="0" i="1" smtClean="0">
-                            <a:latin typeface="Cambria Math" panose="02040503050406030204" pitchFamily="18" charset="0"/>
-                          </a:rPr>
-                          <m:t>𝑔</m:t>
-                        </m:r>
-                      </m:e>
-                      <m:sub>
-                        <m:r>
-                          <a:rPr lang="pt-BR" b="0" i="1" smtClean="0">
-                            <a:latin typeface="Cambria Math" panose="02040503050406030204" pitchFamily="18" charset="0"/>
-                          </a:rPr>
-                          <m:t>2</m:t>
-                        </m:r>
-                      </m:sub>
-                    </m:sSub>
-                    <m:d>
-                      <m:dPr>
-                        <m:ctrlPr>
-                          <a:rPr lang="pt-BR" b="0" i="1" smtClean="0">
-                            <a:latin typeface="Cambria Math" panose="02040503050406030204" pitchFamily="18" charset="0"/>
-                          </a:rPr>
-                        </m:ctrlPr>
-                      </m:dPr>
-                      <m:e>
-                        <m:r>
-                          <a:rPr lang="pt-BR" b="1" i="1" smtClean="0">
-                            <a:latin typeface="Cambria Math" panose="02040503050406030204" pitchFamily="18" charset="0"/>
-                          </a:rPr>
-                          <m:t>𝒙</m:t>
-                        </m:r>
-                      </m:e>
-                    </m:d>
-                  </m:oMath>
-                </a14:m>
-                <a:r>
-                  <a:rPr lang="pt-BR" dirty="0"/>
-                  <a:t> &lt; 0):</a:t>
-                </a:r>
-              </a:p>
-              <a:p>
-                <a:pPr marL="0" indent="0">
-                  <a:buNone/>
-                </a:pPr>
-                <a:r>
-                  <a:rPr lang="pt-BR" dirty="0"/>
-                  <a:t>		y_pred[i] = 1</a:t>
-                </a:r>
-              </a:p>
-              <a:p>
-                <a:pPr marL="0" indent="0">
-                  <a:buNone/>
-                </a:pPr>
-                <a:r>
-                  <a:rPr lang="pt-BR" dirty="0"/>
-                  <a:t>	# caso quando </a:t>
-                </a:r>
-                <a14:m>
-                  <m:oMath xmlns:m="http://schemas.openxmlformats.org/officeDocument/2006/math">
-                    <m:sSub>
-                      <m:sSubPr>
-                        <m:ctrlPr>
-                          <a:rPr lang="pt-BR" i="1" smtClean="0">
-                            <a:latin typeface="Cambria Math" panose="02040503050406030204" pitchFamily="18" charset="0"/>
-                          </a:rPr>
-                        </m:ctrlPr>
-                      </m:sSubPr>
-                      <m:e>
-                        <m:r>
-                          <a:rPr lang="pt-BR" b="0" i="1" smtClean="0">
-                            <a:latin typeface="Cambria Math" panose="02040503050406030204" pitchFamily="18" charset="0"/>
-                          </a:rPr>
-                          <m:t>𝑔</m:t>
-                        </m:r>
-                      </m:e>
-                      <m:sub>
-                        <m:r>
-                          <a:rPr lang="pt-BR" b="0" i="1" smtClean="0">
-                            <a:latin typeface="Cambria Math" panose="02040503050406030204" pitchFamily="18" charset="0"/>
-                          </a:rPr>
-                          <m:t>2</m:t>
-                        </m:r>
-                      </m:sub>
-                    </m:sSub>
-                    <m:d>
-                      <m:dPr>
-                        <m:ctrlPr>
-                          <a:rPr lang="pt-BR" b="0" i="1" smtClean="0">
-                            <a:latin typeface="Cambria Math" panose="02040503050406030204" pitchFamily="18" charset="0"/>
-                          </a:rPr>
-                        </m:ctrlPr>
-                      </m:dPr>
-                      <m:e>
-                        <m:r>
-                          <a:rPr lang="pt-BR" b="1" i="1" smtClean="0">
-                            <a:latin typeface="Cambria Math" panose="02040503050406030204" pitchFamily="18" charset="0"/>
-                          </a:rPr>
-                          <m:t>𝒙</m:t>
-                        </m:r>
-                      </m:e>
-                    </m:d>
-                  </m:oMath>
-                </a14:m>
-                <a:r>
-                  <a:rPr lang="pt-BR" dirty="0"/>
-                  <a:t> &gt;= 0</a:t>
-                </a:r>
-              </a:p>
-              <a:p>
-                <a:pPr marL="0" indent="0">
-                  <a:buNone/>
-                </a:pPr>
-                <a:r>
-                  <a:rPr lang="pt-BR" dirty="0"/>
-                  <a:t>	else: </a:t>
-                </a:r>
-              </a:p>
-              <a:p>
-                <a:pPr marL="0" indent="0">
-                  <a:buNone/>
-                </a:pPr>
-                <a:r>
-                  <a:rPr lang="pt-BR" dirty="0"/>
-                  <a:t>		y_pred[i] = 2</a:t>
-                </a:r>
-              </a:p>
-            </p:txBody>
-          </p:sp>
-        </mc:Choice>
-        <mc:Fallback xmlns="">
-          <p:sp>
-            <p:nvSpPr>
-              <p:cNvPr id="3" name="Content Placeholder 2"/>
-              <p:cNvSpPr>
-                <a:spLocks noGrp="1" noRot="1" noChangeAspect="1" noMove="1" noResize="1" noEditPoints="1" noAdjustHandles="1" noChangeArrowheads="1" noChangeShapeType="1" noTextEdit="1"/>
-              </p:cNvSpPr>
-              <p:nvPr>
-                <p:ph idx="1"/>
-              </p:nvPr>
-            </p:nvSpPr>
-            <p:spPr>
-              <a:xfrm>
-                <a:off x="838199" y="1825624"/>
-                <a:ext cx="11092543" cy="4758055"/>
-              </a:xfrm>
-              <a:blipFill rotWithShape="0">
-                <a:blip r:embed="rId2"/>
-                <a:stretch>
-                  <a:fillRect l="-934" t="-2561"/>
-                </a:stretch>
-              </a:blipFill>
-            </p:spPr>
-            <p:txBody>
-              <a:bodyPr/>
-              <a:lstStyle/>
-              <a:p>
-                <a:r>
-                  <a:rPr lang="pt-BR">
-                    <a:noFill/>
-                  </a:rPr>
-                  <a:t> </a:t>
-                </a:r>
-              </a:p>
-            </p:txBody>
-          </p:sp>
-        </mc:Fallback>
-      </mc:AlternateContent>
     </p:spTree>
     <p:extLst>
       <p:ext uri="{BB962C8B-B14F-4D97-AF65-F5344CB8AC3E}">
-        <p14:creationId xmlns:p14="http://schemas.microsoft.com/office/powerpoint/2010/main" val="1044005073"/>
+        <p14:creationId xmlns:p14="http://schemas.microsoft.com/office/powerpoint/2010/main" val="793989537"/>
       </p:ext>
     </p:extLst>
   </p:cSld>
@@ -8318,10 +9339,487 @@
       </p:grpSpPr>
       <p:sp>
         <p:nvSpPr>
+          <p:cNvPr id="2" name="Title 1"/>
+          <p:cNvSpPr>
+            <a:spLocks noGrp="1"/>
+          </p:cNvSpPr>
+          <p:nvPr>
+            <p:ph type="title"/>
+          </p:nvPr>
+        </p:nvSpPr>
+        <p:spPr/>
+        <p:txBody>
+          <a:bodyPr/>
+          <a:lstStyle/>
+          <a:p>
+            <a:r>
+              <a:rPr lang="pt-BR" dirty="0"/>
+              <a:t>Trecho da função </a:t>
+            </a:r>
+            <a:r>
+              <a:rPr lang="pt-BR" i="1" dirty="0" err="1"/>
+              <a:t>predict</a:t>
+            </a:r>
+            <a:endParaRPr lang="pt-BR" i="1" dirty="0"/>
+          </a:p>
+        </p:txBody>
+      </p:sp>
+      <mc:AlternateContent xmlns:mc="http://schemas.openxmlformats.org/markup-compatibility/2006">
+        <mc:Choice xmlns:a14="http://schemas.microsoft.com/office/drawing/2010/main" Requires="a14">
+          <p:sp>
+            <p:nvSpPr>
+              <p:cNvPr id="3" name="Content Placeholder 2"/>
+              <p:cNvSpPr>
+                <a:spLocks noGrp="1"/>
+              </p:cNvSpPr>
+              <p:nvPr>
+                <p:ph idx="1"/>
+              </p:nvPr>
+            </p:nvSpPr>
+            <p:spPr>
+              <a:xfrm>
+                <a:off x="838199" y="1825624"/>
+                <a:ext cx="11092543" cy="4758055"/>
+              </a:xfrm>
+            </p:spPr>
+            <p:txBody>
+              <a:bodyPr>
+                <a:normAutofit fontScale="92500" lnSpcReduction="10000"/>
+              </a:bodyPr>
+              <a:lstStyle/>
+              <a:p>
+                <a:pPr marL="0" indent="0">
+                  <a:buNone/>
+                </a:pPr>
+                <a:r>
+                  <a:rPr lang="pt-BR" dirty="0"/>
+                  <a:t># Usamos </a:t>
+                </a:r>
+                <a14:m>
+                  <m:oMath xmlns:m="http://schemas.openxmlformats.org/officeDocument/2006/math">
+                    <m:sSub>
+                      <m:sSubPr>
+                        <m:ctrlPr>
+                          <a:rPr lang="pt-BR" i="1">
+                            <a:latin typeface="Cambria Math" panose="02040503050406030204" pitchFamily="18" charset="0"/>
+                          </a:rPr>
+                        </m:ctrlPr>
+                      </m:sSubPr>
+                      <m:e>
+                        <m:r>
+                          <a:rPr lang="pt-BR" i="1">
+                            <a:latin typeface="Cambria Math" panose="02040503050406030204" pitchFamily="18" charset="0"/>
+                          </a:rPr>
+                          <m:t>𝑔</m:t>
+                        </m:r>
+                      </m:e>
+                      <m:sub>
+                        <m:r>
+                          <a:rPr lang="pt-BR" i="1">
+                            <a:latin typeface="Cambria Math" panose="02040503050406030204" pitchFamily="18" charset="0"/>
+                          </a:rPr>
+                          <m:t>1</m:t>
+                        </m:r>
+                      </m:sub>
+                    </m:sSub>
+                    <m:d>
+                      <m:dPr>
+                        <m:ctrlPr>
+                          <a:rPr lang="pt-BR" b="1" i="1">
+                            <a:latin typeface="Cambria Math" panose="02040503050406030204" pitchFamily="18" charset="0"/>
+                          </a:rPr>
+                        </m:ctrlPr>
+                      </m:dPr>
+                      <m:e>
+                        <m:r>
+                          <a:rPr lang="pt-BR" b="1" i="1">
+                            <a:latin typeface="Cambria Math" panose="02040503050406030204" pitchFamily="18" charset="0"/>
+                          </a:rPr>
+                          <m:t>𝒙</m:t>
+                        </m:r>
+                      </m:e>
+                    </m:d>
+                  </m:oMath>
+                </a14:m>
+                <a:r>
+                  <a:rPr lang="pt-BR" dirty="0"/>
+                  <a:t> primeiro, pois ela separa </a:t>
+                </a:r>
+                <a:r>
+                  <a:rPr lang="pt-BR" b="1" dirty="0">
+                    <a:solidFill>
+                      <a:srgbClr val="7030A0"/>
+                    </a:solidFill>
+                  </a:rPr>
+                  <a:t>exatamente</a:t>
+                </a:r>
+                <a:r>
+                  <a:rPr lang="pt-BR" dirty="0"/>
+                  <a:t> a classe 0 das demais.</a:t>
+                </a:r>
+              </a:p>
+              <a:p>
+                <a:pPr marL="0" indent="0">
+                  <a:buNone/>
+                </a:pPr>
+                <a:r>
+                  <a:rPr lang="pt-BR" dirty="0" err="1"/>
+                  <a:t>if</a:t>
+                </a:r>
+                <a:r>
+                  <a:rPr lang="pt-BR" dirty="0"/>
+                  <a:t>(</a:t>
+                </a:r>
+                <a14:m>
+                  <m:oMath xmlns:m="http://schemas.openxmlformats.org/officeDocument/2006/math">
+                    <m:sSub>
+                      <m:sSubPr>
+                        <m:ctrlPr>
+                          <a:rPr lang="pt-BR" b="0" i="1" smtClean="0">
+                            <a:latin typeface="Cambria Math" panose="02040503050406030204" pitchFamily="18" charset="0"/>
+                          </a:rPr>
+                        </m:ctrlPr>
+                      </m:sSubPr>
+                      <m:e>
+                        <m:r>
+                          <a:rPr lang="pt-BR" b="0" i="1" smtClean="0">
+                            <a:latin typeface="Cambria Math" panose="02040503050406030204" pitchFamily="18" charset="0"/>
+                          </a:rPr>
+                          <m:t>𝑔</m:t>
+                        </m:r>
+                      </m:e>
+                      <m:sub>
+                        <m:r>
+                          <a:rPr lang="pt-BR" b="0" i="1" smtClean="0">
+                            <a:latin typeface="Cambria Math" panose="02040503050406030204" pitchFamily="18" charset="0"/>
+                          </a:rPr>
+                          <m:t>1</m:t>
+                        </m:r>
+                      </m:sub>
+                    </m:sSub>
+                    <m:d>
+                      <m:dPr>
+                        <m:ctrlPr>
+                          <a:rPr lang="pt-BR" b="1" i="1" smtClean="0">
+                            <a:latin typeface="Cambria Math" panose="02040503050406030204" pitchFamily="18" charset="0"/>
+                          </a:rPr>
+                        </m:ctrlPr>
+                      </m:dPr>
+                      <m:e>
+                        <m:r>
+                          <a:rPr lang="pt-BR" b="1" i="1" smtClean="0">
+                            <a:latin typeface="Cambria Math" panose="02040503050406030204" pitchFamily="18" charset="0"/>
+                          </a:rPr>
+                          <m:t>𝒙</m:t>
+                        </m:r>
+                      </m:e>
+                    </m:d>
+                  </m:oMath>
+                </a14:m>
+                <a:r>
+                  <a:rPr lang="pt-BR" dirty="0"/>
+                  <a:t> &gt;= 0):</a:t>
+                </a:r>
+              </a:p>
+              <a:p>
+                <a:pPr marL="0" indent="0">
+                  <a:buNone/>
+                </a:pPr>
+                <a:r>
+                  <a:rPr lang="pt-BR" dirty="0"/>
+                  <a:t>	y_pred[i] = 0</a:t>
+                </a:r>
+              </a:p>
+              <a:p>
+                <a:pPr marL="0" indent="0">
+                  <a:buNone/>
+                </a:pPr>
+                <a:r>
+                  <a:rPr lang="pt-BR" dirty="0"/>
+                  <a:t># Caso quando </a:t>
+                </a:r>
+                <a14:m>
+                  <m:oMath xmlns:m="http://schemas.openxmlformats.org/officeDocument/2006/math">
+                    <m:sSub>
+                      <m:sSubPr>
+                        <m:ctrlPr>
+                          <a:rPr lang="pt-BR" b="0" i="1" smtClean="0">
+                            <a:latin typeface="Cambria Math" panose="02040503050406030204" pitchFamily="18" charset="0"/>
+                          </a:rPr>
+                        </m:ctrlPr>
+                      </m:sSubPr>
+                      <m:e>
+                        <m:r>
+                          <a:rPr lang="pt-BR" b="0" i="1" smtClean="0">
+                            <a:latin typeface="Cambria Math" panose="02040503050406030204" pitchFamily="18" charset="0"/>
+                          </a:rPr>
+                          <m:t>𝑔</m:t>
+                        </m:r>
+                      </m:e>
+                      <m:sub>
+                        <m:r>
+                          <a:rPr lang="pt-BR" b="0" i="1" smtClean="0">
+                            <a:latin typeface="Cambria Math" panose="02040503050406030204" pitchFamily="18" charset="0"/>
+                          </a:rPr>
+                          <m:t>1</m:t>
+                        </m:r>
+                      </m:sub>
+                    </m:sSub>
+                    <m:d>
+                      <m:dPr>
+                        <m:ctrlPr>
+                          <a:rPr lang="pt-BR" b="1" i="1" smtClean="0">
+                            <a:latin typeface="Cambria Math" panose="02040503050406030204" pitchFamily="18" charset="0"/>
+                          </a:rPr>
+                        </m:ctrlPr>
+                      </m:dPr>
+                      <m:e>
+                        <m:r>
+                          <a:rPr lang="pt-BR" b="1" i="1" smtClean="0">
+                            <a:latin typeface="Cambria Math" panose="02040503050406030204" pitchFamily="18" charset="0"/>
+                          </a:rPr>
+                          <m:t>𝒙</m:t>
+                        </m:r>
+                      </m:e>
+                    </m:d>
+                  </m:oMath>
+                </a14:m>
+                <a:r>
+                  <a:rPr lang="pt-BR" dirty="0"/>
+                  <a:t> &lt; 0</a:t>
+                </a:r>
+              </a:p>
+              <a:p>
+                <a:pPr marL="0" indent="0">
+                  <a:buNone/>
+                </a:pPr>
+                <a:r>
+                  <a:rPr lang="pt-BR" dirty="0"/>
+                  <a:t>else: </a:t>
+                </a:r>
+              </a:p>
+              <a:p>
+                <a:pPr marL="0" indent="0">
+                  <a:buNone/>
+                </a:pPr>
+                <a:r>
+                  <a:rPr lang="pt-BR" dirty="0"/>
+                  <a:t>	if(</a:t>
+                </a:r>
+                <a14:m>
+                  <m:oMath xmlns:m="http://schemas.openxmlformats.org/officeDocument/2006/math">
+                    <m:sSub>
+                      <m:sSubPr>
+                        <m:ctrlPr>
+                          <a:rPr lang="pt-BR" b="0" i="1" smtClean="0">
+                            <a:latin typeface="Cambria Math" panose="02040503050406030204" pitchFamily="18" charset="0"/>
+                          </a:rPr>
+                        </m:ctrlPr>
+                      </m:sSubPr>
+                      <m:e>
+                        <m:r>
+                          <a:rPr lang="pt-BR" b="0" i="1" smtClean="0">
+                            <a:latin typeface="Cambria Math" panose="02040503050406030204" pitchFamily="18" charset="0"/>
+                          </a:rPr>
+                          <m:t>𝑔</m:t>
+                        </m:r>
+                      </m:e>
+                      <m:sub>
+                        <m:r>
+                          <a:rPr lang="pt-BR" b="0" i="1" smtClean="0">
+                            <a:latin typeface="Cambria Math" panose="02040503050406030204" pitchFamily="18" charset="0"/>
+                          </a:rPr>
+                          <m:t>2</m:t>
+                        </m:r>
+                      </m:sub>
+                    </m:sSub>
+                    <m:d>
+                      <m:dPr>
+                        <m:ctrlPr>
+                          <a:rPr lang="pt-BR" b="1" i="1" smtClean="0">
+                            <a:latin typeface="Cambria Math" panose="02040503050406030204" pitchFamily="18" charset="0"/>
+                          </a:rPr>
+                        </m:ctrlPr>
+                      </m:dPr>
+                      <m:e>
+                        <m:r>
+                          <a:rPr lang="pt-BR" b="1" i="1" smtClean="0">
+                            <a:latin typeface="Cambria Math" panose="02040503050406030204" pitchFamily="18" charset="0"/>
+                          </a:rPr>
+                          <m:t>𝒙</m:t>
+                        </m:r>
+                      </m:e>
+                    </m:d>
+                  </m:oMath>
+                </a14:m>
+                <a:r>
+                  <a:rPr lang="pt-BR" dirty="0"/>
+                  <a:t> &lt; 0):</a:t>
+                </a:r>
+              </a:p>
+              <a:p>
+                <a:pPr marL="0" indent="0">
+                  <a:buNone/>
+                </a:pPr>
+                <a:r>
+                  <a:rPr lang="pt-BR" dirty="0"/>
+                  <a:t>		y_pred[i] = 1</a:t>
+                </a:r>
+              </a:p>
+              <a:p>
+                <a:pPr marL="0" indent="0">
+                  <a:buNone/>
+                </a:pPr>
+                <a:r>
+                  <a:rPr lang="pt-BR" dirty="0"/>
+                  <a:t>	# caso quando </a:t>
+                </a:r>
+                <a14:m>
+                  <m:oMath xmlns:m="http://schemas.openxmlformats.org/officeDocument/2006/math">
+                    <m:sSub>
+                      <m:sSubPr>
+                        <m:ctrlPr>
+                          <a:rPr lang="pt-BR" b="0" i="1" smtClean="0">
+                            <a:latin typeface="Cambria Math" panose="02040503050406030204" pitchFamily="18" charset="0"/>
+                          </a:rPr>
+                        </m:ctrlPr>
+                      </m:sSubPr>
+                      <m:e>
+                        <m:r>
+                          <a:rPr lang="pt-BR" b="0" i="1" smtClean="0">
+                            <a:latin typeface="Cambria Math" panose="02040503050406030204" pitchFamily="18" charset="0"/>
+                          </a:rPr>
+                          <m:t>𝑔</m:t>
+                        </m:r>
+                      </m:e>
+                      <m:sub>
+                        <m:r>
+                          <a:rPr lang="pt-BR" b="0" i="1" smtClean="0">
+                            <a:latin typeface="Cambria Math" panose="02040503050406030204" pitchFamily="18" charset="0"/>
+                          </a:rPr>
+                          <m:t>2</m:t>
+                        </m:r>
+                      </m:sub>
+                    </m:sSub>
+                    <m:d>
+                      <m:dPr>
+                        <m:ctrlPr>
+                          <a:rPr lang="pt-BR" b="1" i="1" smtClean="0">
+                            <a:latin typeface="Cambria Math" panose="02040503050406030204" pitchFamily="18" charset="0"/>
+                          </a:rPr>
+                        </m:ctrlPr>
+                      </m:dPr>
+                      <m:e>
+                        <m:r>
+                          <a:rPr lang="pt-BR" b="1" i="1" smtClean="0">
+                            <a:latin typeface="Cambria Math" panose="02040503050406030204" pitchFamily="18" charset="0"/>
+                          </a:rPr>
+                          <m:t>𝒙</m:t>
+                        </m:r>
+                      </m:e>
+                    </m:d>
+                  </m:oMath>
+                </a14:m>
+                <a:r>
+                  <a:rPr lang="pt-BR" dirty="0"/>
+                  <a:t> &gt;= 0</a:t>
+                </a:r>
+              </a:p>
+              <a:p>
+                <a:pPr marL="0" indent="0">
+                  <a:buNone/>
+                </a:pPr>
+                <a:r>
+                  <a:rPr lang="pt-BR" dirty="0"/>
+                  <a:t>	else: </a:t>
+                </a:r>
+              </a:p>
+              <a:p>
+                <a:pPr marL="0" indent="0">
+                  <a:buNone/>
+                </a:pPr>
+                <a:r>
+                  <a:rPr lang="pt-BR" dirty="0"/>
+                  <a:t>		y_pred[i] = 2</a:t>
+                </a:r>
+              </a:p>
+            </p:txBody>
+          </p:sp>
+        </mc:Choice>
+        <mc:Fallback>
+          <p:sp>
+            <p:nvSpPr>
+              <p:cNvPr id="3" name="Content Placeholder 2"/>
+              <p:cNvSpPr>
+                <a:spLocks noGrp="1" noRot="1" noChangeAspect="1" noMove="1" noResize="1" noEditPoints="1" noAdjustHandles="1" noChangeArrowheads="1" noChangeShapeType="1" noTextEdit="1"/>
+              </p:cNvSpPr>
+              <p:nvPr>
+                <p:ph idx="1"/>
+              </p:nvPr>
+            </p:nvSpPr>
+            <p:spPr>
+              <a:xfrm>
+                <a:off x="838199" y="1825624"/>
+                <a:ext cx="11092543" cy="4758055"/>
+              </a:xfrm>
+              <a:blipFill>
+                <a:blip r:embed="rId2"/>
+                <a:stretch>
+                  <a:fillRect l="-934" t="-2561"/>
+                </a:stretch>
+              </a:blipFill>
+            </p:spPr>
+            <p:txBody>
+              <a:bodyPr/>
+              <a:lstStyle/>
+              <a:p>
+                <a:r>
+                  <a:rPr lang="en-US">
+                    <a:noFill/>
+                  </a:rPr>
+                  <a:t> </a:t>
+                </a:r>
+              </a:p>
+            </p:txBody>
+          </p:sp>
+        </mc:Fallback>
+      </mc:AlternateContent>
+    </p:spTree>
+    <p:extLst>
+      <p:ext uri="{BB962C8B-B14F-4D97-AF65-F5344CB8AC3E}">
+        <p14:creationId xmlns:p14="http://schemas.microsoft.com/office/powerpoint/2010/main" val="1044005073"/>
+      </p:ext>
+    </p:extLst>
+  </p:cSld>
+  <p:clrMapOvr>
+    <a:masterClrMapping/>
+  </p:clrMapOvr>
+</p:sld>
+</file>
+
+<file path=ppt/slides/slide7.xml><?xml version="1.0" encoding="utf-8"?>
+<p:sld xmlns:a="http://schemas.openxmlformats.org/drawingml/2006/main" xmlns:r="http://schemas.openxmlformats.org/officeDocument/2006/relationships" xmlns:p="http://schemas.openxmlformats.org/presentationml/2006/main">
+  <p:cSld>
+    <p:spTree>
+      <p:nvGrpSpPr>
+        <p:cNvPr id="1" name=""/>
+        <p:cNvGrpSpPr/>
+        <p:nvPr/>
+      </p:nvGrpSpPr>
+      <p:grpSpPr>
+        <a:xfrm>
+          <a:off x="0" y="0"/>
+          <a:ext cx="0" cy="0"/>
+          <a:chOff x="0" y="0"/>
+          <a:chExt cx="0" cy="0"/>
+        </a:xfrm>
+      </p:grpSpPr>
+      <p:sp>
+        <p:nvSpPr>
           <p:cNvPr id="2" name="Título 1">
             <a:extLst>
               <a:ext uri="{FF2B5EF4-FFF2-40B4-BE49-F238E27FC236}">
-                <a16:creationId xmlns:a16="http://schemas.microsoft.com/office/drawing/2014/main" xmlns="" id="{81606C23-9F3D-9BC2-42BB-B1CBDDD993C7}"/>
+                <a16:creationId xmlns:a16="http://schemas.microsoft.com/office/drawing/2014/main" id="{81606C23-9F3D-9BC2-42BB-B1CBDDD993C7}"/>
               </a:ext>
             </a:extLst>
           </p:cNvPr>
@@ -8344,14 +9842,14 @@
           </a:p>
         </p:txBody>
       </p:sp>
-      <mc:AlternateContent xmlns:mc="http://schemas.openxmlformats.org/markup-compatibility/2006" xmlns:a14="http://schemas.microsoft.com/office/drawing/2010/main">
-        <mc:Choice Requires="a14">
+      <mc:AlternateContent xmlns:mc="http://schemas.openxmlformats.org/markup-compatibility/2006">
+        <mc:Choice xmlns:a14="http://schemas.microsoft.com/office/drawing/2010/main" Requires="a14">
           <p:sp>
             <p:nvSpPr>
               <p:cNvPr id="3" name="Espaço Reservado para Conteúdo 2">
                 <a:extLst>
                   <a:ext uri="{FF2B5EF4-FFF2-40B4-BE49-F238E27FC236}">
-                    <a16:creationId xmlns:a16="http://schemas.microsoft.com/office/drawing/2014/main" xmlns="" id="{AE166942-05E4-FA56-8495-A56B25B3EFA6}"/>
+                    <a16:creationId xmlns:a16="http://schemas.microsoft.com/office/drawing/2014/main" id="{AE166942-05E4-FA56-8495-A56B25B3EFA6}"/>
                   </a:ext>
                 </a:extLst>
               </p:cNvPr>
@@ -8376,7 +9874,7 @@
               <a:p>
                 <a:r>
                   <a:rPr lang="pt-BR" dirty="0"/>
-                  <a:t>Resolvemos o exercício usando a forma tradicional.</a:t>
+                  <a:t>Resolvemos o exercício usando o paradigma tradicional.</a:t>
                 </a:r>
               </a:p>
               <a:p>
@@ -8390,7 +9888,7 @@
                 </a:r>
                 <a:r>
                   <a:rPr lang="pt-BR" dirty="0"/>
-                  <a:t>(i.e., </a:t>
+                  <a:t>(i.e., os atributos, </a:t>
                 </a:r>
                 <a14:m>
                   <m:oMath xmlns:m="http://schemas.openxmlformats.org/officeDocument/2006/math">
@@ -8408,11 +9906,11 @@
                 </a:r>
                 <a:r>
                   <a:rPr lang="pt-BR" b="1" i="1" dirty="0"/>
-                  <a:t>sequência de regras</a:t>
+                  <a:t>sequência de regras de mapeamento</a:t>
                 </a:r>
                 <a:r>
                   <a:rPr lang="pt-BR" dirty="0"/>
-                  <a:t> de mapeamento criadas por nós (i.e., o </a:t>
+                  <a:t> criadas por nós (i.e., o </a:t>
                 </a:r>
                 <a:r>
                   <a:rPr lang="pt-BR" b="1" i="1" dirty="0"/>
@@ -8426,7 +9924,7 @@
             </p:txBody>
           </p:sp>
         </mc:Choice>
-        <mc:Fallback xmlns="">
+        <mc:Fallback>
           <p:sp>
             <p:nvSpPr>
               <p:cNvPr id="3" name="Espaço Reservado para Conteúdo 2">
@@ -8460,7 +9958,7 @@
               <a:lstStyle/>
               <a:p>
                 <a:r>
-                  <a:rPr lang="pt-BR">
+                  <a:rPr lang="en-US">
                     <a:noFill/>
                   </a:rPr>
                   <a:t> </a:t>
@@ -8475,7 +9973,7 @@
           <p:cNvPr id="9" name="Agrupar 8">
             <a:extLst>
               <a:ext uri="{FF2B5EF4-FFF2-40B4-BE49-F238E27FC236}">
-                <a16:creationId xmlns:a16="http://schemas.microsoft.com/office/drawing/2014/main" xmlns="" id="{3004A1E5-F79E-E010-EF57-BF102FF171D6}"/>
+                <a16:creationId xmlns:a16="http://schemas.microsoft.com/office/drawing/2014/main" id="{3004A1E5-F79E-E010-EF57-BF102FF171D6}"/>
               </a:ext>
             </a:extLst>
           </p:cNvPr>
@@ -8495,7 +9993,7 @@
             <p:cNvPr id="4" name="Retângulo 3">
               <a:extLst>
                 <a:ext uri="{FF2B5EF4-FFF2-40B4-BE49-F238E27FC236}">
-                  <a16:creationId xmlns:a16="http://schemas.microsoft.com/office/drawing/2014/main" xmlns="" id="{1B963C93-D75E-9431-7408-F77051E29FD4}"/>
+                  <a16:creationId xmlns:a16="http://schemas.microsoft.com/office/drawing/2014/main" id="{1B963C93-D75E-9431-7408-F77051E29FD4}"/>
                 </a:ext>
               </a:extLst>
             </p:cNvPr>
@@ -8559,7 +10057,7 @@
             <p:cNvPr id="5" name="Seta para a direita 5">
               <a:extLst>
                 <a:ext uri="{FF2B5EF4-FFF2-40B4-BE49-F238E27FC236}">
-                  <a16:creationId xmlns:a16="http://schemas.microsoft.com/office/drawing/2014/main" xmlns="" id="{4E5F3B39-104D-B446-B297-0285574D9008}"/>
+                  <a16:creationId xmlns:a16="http://schemas.microsoft.com/office/drawing/2014/main" id="{4E5F3B39-104D-B446-B297-0285574D9008}"/>
                 </a:ext>
               </a:extLst>
             </p:cNvPr>
@@ -8613,7 +10111,7 @@
                 <p:cNvPr id="6" name="Retângulo 5">
                   <a:extLst>
                     <a:ext uri="{FF2B5EF4-FFF2-40B4-BE49-F238E27FC236}">
-                      <a16:creationId xmlns:a16="http://schemas.microsoft.com/office/drawing/2014/main" xmlns="" id="{9A1DC3B8-53CE-BB6E-8CCF-036473150086}"/>
+                      <a16:creationId xmlns:a16="http://schemas.microsoft.com/office/drawing/2014/main" id="{9A1DC3B8-53CE-BB6E-8CCF-036473150086}"/>
                     </a:ext>
                   </a:extLst>
                 </p:cNvPr>
@@ -8638,10 +10136,7 @@
                   <a:pPr/>
                   <a14:m>
                     <m:oMathPara xmlns:m="http://schemas.openxmlformats.org/officeDocument/2006/math">
-                      <m:oMathParaPr>
-                        <m:jc m:val="centerGroup"/>
-                      </m:oMathParaPr>
-                      <m:oMath xmlns:m="http://schemas.openxmlformats.org/officeDocument/2006/math">
+                      <m:oMath>
                         <m:r>
                           <a:rPr lang="pt-BR" sz="2800" b="1" i="1">
                             <a:latin typeface="Cambria Math" panose="02040503050406030204" pitchFamily="18" charset="0"/>
@@ -8708,7 +10203,7 @@
                 <p:cNvPr id="8" name="Retângulo 7">
                   <a:extLst>
                     <a:ext uri="{FF2B5EF4-FFF2-40B4-BE49-F238E27FC236}">
-                      <a16:creationId xmlns:a16="http://schemas.microsoft.com/office/drawing/2014/main" xmlns="" id="{6938ECF4-C778-B3A7-64E6-19A166691210}"/>
+                      <a16:creationId xmlns:a16="http://schemas.microsoft.com/office/drawing/2014/main" id="{6938ECF4-C778-B3A7-64E6-19A166691210}"/>
                     </a:ext>
                   </a:extLst>
                 </p:cNvPr>
@@ -8733,10 +10228,7 @@
                   <a:pPr/>
                   <a14:m>
                     <m:oMathPara xmlns:m="http://schemas.openxmlformats.org/officeDocument/2006/math">
-                      <m:oMathParaPr>
-                        <m:jc m:val="centerGroup"/>
-                      </m:oMathParaPr>
-                      <m:oMath xmlns:m="http://schemas.openxmlformats.org/officeDocument/2006/math">
+                      <m:oMath>
                         <m:r>
                           <a:rPr lang="pt-BR" sz="2800" b="0" i="1" smtClean="0">
                             <a:latin typeface="Cambria Math" panose="02040503050406030204" pitchFamily="18" charset="0"/>
@@ -8801,7 +10293,7 @@
             <p:cNvPr id="20" name="Seta para a direita 5">
               <a:extLst>
                 <a:ext uri="{FF2B5EF4-FFF2-40B4-BE49-F238E27FC236}">
-                  <a16:creationId xmlns:a16="http://schemas.microsoft.com/office/drawing/2014/main" xmlns="" id="{218109C2-48AD-208F-17D2-B86488CA02BC}"/>
+                  <a16:creationId xmlns:a16="http://schemas.microsoft.com/office/drawing/2014/main" id="{218109C2-48AD-208F-17D2-B86488CA02BC}"/>
                 </a:ext>
               </a:extLst>
             </p:cNvPr>
@@ -8853,7 +10345,7 @@
             <p:cNvPr id="21" name="Seta para a direita 5">
               <a:extLst>
                 <a:ext uri="{FF2B5EF4-FFF2-40B4-BE49-F238E27FC236}">
-                  <a16:creationId xmlns:a16="http://schemas.microsoft.com/office/drawing/2014/main" xmlns="" id="{28BBB6A3-27A6-E73C-C73C-EDD42BAE4C68}"/>
+                  <a16:creationId xmlns:a16="http://schemas.microsoft.com/office/drawing/2014/main" id="{28BBB6A3-27A6-E73C-C73C-EDD42BAE4C68}"/>
                 </a:ext>
               </a:extLst>
             </p:cNvPr>
@@ -8907,7 +10399,7 @@
                 <p:cNvPr id="22" name="Retângulo 21">
                   <a:extLst>
                     <a:ext uri="{FF2B5EF4-FFF2-40B4-BE49-F238E27FC236}">
-                      <a16:creationId xmlns:a16="http://schemas.microsoft.com/office/drawing/2014/main" xmlns="" id="{886E8A3C-9C9E-D4E2-0A16-26A53FD318A7}"/>
+                      <a16:creationId xmlns:a16="http://schemas.microsoft.com/office/drawing/2014/main" id="{886E8A3C-9C9E-D4E2-0A16-26A53FD318A7}"/>
                     </a:ext>
                   </a:extLst>
                 </p:cNvPr>
@@ -9003,7 +10495,7 @@
                       <m:d>
                         <m:dPr>
                           <m:ctrlPr>
-                            <a:rPr lang="pt-BR" sz="1200" i="1">
+                            <a:rPr lang="pt-BR" sz="1200" b="1" i="1">
                               <a:latin typeface="Cambria Math" panose="02040503050406030204" pitchFamily="18" charset="0"/>
                             </a:rPr>
                           </m:ctrlPr>
@@ -9073,7 +10565,7 @@
                       <m:d>
                         <m:dPr>
                           <m:ctrlPr>
-                            <a:rPr lang="pt-BR" sz="1200" i="1">
+                            <a:rPr lang="pt-BR" sz="1200" b="1" i="1">
                               <a:latin typeface="Cambria Math" panose="02040503050406030204" pitchFamily="18" charset="0"/>
                             </a:rPr>
                           </m:ctrlPr>
@@ -9151,7 +10643,7 @@
                       <m:d>
                         <m:dPr>
                           <m:ctrlPr>
-                            <a:rPr lang="pt-BR" sz="1200" i="1">
+                            <a:rPr lang="pt-BR" sz="1200" b="1" i="1">
                               <a:latin typeface="Cambria Math" panose="02040503050406030204" pitchFamily="18" charset="0"/>
                             </a:rPr>
                           </m:ctrlPr>
@@ -9221,7 +10713,7 @@
                       <m:d>
                         <m:dPr>
                           <m:ctrlPr>
-                            <a:rPr lang="pt-BR" sz="1200" i="1">
+                            <a:rPr lang="pt-BR" sz="1200" b="1" i="1" smtClean="0">
                               <a:latin typeface="Cambria Math" panose="02040503050406030204" pitchFamily="18" charset="0"/>
                             </a:rPr>
                           </m:ctrlPr>
@@ -9323,7 +10815,7 @@
             <p:cNvPr id="25" name="Chave Direita 24">
               <a:extLst>
                 <a:ext uri="{FF2B5EF4-FFF2-40B4-BE49-F238E27FC236}">
-                  <a16:creationId xmlns:a16="http://schemas.microsoft.com/office/drawing/2014/main" xmlns="" id="{FB6055EB-3AA0-11EC-C6E3-613F5B4FCAB2}"/>
+                  <a16:creationId xmlns:a16="http://schemas.microsoft.com/office/drawing/2014/main" id="{FB6055EB-3AA0-11EC-C6E3-613F5B4FCAB2}"/>
                 </a:ext>
               </a:extLst>
             </p:cNvPr>
@@ -9370,7 +10862,7 @@
             <p:cNvPr id="7" name="CaixaDeTexto 6">
               <a:extLst>
                 <a:ext uri="{FF2B5EF4-FFF2-40B4-BE49-F238E27FC236}">
-                  <a16:creationId xmlns:a16="http://schemas.microsoft.com/office/drawing/2014/main" xmlns="" id="{53573EAF-DA30-E369-95B0-E2E5540B8EDE}"/>
+                  <a16:creationId xmlns:a16="http://schemas.microsoft.com/office/drawing/2014/main" id="{53573EAF-DA30-E369-95B0-E2E5540B8EDE}"/>
                 </a:ext>
               </a:extLst>
             </p:cNvPr>
@@ -9415,7 +10907,7 @@
 </p:sld>
 </file>
 
-<file path=ppt/slides/slide7.xml><?xml version="1.0" encoding="utf-8"?>
+<file path=ppt/slides/slide8.xml><?xml version="1.0" encoding="utf-8"?>
 <p:sld xmlns:a="http://schemas.openxmlformats.org/drawingml/2006/main" xmlns:r="http://schemas.openxmlformats.org/officeDocument/2006/relationships" xmlns:p="http://schemas.openxmlformats.org/presentationml/2006/main">
   <p:cSld>
     <p:spTree>
@@ -9437,7 +10929,7 @@
           <p:cNvPr id="2" name="Título 1">
             <a:extLst>
               <a:ext uri="{FF2B5EF4-FFF2-40B4-BE49-F238E27FC236}">
-                <a16:creationId xmlns:a16="http://schemas.microsoft.com/office/drawing/2014/main" xmlns="" id="{81606C23-9F3D-9BC2-42BB-B1CBDDD993C7}"/>
+                <a16:creationId xmlns:a16="http://schemas.microsoft.com/office/drawing/2014/main" id="{81606C23-9F3D-9BC2-42BB-B1CBDDD993C7}"/>
               </a:ext>
             </a:extLst>
           </p:cNvPr>
@@ -9465,7 +10957,7 @@
           <p:cNvPr id="3" name="Espaço Reservado para Conteúdo 2">
             <a:extLst>
               <a:ext uri="{FF2B5EF4-FFF2-40B4-BE49-F238E27FC236}">
-                <a16:creationId xmlns:a16="http://schemas.microsoft.com/office/drawing/2014/main" xmlns="" id="{AE166942-05E4-FA56-8495-A56B25B3EFA6}"/>
+                <a16:creationId xmlns:a16="http://schemas.microsoft.com/office/drawing/2014/main" id="{AE166942-05E4-FA56-8495-A56B25B3EFA6}"/>
               </a:ext>
             </a:extLst>
           </p:cNvPr>
@@ -9526,7 +11018,15 @@
             </a:r>
             <a:r>
               <a:rPr lang="pt-BR" b="1" i="1" dirty="0"/>
-              <a:t>, através de treinamento</a:t>
+              <a:t>, através de </a:t>
+            </a:r>
+            <a:r>
+              <a:rPr lang="pt-BR" b="1" i="1" dirty="0">
+                <a:solidFill>
+                  <a:srgbClr val="00B050"/>
+                </a:solidFill>
+              </a:rPr>
+              <a:t>treinamento</a:t>
             </a:r>
             <a:r>
               <a:rPr lang="pt-BR" dirty="0"/>
@@ -9556,7 +11056,7 @@
           <p:cNvPr id="4" name="Retângulo 3">
             <a:extLst>
               <a:ext uri="{FF2B5EF4-FFF2-40B4-BE49-F238E27FC236}">
-                <a16:creationId xmlns:a16="http://schemas.microsoft.com/office/drawing/2014/main" xmlns="" id="{1B963C93-D75E-9431-7408-F77051E29FD4}"/>
+                <a16:creationId xmlns:a16="http://schemas.microsoft.com/office/drawing/2014/main" id="{1B963C93-D75E-9431-7408-F77051E29FD4}"/>
               </a:ext>
             </a:extLst>
           </p:cNvPr>
@@ -9608,9 +11108,9 @@
               <a:t>Computador com algoritmo de </a:t>
             </a:r>
             <a:r>
-              <a:rPr lang="pt-BR" b="1" i="1" dirty="0">
+              <a:rPr lang="pt-BR" sz="2000" b="1" i="1" dirty="0">
                 <a:solidFill>
-                  <a:schemeClr val="tx1"/>
+                  <a:srgbClr val="00B050"/>
                 </a:solidFill>
               </a:rPr>
               <a:t>treinamento</a:t>
@@ -9636,7 +11136,7 @@
           <p:cNvPr id="5" name="Seta para a direita 5">
             <a:extLst>
               <a:ext uri="{FF2B5EF4-FFF2-40B4-BE49-F238E27FC236}">
-                <a16:creationId xmlns:a16="http://schemas.microsoft.com/office/drawing/2014/main" xmlns="" id="{4E5F3B39-104D-B446-B297-0285574D9008}"/>
+                <a16:creationId xmlns:a16="http://schemas.microsoft.com/office/drawing/2014/main" id="{4E5F3B39-104D-B446-B297-0285574D9008}"/>
               </a:ext>
             </a:extLst>
           </p:cNvPr>
@@ -9690,7 +11190,7 @@
               <p:cNvPr id="6" name="Retângulo 5">
                 <a:extLst>
                   <a:ext uri="{FF2B5EF4-FFF2-40B4-BE49-F238E27FC236}">
-                    <a16:creationId xmlns:a16="http://schemas.microsoft.com/office/drawing/2014/main" xmlns="" id="{9A1DC3B8-53CE-BB6E-8CCF-036473150086}"/>
+                    <a16:creationId xmlns:a16="http://schemas.microsoft.com/office/drawing/2014/main" id="{9A1DC3B8-53CE-BB6E-8CCF-036473150086}"/>
                   </a:ext>
                 </a:extLst>
               </p:cNvPr>
@@ -9715,10 +11215,7 @@
                 <a:pPr/>
                 <a14:m>
                   <m:oMathPara xmlns:m="http://schemas.openxmlformats.org/officeDocument/2006/math">
-                    <m:oMathParaPr>
-                      <m:jc m:val="centerGroup"/>
-                    </m:oMathParaPr>
-                    <m:oMath xmlns:m="http://schemas.openxmlformats.org/officeDocument/2006/math">
+                    <m:oMath>
                       <m:r>
                         <a:rPr lang="pt-BR" sz="2800" b="1" i="1">
                           <a:latin typeface="Cambria Math" panose="02040503050406030204" pitchFamily="18" charset="0"/>
@@ -9785,7 +11282,7 @@
               <p:cNvPr id="8" name="Retângulo 7">
                 <a:extLst>
                   <a:ext uri="{FF2B5EF4-FFF2-40B4-BE49-F238E27FC236}">
-                    <a16:creationId xmlns:a16="http://schemas.microsoft.com/office/drawing/2014/main" xmlns="" id="{6938ECF4-C778-B3A7-64E6-19A166691210}"/>
+                    <a16:creationId xmlns:a16="http://schemas.microsoft.com/office/drawing/2014/main" id="{6938ECF4-C778-B3A7-64E6-19A166691210}"/>
                   </a:ext>
                 </a:extLst>
               </p:cNvPr>
@@ -9810,14 +11307,11 @@
                 <a:pPr/>
                 <a14:m>
                   <m:oMathPara xmlns:m="http://schemas.openxmlformats.org/officeDocument/2006/math">
-                    <m:oMathParaPr>
-                      <m:jc m:val="centerGroup"/>
-                    </m:oMathParaPr>
-                    <m:oMath xmlns:m="http://schemas.openxmlformats.org/officeDocument/2006/math">
+                    <m:oMath>
                       <m:sSub>
                         <m:sSubPr>
                           <m:ctrlPr>
-                            <a:rPr lang="pt-BR" sz="2800" i="1" smtClean="0">
+                            <a:rPr lang="pt-BR" sz="2800" b="0" i="1" smtClean="0">
                               <a:latin typeface="Cambria Math" panose="02040503050406030204" pitchFamily="18" charset="0"/>
                             </a:rPr>
                           </m:ctrlPr>
@@ -9897,7 +11391,7 @@
           <p:cNvPr id="20" name="Seta para a direita 5">
             <a:extLst>
               <a:ext uri="{FF2B5EF4-FFF2-40B4-BE49-F238E27FC236}">
-                <a16:creationId xmlns:a16="http://schemas.microsoft.com/office/drawing/2014/main" xmlns="" id="{218109C2-48AD-208F-17D2-B86488CA02BC}"/>
+                <a16:creationId xmlns:a16="http://schemas.microsoft.com/office/drawing/2014/main" id="{218109C2-48AD-208F-17D2-B86488CA02BC}"/>
               </a:ext>
             </a:extLst>
           </p:cNvPr>
@@ -9949,7 +11443,7 @@
           <p:cNvPr id="21" name="Seta para a direita 5">
             <a:extLst>
               <a:ext uri="{FF2B5EF4-FFF2-40B4-BE49-F238E27FC236}">
-                <a16:creationId xmlns:a16="http://schemas.microsoft.com/office/drawing/2014/main" xmlns="" id="{28BBB6A3-27A6-E73C-C73C-EDD42BAE4C68}"/>
+                <a16:creationId xmlns:a16="http://schemas.microsoft.com/office/drawing/2014/main" id="{28BBB6A3-27A6-E73C-C73C-EDD42BAE4C68}"/>
               </a:ext>
             </a:extLst>
           </p:cNvPr>
@@ -10003,7 +11497,7 @@
               <p:cNvPr id="22" name="Retângulo 21">
                 <a:extLst>
                   <a:ext uri="{FF2B5EF4-FFF2-40B4-BE49-F238E27FC236}">
-                    <a16:creationId xmlns:a16="http://schemas.microsoft.com/office/drawing/2014/main" xmlns="" id="{886E8A3C-9C9E-D4E2-0A16-26A53FD318A7}"/>
+                    <a16:creationId xmlns:a16="http://schemas.microsoft.com/office/drawing/2014/main" id="{886E8A3C-9C9E-D4E2-0A16-26A53FD318A7}"/>
                   </a:ext>
                 </a:extLst>
               </p:cNvPr>
@@ -10099,7 +11593,7 @@
                     <m:d>
                       <m:dPr>
                         <m:ctrlPr>
-                          <a:rPr lang="pt-BR" i="1">
+                          <a:rPr lang="pt-BR" b="1" i="1">
                             <a:latin typeface="Cambria Math" panose="02040503050406030204" pitchFamily="18" charset="0"/>
                           </a:rPr>
                         </m:ctrlPr>
@@ -10169,7 +11663,7 @@
                     <m:d>
                       <m:dPr>
                         <m:ctrlPr>
-                          <a:rPr lang="pt-BR" i="1">
+                          <a:rPr lang="pt-BR" b="1" i="1">
                             <a:latin typeface="Cambria Math" panose="02040503050406030204" pitchFamily="18" charset="0"/>
                           </a:rPr>
                         </m:ctrlPr>
@@ -10247,7 +11741,7 @@
                     <m:d>
                       <m:dPr>
                         <m:ctrlPr>
-                          <a:rPr lang="pt-BR" i="1">
+                          <a:rPr lang="pt-BR" b="1" i="1">
                             <a:latin typeface="Cambria Math" panose="02040503050406030204" pitchFamily="18" charset="0"/>
                           </a:rPr>
                         </m:ctrlPr>
@@ -10317,7 +11811,7 @@
                     <m:d>
                       <m:dPr>
                         <m:ctrlPr>
-                          <a:rPr lang="pt-BR" i="1">
+                          <a:rPr lang="pt-BR" b="1" i="1" smtClean="0">
                             <a:latin typeface="Cambria Math" panose="02040503050406030204" pitchFamily="18" charset="0"/>
                           </a:rPr>
                         </m:ctrlPr>
@@ -10419,7 +11913,7 @@
           <p:cNvPr id="25" name="Chave Direita 24">
             <a:extLst>
               <a:ext uri="{FF2B5EF4-FFF2-40B4-BE49-F238E27FC236}">
-                <a16:creationId xmlns:a16="http://schemas.microsoft.com/office/drawing/2014/main" xmlns="" id="{FB6055EB-3AA0-11EC-C6E3-613F5B4FCAB2}"/>
+                <a16:creationId xmlns:a16="http://schemas.microsoft.com/office/drawing/2014/main" id="{FB6055EB-3AA0-11EC-C6E3-613F5B4FCAB2}"/>
               </a:ext>
             </a:extLst>
           </p:cNvPr>
@@ -10463,7 +11957,7 @@
           <p:cNvPr id="26" name="CaixaDeTexto 25">
             <a:extLst>
               <a:ext uri="{FF2B5EF4-FFF2-40B4-BE49-F238E27FC236}">
-                <a16:creationId xmlns:a16="http://schemas.microsoft.com/office/drawing/2014/main" xmlns="" id="{1EF07E67-C5F2-B086-76E2-28D476EDFE75}"/>
+                <a16:creationId xmlns:a16="http://schemas.microsoft.com/office/drawing/2014/main" id="{1EF07E67-C5F2-B086-76E2-28D476EDFE75}"/>
               </a:ext>
             </a:extLst>
           </p:cNvPr>
@@ -10499,7 +11993,7 @@
           <p:cNvPr id="27" name="Retângulo 26">
             <a:extLst>
               <a:ext uri="{FF2B5EF4-FFF2-40B4-BE49-F238E27FC236}">
-                <a16:creationId xmlns:a16="http://schemas.microsoft.com/office/drawing/2014/main" xmlns="" id="{1039EAD7-C64B-3EE5-C9F7-3B94B287701A}"/>
+                <a16:creationId xmlns:a16="http://schemas.microsoft.com/office/drawing/2014/main" id="{1039EAD7-C64B-3EE5-C9F7-3B94B287701A}"/>
               </a:ext>
             </a:extLst>
           </p:cNvPr>
@@ -10581,7 +12075,7 @@
               <p:cNvPr id="28" name="Retângulo 27">
                 <a:extLst>
                   <a:ext uri="{FF2B5EF4-FFF2-40B4-BE49-F238E27FC236}">
-                    <a16:creationId xmlns:a16="http://schemas.microsoft.com/office/drawing/2014/main" xmlns="" id="{0D3186D7-61C6-DA25-A270-1BB761654ECD}"/>
+                    <a16:creationId xmlns:a16="http://schemas.microsoft.com/office/drawing/2014/main" id="{0D3186D7-61C6-DA25-A270-1BB761654ECD}"/>
                   </a:ext>
                 </a:extLst>
               </p:cNvPr>
@@ -10606,10 +12100,7 @@
                 <a:pPr/>
                 <a14:m>
                   <m:oMathPara xmlns:m="http://schemas.openxmlformats.org/officeDocument/2006/math">
-                    <m:oMathParaPr>
-                      <m:jc m:val="centerGroup"/>
-                    </m:oMathParaPr>
-                    <m:oMath xmlns:m="http://schemas.openxmlformats.org/officeDocument/2006/math">
+                    <m:oMath>
                       <m:r>
                         <a:rPr lang="en-US" sz="3600" i="1" smtClean="0">
                           <a:latin typeface="Cambria Math" panose="02040503050406030204" pitchFamily="18" charset="0"/>
@@ -10675,7 +12166,7 @@
           <p:cNvPr id="29" name="Balão de Fala: Retângulo 28">
             <a:extLst>
               <a:ext uri="{FF2B5EF4-FFF2-40B4-BE49-F238E27FC236}">
-                <a16:creationId xmlns:a16="http://schemas.microsoft.com/office/drawing/2014/main" xmlns="" id="{AC1E74E4-5151-449A-1879-8EAC74323F3C}"/>
+                <a16:creationId xmlns:a16="http://schemas.microsoft.com/office/drawing/2014/main" id="{AC1E74E4-5151-449A-1879-8EAC74323F3C}"/>
               </a:ext>
             </a:extLst>
           </p:cNvPr>
@@ -10738,7 +12229,7 @@
 </p:sld>
 </file>
 
-<file path=ppt/slides/slide8.xml><?xml version="1.0" encoding="utf-8"?>
+<file path=ppt/slides/slide9.xml><?xml version="1.0" encoding="utf-8"?>
 <p:sld xmlns:a="http://schemas.openxmlformats.org/drawingml/2006/main" xmlns:r="http://schemas.openxmlformats.org/officeDocument/2006/relationships" xmlns:p="http://schemas.openxmlformats.org/presentationml/2006/main">
   <p:cSld>
     <p:spTree>
@@ -10875,7 +12366,7 @@
                     <m:d>
                       <m:dPr>
                         <m:ctrlPr>
-                          <a:rPr lang="pt-BR" i="1">
+                          <a:rPr lang="pt-BR" b="1" i="1">
                             <a:latin typeface="Cambria Math" panose="02040503050406030204" pitchFamily="18" charset="0"/>
                           </a:rPr>
                         </m:ctrlPr>
@@ -10945,7 +12436,7 @@
                     <m:d>
                       <m:dPr>
                         <m:ctrlPr>
-                          <a:rPr lang="pt-BR" i="1">
+                          <a:rPr lang="pt-BR" b="1" i="1">
                             <a:latin typeface="Cambria Math" panose="02040503050406030204" pitchFamily="18" charset="0"/>
                           </a:rPr>
                         </m:ctrlPr>
@@ -11023,7 +12514,7 @@
                     <m:d>
                       <m:dPr>
                         <m:ctrlPr>
-                          <a:rPr lang="pt-BR" i="1">
+                          <a:rPr lang="pt-BR" b="1" i="1">
                             <a:latin typeface="Cambria Math" panose="02040503050406030204" pitchFamily="18" charset="0"/>
                           </a:rPr>
                         </m:ctrlPr>
@@ -11093,7 +12584,7 @@
                     <m:d>
                       <m:dPr>
                         <m:ctrlPr>
-                          <a:rPr lang="pt-BR" i="1">
+                          <a:rPr lang="pt-BR" b="1" i="1" smtClean="0">
                             <a:latin typeface="Cambria Math" panose="02040503050406030204" pitchFamily="18" charset="0"/>
                           </a:rPr>
                         </m:ctrlPr>
@@ -11325,10 +12816,7 @@
                 <a:pPr/>
                 <a14:m>
                   <m:oMathPara xmlns:m="http://schemas.openxmlformats.org/officeDocument/2006/math">
-                    <m:oMathParaPr>
-                      <m:jc m:val="centerGroup"/>
-                    </m:oMathParaPr>
-                    <m:oMath xmlns:m="http://schemas.openxmlformats.org/officeDocument/2006/math">
+                    <m:oMath>
                       <m:r>
                         <a:rPr lang="pt-BR" sz="2800" b="1" i="1">
                           <a:latin typeface="Cambria Math" panose="02040503050406030204" pitchFamily="18" charset="0"/>
@@ -11408,14 +12896,11 @@
                 <a:pPr/>
                 <a14:m>
                   <m:oMathPara xmlns:m="http://schemas.openxmlformats.org/officeDocument/2006/math">
-                    <m:oMathParaPr>
-                      <m:jc m:val="centerGroup"/>
-                    </m:oMathParaPr>
-                    <m:oMath xmlns:m="http://schemas.openxmlformats.org/officeDocument/2006/math">
+                    <m:oMath>
                       <m:sSub>
                         <m:sSubPr>
                           <m:ctrlPr>
-                            <a:rPr lang="pt-BR" sz="2800" i="1" smtClean="0">
+                            <a:rPr lang="pt-BR" sz="2800" b="0" i="1" smtClean="0">
                               <a:latin typeface="Cambria Math" panose="02040503050406030204" pitchFamily="18" charset="0"/>
                             </a:rPr>
                           </m:ctrlPr>
@@ -11629,10 +13114,7 @@
                 <a:pPr/>
                 <a14:m>
                   <m:oMathPara xmlns:m="http://schemas.openxmlformats.org/officeDocument/2006/math">
-                    <m:oMathParaPr>
-                      <m:jc m:val="centerGroup"/>
-                    </m:oMathParaPr>
-                    <m:oMath xmlns:m="http://schemas.openxmlformats.org/officeDocument/2006/math">
+                    <m:oMath>
                       <m:r>
                         <a:rPr lang="en-US" sz="3600" i="1" smtClean="0">
                           <a:latin typeface="Cambria Math" panose="02040503050406030204" pitchFamily="18" charset="0"/>
@@ -11713,14 +13195,11 @@
                 <a:pPr/>
                 <a14:m>
                   <m:oMathPara xmlns:m="http://schemas.openxmlformats.org/officeDocument/2006/math">
-                    <m:oMathParaPr>
-                      <m:jc m:val="centerGroup"/>
-                    </m:oMathParaPr>
-                    <m:oMath xmlns:m="http://schemas.openxmlformats.org/officeDocument/2006/math">
+                    <m:oMath>
                       <m:sSub>
                         <m:sSubPr>
                           <m:ctrlPr>
-                            <a:rPr lang="pt-BR" sz="2800" i="1" smtClean="0">
+                            <a:rPr lang="pt-BR" sz="2800" b="0" i="1" smtClean="0">
                               <a:latin typeface="Cambria Math" panose="02040503050406030204" pitchFamily="18" charset="0"/>
                             </a:rPr>
                           </m:ctrlPr>
@@ -11901,10 +13380,7 @@
                 <a:pPr/>
                 <a14:m>
                   <m:oMathPara xmlns:m="http://schemas.openxmlformats.org/officeDocument/2006/math">
-                    <m:oMathParaPr>
-                      <m:jc m:val="centerGroup"/>
-                    </m:oMathParaPr>
-                    <m:oMath xmlns:m="http://schemas.openxmlformats.org/officeDocument/2006/math">
+                    <m:oMath>
                       <m:r>
                         <a:rPr lang="pt-BR" sz="2800" b="0" i="1" smtClean="0">
                           <a:latin typeface="Cambria Math" panose="02040503050406030204" pitchFamily="18" charset="0"/>
@@ -12157,8 +13633,8 @@
         </p:nvSpPr>
         <p:spPr>
           <a:xfrm>
-            <a:off x="2286273" y="1747419"/>
-            <a:ext cx="1510222" cy="400110"/>
+            <a:off x="1547239" y="1766442"/>
+            <a:ext cx="3227743" cy="400110"/>
           </a:xfrm>
           <a:prstGeom prst="rect">
             <a:avLst/>
@@ -12171,8 +13647,12 @@
           <a:lstStyle/>
           <a:p>
             <a:r>
-              <a:rPr lang="pt-BR" sz="2000"/>
-              <a:t>Treinamento</a:t>
+              <a:rPr lang="pt-BR" sz="2000" b="1" dirty="0">
+                <a:solidFill>
+                  <a:srgbClr val="00B050"/>
+                </a:solidFill>
+              </a:rPr>
+              <a:t>Treinamento supervisionado</a:t>
             </a:r>
           </a:p>
         </p:txBody>
@@ -12181,1426 +13661,6 @@
     <p:extLst>
       <p:ext uri="{BB962C8B-B14F-4D97-AF65-F5344CB8AC3E}">
         <p14:creationId xmlns:p14="http://schemas.microsoft.com/office/powerpoint/2010/main" val="3089829110"/>
-      </p:ext>
-    </p:extLst>
-  </p:cSld>
-  <p:clrMapOvr>
-    <a:masterClrMapping/>
-  </p:clrMapOvr>
-</p:sld>
-</file>
-
-<file path=ppt/slides/slide9.xml><?xml version="1.0" encoding="utf-8"?>
-<p:sld xmlns:a="http://schemas.openxmlformats.org/drawingml/2006/main" xmlns:r="http://schemas.openxmlformats.org/officeDocument/2006/relationships" xmlns:p="http://schemas.openxmlformats.org/presentationml/2006/main">
-  <p:cSld>
-    <p:spTree>
-      <p:nvGrpSpPr>
-        <p:cNvPr id="1" name=""/>
-        <p:cNvGrpSpPr/>
-        <p:nvPr/>
-      </p:nvGrpSpPr>
-      <p:grpSpPr>
-        <a:xfrm>
-          <a:off x="0" y="0"/>
-          <a:ext cx="0" cy="0"/>
-          <a:chOff x="0" y="0"/>
-          <a:chExt cx="0" cy="0"/>
-        </a:xfrm>
-      </p:grpSpPr>
-      <p:sp>
-        <p:nvSpPr>
-          <p:cNvPr id="2" name="Título 1"/>
-          <p:cNvSpPr>
-            <a:spLocks noGrp="1"/>
-          </p:cNvSpPr>
-          <p:nvPr>
-            <p:ph type="title"/>
-          </p:nvPr>
-        </p:nvSpPr>
-        <p:spPr/>
-        <p:txBody>
-          <a:bodyPr/>
-          <a:lstStyle/>
-          <a:p>
-            <a:r>
-              <a:rPr lang="pt-BR" dirty="0"/>
-              <a:t>Objetivo do curso</a:t>
-            </a:r>
-            <a:endParaRPr lang="en-US" dirty="0"/>
-          </a:p>
-        </p:txBody>
-      </p:sp>
-      <mc:AlternateContent xmlns:mc="http://schemas.openxmlformats.org/markup-compatibility/2006" xmlns:a14="http://schemas.microsoft.com/office/drawing/2010/main">
-        <mc:Choice Requires="a14">
-          <p:sp>
-            <p:nvSpPr>
-              <p:cNvPr id="4" name="Retângulo 3"/>
-              <p:cNvSpPr/>
-              <p:nvPr/>
-            </p:nvSpPr>
-            <p:spPr>
-              <a:xfrm>
-                <a:off x="7567749" y="2200433"/>
-                <a:ext cx="4484914" cy="2862322"/>
-              </a:xfrm>
-              <a:prstGeom prst="rect">
-                <a:avLst/>
-              </a:prstGeom>
-            </p:spPr>
-            <p:txBody>
-              <a:bodyPr wrap="square">
-                <a:spAutoFit/>
-              </a:bodyPr>
-              <a:lstStyle/>
-              <a:p>
-                <a:r>
-                  <a:rPr lang="pt-BR" dirty="0" err="1"/>
-                  <a:t>def</a:t>
-                </a:r>
-                <a:r>
-                  <a:rPr lang="pt-BR" dirty="0"/>
-                  <a:t> </a:t>
-                </a:r>
-                <a:r>
-                  <a:rPr lang="pt-BR" i="1" dirty="0" err="1"/>
-                  <a:t>predict</a:t>
-                </a:r>
-                <a:r>
-                  <a:rPr lang="pt-BR" dirty="0"/>
-                  <a:t>(</a:t>
-                </a:r>
-                <a14:m>
-                  <m:oMath xmlns:m="http://schemas.openxmlformats.org/officeDocument/2006/math">
-                    <m:r>
-                      <a:rPr lang="pt-BR" b="1" i="1">
-                        <a:latin typeface="Cambria Math" panose="02040503050406030204" pitchFamily="18" charset="0"/>
-                      </a:rPr>
-                      <m:t>𝒙</m:t>
-                    </m:r>
-                  </m:oMath>
-                </a14:m>
-                <a:r>
-                  <a:rPr lang="pt-BR" dirty="0"/>
-                  <a:t>):</a:t>
-                </a:r>
-              </a:p>
-              <a:p>
-                <a:r>
-                  <a:rPr lang="pt-BR" dirty="0"/>
-                  <a:t>    </a:t>
-                </a:r>
-                <a:r>
-                  <a:rPr lang="pt-BR" dirty="0" err="1"/>
-                  <a:t>if</a:t>
-                </a:r>
-                <a:r>
-                  <a:rPr lang="pt-BR" dirty="0"/>
-                  <a:t>(</a:t>
-                </a:r>
-                <a14:m>
-                  <m:oMath xmlns:m="http://schemas.openxmlformats.org/officeDocument/2006/math">
-                    <m:sSub>
-                      <m:sSubPr>
-                        <m:ctrlPr>
-                          <a:rPr lang="pt-BR" i="1">
-                            <a:latin typeface="Cambria Math" panose="02040503050406030204" pitchFamily="18" charset="0"/>
-                          </a:rPr>
-                        </m:ctrlPr>
-                      </m:sSubPr>
-                      <m:e>
-                        <m:r>
-                          <a:rPr lang="pt-BR" i="1">
-                            <a:latin typeface="Cambria Math" panose="02040503050406030204" pitchFamily="18" charset="0"/>
-                          </a:rPr>
-                          <m:t>𝑔</m:t>
-                        </m:r>
-                      </m:e>
-                      <m:sub>
-                        <m:r>
-                          <a:rPr lang="pt-BR" i="1">
-                            <a:latin typeface="Cambria Math" panose="02040503050406030204" pitchFamily="18" charset="0"/>
-                          </a:rPr>
-                          <m:t>1</m:t>
-                        </m:r>
-                      </m:sub>
-                    </m:sSub>
-                    <m:d>
-                      <m:dPr>
-                        <m:ctrlPr>
-                          <a:rPr lang="pt-BR" i="1">
-                            <a:latin typeface="Cambria Math" panose="02040503050406030204" pitchFamily="18" charset="0"/>
-                          </a:rPr>
-                        </m:ctrlPr>
-                      </m:dPr>
-                      <m:e>
-                        <m:r>
-                          <a:rPr lang="pt-BR" b="1" i="1">
-                            <a:latin typeface="Cambria Math" panose="02040503050406030204" pitchFamily="18" charset="0"/>
-                          </a:rPr>
-                          <m:t>𝒙</m:t>
-                        </m:r>
-                      </m:e>
-                    </m:d>
-                  </m:oMath>
-                </a14:m>
-                <a:r>
-                  <a:rPr lang="pt-BR" dirty="0"/>
-                  <a:t> &gt;= 0):</a:t>
-                </a:r>
-              </a:p>
-              <a:p>
-                <a:r>
-                  <a:rPr lang="pt-BR" dirty="0"/>
-                  <a:t>        </a:t>
-                </a:r>
-                <a:r>
-                  <a:rPr lang="pt-BR" dirty="0" err="1"/>
-                  <a:t>y_pred</a:t>
-                </a:r>
-                <a:r>
-                  <a:rPr lang="pt-BR" dirty="0"/>
-                  <a:t>[i] = 0</a:t>
-                </a:r>
-              </a:p>
-              <a:p>
-                <a:r>
-                  <a:rPr lang="pt-BR" dirty="0"/>
-                  <a:t>    # Caso quando </a:t>
-                </a:r>
-                <a14:m>
-                  <m:oMath xmlns:m="http://schemas.openxmlformats.org/officeDocument/2006/math">
-                    <m:sSub>
-                      <m:sSubPr>
-                        <m:ctrlPr>
-                          <a:rPr lang="pt-BR" i="1">
-                            <a:latin typeface="Cambria Math" panose="02040503050406030204" pitchFamily="18" charset="0"/>
-                          </a:rPr>
-                        </m:ctrlPr>
-                      </m:sSubPr>
-                      <m:e>
-                        <m:r>
-                          <a:rPr lang="pt-BR" i="1">
-                            <a:latin typeface="Cambria Math" panose="02040503050406030204" pitchFamily="18" charset="0"/>
-                          </a:rPr>
-                          <m:t>𝑔</m:t>
-                        </m:r>
-                      </m:e>
-                      <m:sub>
-                        <m:r>
-                          <a:rPr lang="pt-BR" i="1">
-                            <a:latin typeface="Cambria Math" panose="02040503050406030204" pitchFamily="18" charset="0"/>
-                          </a:rPr>
-                          <m:t>1</m:t>
-                        </m:r>
-                      </m:sub>
-                    </m:sSub>
-                    <m:d>
-                      <m:dPr>
-                        <m:ctrlPr>
-                          <a:rPr lang="pt-BR" i="1">
-                            <a:latin typeface="Cambria Math" panose="02040503050406030204" pitchFamily="18" charset="0"/>
-                          </a:rPr>
-                        </m:ctrlPr>
-                      </m:dPr>
-                      <m:e>
-                        <m:r>
-                          <a:rPr lang="pt-BR" b="1" i="1">
-                            <a:latin typeface="Cambria Math" panose="02040503050406030204" pitchFamily="18" charset="0"/>
-                          </a:rPr>
-                          <m:t>𝒙</m:t>
-                        </m:r>
-                      </m:e>
-                    </m:d>
-                  </m:oMath>
-                </a14:m>
-                <a:r>
-                  <a:rPr lang="pt-BR" dirty="0"/>
-                  <a:t> &lt; 0</a:t>
-                </a:r>
-              </a:p>
-              <a:p>
-                <a:r>
-                  <a:rPr lang="pt-BR" dirty="0"/>
-                  <a:t>    </a:t>
-                </a:r>
-                <a:r>
-                  <a:rPr lang="pt-BR" dirty="0" err="1"/>
-                  <a:t>else</a:t>
-                </a:r>
-                <a:r>
-                  <a:rPr lang="pt-BR" dirty="0"/>
-                  <a:t>:</a:t>
-                </a:r>
-              </a:p>
-              <a:p>
-                <a:r>
-                  <a:rPr lang="pt-BR" dirty="0"/>
-                  <a:t>        </a:t>
-                </a:r>
-                <a:r>
-                  <a:rPr lang="pt-BR" dirty="0" err="1"/>
-                  <a:t>if</a:t>
-                </a:r>
-                <a:r>
-                  <a:rPr lang="pt-BR" dirty="0"/>
-                  <a:t>(</a:t>
-                </a:r>
-                <a14:m>
-                  <m:oMath xmlns:m="http://schemas.openxmlformats.org/officeDocument/2006/math">
-                    <m:sSub>
-                      <m:sSubPr>
-                        <m:ctrlPr>
-                          <a:rPr lang="pt-BR" i="1">
-                            <a:latin typeface="Cambria Math" panose="02040503050406030204" pitchFamily="18" charset="0"/>
-                          </a:rPr>
-                        </m:ctrlPr>
-                      </m:sSubPr>
-                      <m:e>
-                        <m:r>
-                          <a:rPr lang="pt-BR" i="1">
-                            <a:latin typeface="Cambria Math" panose="02040503050406030204" pitchFamily="18" charset="0"/>
-                          </a:rPr>
-                          <m:t>𝑔</m:t>
-                        </m:r>
-                      </m:e>
-                      <m:sub>
-                        <m:r>
-                          <a:rPr lang="pt-BR" i="1">
-                            <a:latin typeface="Cambria Math" panose="02040503050406030204" pitchFamily="18" charset="0"/>
-                          </a:rPr>
-                          <m:t>2</m:t>
-                        </m:r>
-                      </m:sub>
-                    </m:sSub>
-                    <m:d>
-                      <m:dPr>
-                        <m:ctrlPr>
-                          <a:rPr lang="pt-BR" i="1">
-                            <a:latin typeface="Cambria Math" panose="02040503050406030204" pitchFamily="18" charset="0"/>
-                          </a:rPr>
-                        </m:ctrlPr>
-                      </m:dPr>
-                      <m:e>
-                        <m:r>
-                          <a:rPr lang="pt-BR" b="1" i="1">
-                            <a:latin typeface="Cambria Math" panose="02040503050406030204" pitchFamily="18" charset="0"/>
-                          </a:rPr>
-                          <m:t>𝒙</m:t>
-                        </m:r>
-                      </m:e>
-                    </m:d>
-                  </m:oMath>
-                </a14:m>
-                <a:r>
-                  <a:rPr lang="pt-BR" dirty="0"/>
-                  <a:t> &lt; 0):</a:t>
-                </a:r>
-              </a:p>
-              <a:p>
-                <a:r>
-                  <a:rPr lang="pt-BR" dirty="0"/>
-                  <a:t>            </a:t>
-                </a:r>
-                <a:r>
-                  <a:rPr lang="pt-BR" dirty="0" err="1"/>
-                  <a:t>y_pred</a:t>
-                </a:r>
-                <a:r>
-                  <a:rPr lang="pt-BR" dirty="0"/>
-                  <a:t>[i] = 1</a:t>
-                </a:r>
-              </a:p>
-              <a:p>
-                <a:r>
-                  <a:rPr lang="pt-BR" dirty="0"/>
-                  <a:t>        # caso quando # </a:t>
-                </a:r>
-                <a14:m>
-                  <m:oMath xmlns:m="http://schemas.openxmlformats.org/officeDocument/2006/math">
-                    <m:sSub>
-                      <m:sSubPr>
-                        <m:ctrlPr>
-                          <a:rPr lang="pt-BR" i="1">
-                            <a:latin typeface="Cambria Math" panose="02040503050406030204" pitchFamily="18" charset="0"/>
-                          </a:rPr>
-                        </m:ctrlPr>
-                      </m:sSubPr>
-                      <m:e>
-                        <m:r>
-                          <a:rPr lang="pt-BR" i="1">
-                            <a:latin typeface="Cambria Math" panose="02040503050406030204" pitchFamily="18" charset="0"/>
-                          </a:rPr>
-                          <m:t>𝑔</m:t>
-                        </m:r>
-                      </m:e>
-                      <m:sub>
-                        <m:r>
-                          <a:rPr lang="pt-BR" i="1">
-                            <a:latin typeface="Cambria Math" panose="02040503050406030204" pitchFamily="18" charset="0"/>
-                          </a:rPr>
-                          <m:t>2</m:t>
-                        </m:r>
-                      </m:sub>
-                    </m:sSub>
-                    <m:d>
-                      <m:dPr>
-                        <m:ctrlPr>
-                          <a:rPr lang="pt-BR" i="1">
-                            <a:latin typeface="Cambria Math" panose="02040503050406030204" pitchFamily="18" charset="0"/>
-                          </a:rPr>
-                        </m:ctrlPr>
-                      </m:dPr>
-                      <m:e>
-                        <m:r>
-                          <a:rPr lang="pt-BR" b="1" i="1" smtClean="0">
-                            <a:latin typeface="Cambria Math" panose="02040503050406030204" pitchFamily="18" charset="0"/>
-                          </a:rPr>
-                          <m:t>𝒙</m:t>
-                        </m:r>
-                      </m:e>
-                    </m:d>
-                  </m:oMath>
-                </a14:m>
-                <a:r>
-                  <a:rPr lang="pt-BR" dirty="0"/>
-                  <a:t> &gt;= 0</a:t>
-                </a:r>
-              </a:p>
-              <a:p>
-                <a:r>
-                  <a:rPr lang="pt-BR" dirty="0"/>
-                  <a:t>        </a:t>
-                </a:r>
-                <a:r>
-                  <a:rPr lang="pt-BR" dirty="0" err="1"/>
-                  <a:t>else</a:t>
-                </a:r>
-                <a:r>
-                  <a:rPr lang="pt-BR" dirty="0"/>
-                  <a:t>: </a:t>
-                </a:r>
-              </a:p>
-              <a:p>
-                <a:r>
-                  <a:rPr lang="pt-BR" dirty="0"/>
-                  <a:t>            </a:t>
-                </a:r>
-                <a:r>
-                  <a:rPr lang="pt-BR" dirty="0" err="1"/>
-                  <a:t>y_pred</a:t>
-                </a:r>
-                <a:r>
-                  <a:rPr lang="pt-BR" dirty="0"/>
-                  <a:t>[i] = 2</a:t>
-                </a:r>
-              </a:p>
-            </p:txBody>
-          </p:sp>
-        </mc:Choice>
-        <mc:Fallback xmlns="">
-          <p:sp>
-            <p:nvSpPr>
-              <p:cNvPr id="4" name="Retângulo 3"/>
-              <p:cNvSpPr>
-                <a:spLocks noRot="1" noChangeAspect="1" noMove="1" noResize="1" noEditPoints="1" noAdjustHandles="1" noChangeArrowheads="1" noChangeShapeType="1" noTextEdit="1"/>
-              </p:cNvSpPr>
-              <p:nvPr/>
-            </p:nvSpPr>
-            <p:spPr>
-              <a:xfrm>
-                <a:off x="7567749" y="2200433"/>
-                <a:ext cx="4484914" cy="2862322"/>
-              </a:xfrm>
-              <a:prstGeom prst="rect">
-                <a:avLst/>
-              </a:prstGeom>
-              <a:blipFill rotWithShape="0">
-                <a:blip r:embed="rId2"/>
-                <a:stretch>
-                  <a:fillRect l="-1087" t="-1277" b="-2340"/>
-                </a:stretch>
-              </a:blipFill>
-            </p:spPr>
-            <p:txBody>
-              <a:bodyPr/>
-              <a:lstStyle/>
-              <a:p>
-                <a:r>
-                  <a:rPr lang="pt-BR">
-                    <a:noFill/>
-                  </a:rPr>
-                  <a:t> </a:t>
-                </a:r>
-              </a:p>
-            </p:txBody>
-          </p:sp>
-        </mc:Fallback>
-      </mc:AlternateContent>
-      <p:sp>
-        <p:nvSpPr>
-          <p:cNvPr id="5" name="Retângulo 4"/>
-          <p:cNvSpPr/>
-          <p:nvPr/>
-        </p:nvSpPr>
-        <p:spPr>
-          <a:xfrm>
-            <a:off x="1188013" y="2696427"/>
-            <a:ext cx="2011680" cy="1262743"/>
-          </a:xfrm>
-          <a:prstGeom prst="rect">
-            <a:avLst/>
-          </a:prstGeom>
-          <a:noFill/>
-          <a:ln w="28575">
-            <a:solidFill>
-              <a:schemeClr val="tx1"/>
-            </a:solidFill>
-          </a:ln>
-        </p:spPr>
-        <p:style>
-          <a:lnRef idx="2">
-            <a:schemeClr val="accent1">
-              <a:shade val="50000"/>
-            </a:schemeClr>
-          </a:lnRef>
-          <a:fillRef idx="1">
-            <a:schemeClr val="accent1"/>
-          </a:fillRef>
-          <a:effectRef idx="0">
-            <a:schemeClr val="accent1"/>
-          </a:effectRef>
-          <a:fontRef idx="minor">
-            <a:schemeClr val="lt1"/>
-          </a:fontRef>
-        </p:style>
-        <p:txBody>
-          <a:bodyPr rtlCol="0" anchor="ctr"/>
-          <a:lstStyle/>
-          <a:p>
-            <a:pPr algn="ctr"/>
-            <a:r>
-              <a:rPr lang="pt-BR" dirty="0">
-                <a:solidFill>
-                  <a:schemeClr val="tx1"/>
-                </a:solidFill>
-              </a:rPr>
-              <a:t>Modelo de ML</a:t>
-            </a:r>
-          </a:p>
-          <a:p>
-            <a:pPr algn="ctr"/>
-            <a:r>
-              <a:rPr lang="pt-BR" dirty="0">
-                <a:solidFill>
-                  <a:schemeClr val="tx1"/>
-                </a:solidFill>
-              </a:rPr>
-              <a:t>(Classificador)</a:t>
-            </a:r>
-            <a:endParaRPr lang="en-US" dirty="0">
-              <a:solidFill>
-                <a:schemeClr val="tx1"/>
-              </a:solidFill>
-            </a:endParaRPr>
-          </a:p>
-        </p:txBody>
-      </p:sp>
-      <p:sp>
-        <p:nvSpPr>
-          <p:cNvPr id="6" name="Seta para a direita 5"/>
-          <p:cNvSpPr/>
-          <p:nvPr/>
-        </p:nvSpPr>
-        <p:spPr>
-          <a:xfrm>
-            <a:off x="787419" y="3127501"/>
-            <a:ext cx="400594" cy="400594"/>
-          </a:xfrm>
-          <a:prstGeom prst="rightArrow">
-            <a:avLst/>
-          </a:prstGeom>
-          <a:noFill/>
-          <a:ln w="28575">
-            <a:solidFill>
-              <a:schemeClr val="tx1"/>
-            </a:solidFill>
-          </a:ln>
-        </p:spPr>
-        <p:style>
-          <a:lnRef idx="2">
-            <a:schemeClr val="accent1">
-              <a:shade val="50000"/>
-            </a:schemeClr>
-          </a:lnRef>
-          <a:fillRef idx="1">
-            <a:schemeClr val="accent1"/>
-          </a:fillRef>
-          <a:effectRef idx="0">
-            <a:schemeClr val="accent1"/>
-          </a:effectRef>
-          <a:fontRef idx="minor">
-            <a:schemeClr val="lt1"/>
-          </a:fontRef>
-        </p:style>
-        <p:txBody>
-          <a:bodyPr rtlCol="0" anchor="ctr"/>
-          <a:lstStyle/>
-          <a:p>
-            <a:pPr algn="ctr"/>
-            <a:endParaRPr lang="en-US"/>
-          </a:p>
-        </p:txBody>
-      </p:sp>
-      <mc:AlternateContent xmlns:mc="http://schemas.openxmlformats.org/markup-compatibility/2006" xmlns:a14="http://schemas.microsoft.com/office/drawing/2010/main">
-        <mc:Choice Requires="a14">
-          <p:sp>
-            <p:nvSpPr>
-              <p:cNvPr id="8" name="Retângulo 7"/>
-              <p:cNvSpPr/>
-              <p:nvPr/>
-            </p:nvSpPr>
-            <p:spPr>
-              <a:xfrm>
-                <a:off x="263433" y="3066188"/>
-                <a:ext cx="473206" cy="523220"/>
-              </a:xfrm>
-              <a:prstGeom prst="rect">
-                <a:avLst/>
-              </a:prstGeom>
-            </p:spPr>
-            <p:txBody>
-              <a:bodyPr wrap="none">
-                <a:spAutoFit/>
-              </a:bodyPr>
-              <a:lstStyle/>
-              <a:p>
-                <a:pPr/>
-                <a14:m>
-                  <m:oMathPara xmlns:m="http://schemas.openxmlformats.org/officeDocument/2006/math">
-                    <m:oMathParaPr>
-                      <m:jc m:val="centerGroup"/>
-                    </m:oMathParaPr>
-                    <m:oMath xmlns:m="http://schemas.openxmlformats.org/officeDocument/2006/math">
-                      <m:r>
-                        <a:rPr lang="pt-BR" sz="2800" b="1" i="1">
-                          <a:latin typeface="Cambria Math" panose="02040503050406030204" pitchFamily="18" charset="0"/>
-                        </a:rPr>
-                        <m:t>𝒙</m:t>
-                      </m:r>
-                    </m:oMath>
-                  </m:oMathPara>
-                </a14:m>
-                <a:endParaRPr lang="en-US" sz="2800" dirty="0"/>
-              </a:p>
-            </p:txBody>
-          </p:sp>
-        </mc:Choice>
-        <mc:Fallback xmlns="">
-          <p:sp>
-            <p:nvSpPr>
-              <p:cNvPr id="8" name="Retângulo 7"/>
-              <p:cNvSpPr>
-                <a:spLocks noRot="1" noChangeAspect="1" noMove="1" noResize="1" noEditPoints="1" noAdjustHandles="1" noChangeArrowheads="1" noChangeShapeType="1" noTextEdit="1"/>
-              </p:cNvSpPr>
-              <p:nvPr/>
-            </p:nvSpPr>
-            <p:spPr>
-              <a:xfrm>
-                <a:off x="263433" y="3066188"/>
-                <a:ext cx="473206" cy="523220"/>
-              </a:xfrm>
-              <a:prstGeom prst="rect">
-                <a:avLst/>
-              </a:prstGeom>
-              <a:blipFill rotWithShape="0">
-                <a:blip r:embed="rId3"/>
-                <a:stretch>
-                  <a:fillRect/>
-                </a:stretch>
-              </a:blipFill>
-            </p:spPr>
-            <p:txBody>
-              <a:bodyPr/>
-              <a:lstStyle/>
-              <a:p>
-                <a:r>
-                  <a:rPr lang="pt-BR">
-                    <a:noFill/>
-                  </a:rPr>
-                  <a:t> </a:t>
-                </a:r>
-              </a:p>
-            </p:txBody>
-          </p:sp>
-        </mc:Fallback>
-      </mc:AlternateContent>
-      <mc:AlternateContent xmlns:mc="http://schemas.openxmlformats.org/markup-compatibility/2006" xmlns:a14="http://schemas.microsoft.com/office/drawing/2010/main">
-        <mc:Choice Requires="a14">
-          <p:sp>
-            <p:nvSpPr>
-              <p:cNvPr id="9" name="Retângulo 8"/>
-              <p:cNvSpPr/>
-              <p:nvPr/>
-            </p:nvSpPr>
-            <p:spPr>
-              <a:xfrm>
-                <a:off x="3168471" y="3219547"/>
-                <a:ext cx="1111651" cy="561820"/>
-              </a:xfrm>
-              <a:prstGeom prst="rect">
-                <a:avLst/>
-              </a:prstGeom>
-            </p:spPr>
-            <p:txBody>
-              <a:bodyPr wrap="none">
-                <a:spAutoFit/>
-              </a:bodyPr>
-              <a:lstStyle/>
-              <a:p>
-                <a:pPr/>
-                <a14:m>
-                  <m:oMathPara xmlns:m="http://schemas.openxmlformats.org/officeDocument/2006/math">
-                    <m:oMathParaPr>
-                      <m:jc m:val="centerGroup"/>
-                    </m:oMathParaPr>
-                    <m:oMath xmlns:m="http://schemas.openxmlformats.org/officeDocument/2006/math">
-                      <m:sSub>
-                        <m:sSubPr>
-                          <m:ctrlPr>
-                            <a:rPr lang="pt-BR" sz="2800" i="1" smtClean="0">
-                              <a:latin typeface="Cambria Math" panose="02040503050406030204" pitchFamily="18" charset="0"/>
-                            </a:rPr>
-                          </m:ctrlPr>
-                        </m:sSubPr>
-                        <m:e>
-                          <m:r>
-                            <a:rPr lang="pt-BR" sz="2800" b="0" i="1" smtClean="0">
-                              <a:latin typeface="Cambria Math" panose="02040503050406030204" pitchFamily="18" charset="0"/>
-                            </a:rPr>
-                            <m:t>𝑦</m:t>
-                          </m:r>
-                        </m:e>
-                        <m:sub>
-                          <m:r>
-                            <a:rPr lang="pt-BR" sz="2800" b="0" i="1" smtClean="0">
-                              <a:latin typeface="Cambria Math" panose="02040503050406030204" pitchFamily="18" charset="0"/>
-                            </a:rPr>
-                            <m:t>𝑝𝑟𝑒𝑑</m:t>
-                          </m:r>
-                        </m:sub>
-                      </m:sSub>
-                    </m:oMath>
-                  </m:oMathPara>
-                </a14:m>
-                <a:endParaRPr lang="en-US" sz="2800" dirty="0"/>
-              </a:p>
-            </p:txBody>
-          </p:sp>
-        </mc:Choice>
-        <mc:Fallback xmlns="">
-          <p:sp>
-            <p:nvSpPr>
-              <p:cNvPr id="9" name="Retângulo 8"/>
-              <p:cNvSpPr>
-                <a:spLocks noRot="1" noChangeAspect="1" noMove="1" noResize="1" noEditPoints="1" noAdjustHandles="1" noChangeArrowheads="1" noChangeShapeType="1" noTextEdit="1"/>
-              </p:cNvSpPr>
-              <p:nvPr/>
-            </p:nvSpPr>
-            <p:spPr>
-              <a:xfrm>
-                <a:off x="3168471" y="3219547"/>
-                <a:ext cx="1111651" cy="561820"/>
-              </a:xfrm>
-              <a:prstGeom prst="rect">
-                <a:avLst/>
-              </a:prstGeom>
-              <a:blipFill rotWithShape="0">
-                <a:blip r:embed="rId4"/>
-                <a:stretch>
-                  <a:fillRect/>
-                </a:stretch>
-              </a:blipFill>
-            </p:spPr>
-            <p:txBody>
-              <a:bodyPr/>
-              <a:lstStyle/>
-              <a:p>
-                <a:r>
-                  <a:rPr lang="pt-BR">
-                    <a:noFill/>
-                  </a:rPr>
-                  <a:t> </a:t>
-                </a:r>
-              </a:p>
-            </p:txBody>
-          </p:sp>
-        </mc:Fallback>
-      </mc:AlternateContent>
-      <p:sp>
-        <p:nvSpPr>
-          <p:cNvPr id="10" name="CaixaDeTexto 9"/>
-          <p:cNvSpPr txBox="1"/>
-          <p:nvPr/>
-        </p:nvSpPr>
-        <p:spPr>
-          <a:xfrm>
-            <a:off x="838200" y="5295501"/>
-            <a:ext cx="11059391" cy="954107"/>
-          </a:xfrm>
-          <a:prstGeom prst="rect">
-            <a:avLst/>
-          </a:prstGeom>
-          <a:noFill/>
-        </p:spPr>
-        <p:txBody>
-          <a:bodyPr wrap="square" rtlCol="0">
-            <a:spAutoFit/>
-          </a:bodyPr>
-          <a:lstStyle/>
-          <a:p>
-            <a:pPr algn="ctr"/>
-            <a:r>
-              <a:rPr lang="pt-BR" sz="2800" dirty="0"/>
-              <a:t>Ou seja, o objetivo é </a:t>
-            </a:r>
-            <a:r>
-              <a:rPr lang="pt-BR" sz="2800" b="1" i="1" dirty="0">
-                <a:solidFill>
-                  <a:srgbClr val="7030A0"/>
-                </a:solidFill>
-              </a:rPr>
-              <a:t>encontrar</a:t>
-            </a:r>
-            <a:r>
-              <a:rPr lang="pt-BR" sz="2800" dirty="0"/>
-              <a:t> </a:t>
-            </a:r>
-            <a:r>
-              <a:rPr lang="pt-BR" sz="2800" b="1" i="1" dirty="0"/>
-              <a:t>funções discriminantes </a:t>
-            </a:r>
-            <a:r>
-              <a:rPr lang="pt-BR" sz="2800" dirty="0"/>
-              <a:t>(i.e</a:t>
-            </a:r>
-            <a:r>
-              <a:rPr lang="pt-BR" sz="2800"/>
-              <a:t>., equações </a:t>
-            </a:r>
-            <a:r>
-              <a:rPr lang="pt-BR" sz="2800" dirty="0"/>
-              <a:t>e seus respectivos pesos)</a:t>
-            </a:r>
-            <a:r>
-              <a:rPr lang="pt-BR" sz="2800" b="1" i="1" dirty="0"/>
-              <a:t> </a:t>
-            </a:r>
-            <a:r>
-              <a:rPr lang="pt-BR" sz="2800" dirty="0"/>
-              <a:t>que </a:t>
-            </a:r>
-            <a:r>
-              <a:rPr lang="pt-BR" sz="2800" b="1" i="1" dirty="0">
-                <a:solidFill>
-                  <a:srgbClr val="00B050"/>
-                </a:solidFill>
-              </a:rPr>
-              <a:t>minimizem</a:t>
-            </a:r>
-            <a:r>
-              <a:rPr lang="pt-BR" sz="2800" dirty="0"/>
-              <a:t> o </a:t>
-            </a:r>
-            <a:r>
-              <a:rPr lang="pt-BR" sz="2800" b="1" i="1" dirty="0"/>
-              <a:t>erro de classificação</a:t>
-            </a:r>
-            <a:r>
-              <a:rPr lang="pt-BR" sz="2800" dirty="0"/>
-              <a:t>.</a:t>
-            </a:r>
-            <a:endParaRPr lang="en-US" sz="2800" dirty="0"/>
-          </a:p>
-        </p:txBody>
-      </p:sp>
-      <mc:AlternateContent xmlns:mc="http://schemas.openxmlformats.org/markup-compatibility/2006" xmlns:a14="http://schemas.microsoft.com/office/drawing/2010/main">
-        <mc:Choice Requires="a14">
-          <p:sp>
-            <p:nvSpPr>
-              <p:cNvPr id="12" name="Retângulo 11"/>
-              <p:cNvSpPr/>
-              <p:nvPr/>
-            </p:nvSpPr>
-            <p:spPr>
-              <a:xfrm>
-                <a:off x="6338855" y="2998696"/>
-                <a:ext cx="628698" cy="646331"/>
-              </a:xfrm>
-              <a:prstGeom prst="rect">
-                <a:avLst/>
-              </a:prstGeom>
-            </p:spPr>
-            <p:txBody>
-              <a:bodyPr wrap="none">
-                <a:spAutoFit/>
-              </a:bodyPr>
-              <a:lstStyle/>
-              <a:p>
-                <a:pPr/>
-                <a14:m>
-                  <m:oMathPara xmlns:m="http://schemas.openxmlformats.org/officeDocument/2006/math">
-                    <m:oMathParaPr>
-                      <m:jc m:val="centerGroup"/>
-                    </m:oMathParaPr>
-                    <m:oMath xmlns:m="http://schemas.openxmlformats.org/officeDocument/2006/math">
-                      <m:r>
-                        <a:rPr lang="en-US" sz="3600" i="1" smtClean="0">
-                          <a:latin typeface="Cambria Math" panose="02040503050406030204" pitchFamily="18" charset="0"/>
-                          <a:ea typeface="Cambria Math" panose="02040503050406030204" pitchFamily="18" charset="0"/>
-                        </a:rPr>
-                        <m:t>≈</m:t>
-                      </m:r>
-                    </m:oMath>
-                  </m:oMathPara>
-                </a14:m>
-                <a:endParaRPr lang="en-US" sz="3600" dirty="0"/>
-              </a:p>
-            </p:txBody>
-          </p:sp>
-        </mc:Choice>
-        <mc:Fallback xmlns="">
-          <p:sp>
-            <p:nvSpPr>
-              <p:cNvPr id="12" name="Retângulo 11"/>
-              <p:cNvSpPr>
-                <a:spLocks noRot="1" noChangeAspect="1" noMove="1" noResize="1" noEditPoints="1" noAdjustHandles="1" noChangeArrowheads="1" noChangeShapeType="1" noTextEdit="1"/>
-              </p:cNvSpPr>
-              <p:nvPr/>
-            </p:nvSpPr>
-            <p:spPr>
-              <a:xfrm>
-                <a:off x="6338855" y="2998696"/>
-                <a:ext cx="628698" cy="646331"/>
-              </a:xfrm>
-              <a:prstGeom prst="rect">
-                <a:avLst/>
-              </a:prstGeom>
-              <a:blipFill rotWithShape="0">
-                <a:blip r:embed="rId6"/>
-                <a:stretch>
-                  <a:fillRect/>
-                </a:stretch>
-              </a:blipFill>
-            </p:spPr>
-            <p:txBody>
-              <a:bodyPr/>
-              <a:lstStyle/>
-              <a:p>
-                <a:r>
-                  <a:rPr lang="pt-BR">
-                    <a:noFill/>
-                  </a:rPr>
-                  <a:t> </a:t>
-                </a:r>
-              </a:p>
-            </p:txBody>
-          </p:sp>
-        </mc:Fallback>
-      </mc:AlternateContent>
-      <mc:AlternateContent xmlns:mc="http://schemas.openxmlformats.org/markup-compatibility/2006" xmlns:a14="http://schemas.microsoft.com/office/drawing/2010/main">
-        <mc:Choice Requires="a14">
-          <p:sp>
-            <p:nvSpPr>
-              <p:cNvPr id="14" name="Retângulo 13"/>
-              <p:cNvSpPr/>
-              <p:nvPr/>
-            </p:nvSpPr>
-            <p:spPr>
-              <a:xfrm>
-                <a:off x="3600287" y="2169865"/>
-                <a:ext cx="1678793" cy="556434"/>
-              </a:xfrm>
-              <a:prstGeom prst="rect">
-                <a:avLst/>
-              </a:prstGeom>
-            </p:spPr>
-            <p:txBody>
-              <a:bodyPr wrap="none">
-                <a:spAutoFit/>
-              </a:bodyPr>
-              <a:lstStyle/>
-              <a:p>
-                <a:pPr/>
-                <a14:m>
-                  <m:oMathPara xmlns:m="http://schemas.openxmlformats.org/officeDocument/2006/math">
-                    <m:oMathParaPr>
-                      <m:jc m:val="centerGroup"/>
-                    </m:oMathParaPr>
-                    <m:oMath xmlns:m="http://schemas.openxmlformats.org/officeDocument/2006/math">
-                      <m:sSub>
-                        <m:sSubPr>
-                          <m:ctrlPr>
-                            <a:rPr lang="pt-BR" sz="2800" i="1" smtClean="0">
-                              <a:latin typeface="Cambria Math" panose="02040503050406030204" pitchFamily="18" charset="0"/>
-                            </a:rPr>
-                          </m:ctrlPr>
-                        </m:sSubPr>
-                        <m:e>
-                          <m:r>
-                            <a:rPr lang="pt-BR" sz="2800" b="0" i="1" smtClean="0">
-                              <a:latin typeface="Cambria Math" panose="02040503050406030204" pitchFamily="18" charset="0"/>
-                            </a:rPr>
-                            <m:t>𝑦</m:t>
-                          </m:r>
-                        </m:e>
-                        <m:sub>
-                          <m:r>
-                            <a:rPr lang="pt-BR" sz="2800" b="0" i="1" smtClean="0">
-                              <a:latin typeface="Cambria Math" panose="02040503050406030204" pitchFamily="18" charset="0"/>
-                            </a:rPr>
-                            <m:t>𝑒𝑠𝑝𝑒𝑟𝑎𝑑𝑜</m:t>
-                          </m:r>
-                        </m:sub>
-                      </m:sSub>
-                    </m:oMath>
-                  </m:oMathPara>
-                </a14:m>
-                <a:endParaRPr lang="en-US" sz="2800" dirty="0"/>
-              </a:p>
-            </p:txBody>
-          </p:sp>
-        </mc:Choice>
-        <mc:Fallback xmlns="">
-          <p:sp>
-            <p:nvSpPr>
-              <p:cNvPr id="14" name="Retângulo 13"/>
-              <p:cNvSpPr>
-                <a:spLocks noRot="1" noChangeAspect="1" noMove="1" noResize="1" noEditPoints="1" noAdjustHandles="1" noChangeArrowheads="1" noChangeShapeType="1" noTextEdit="1"/>
-              </p:cNvSpPr>
-              <p:nvPr/>
-            </p:nvSpPr>
-            <p:spPr>
-              <a:xfrm>
-                <a:off x="3600287" y="2169865"/>
-                <a:ext cx="1678793" cy="556434"/>
-              </a:xfrm>
-              <a:prstGeom prst="rect">
-                <a:avLst/>
-              </a:prstGeom>
-              <a:blipFill rotWithShape="0">
-                <a:blip r:embed="rId7"/>
-                <a:stretch>
-                  <a:fillRect/>
-                </a:stretch>
-              </a:blipFill>
-            </p:spPr>
-            <p:txBody>
-              <a:bodyPr/>
-              <a:lstStyle/>
-              <a:p>
-                <a:r>
-                  <a:rPr lang="pt-BR">
-                    <a:noFill/>
-                  </a:rPr>
-                  <a:t> </a:t>
-                </a:r>
-              </a:p>
-            </p:txBody>
-          </p:sp>
-        </mc:Fallback>
-      </mc:AlternateContent>
-      <p:sp>
-        <p:nvSpPr>
-          <p:cNvPr id="15" name="Elipse 14"/>
-          <p:cNvSpPr/>
-          <p:nvPr/>
-        </p:nvSpPr>
-        <p:spPr>
-          <a:xfrm>
-            <a:off x="4210420" y="3087861"/>
-            <a:ext cx="468000" cy="468000"/>
-          </a:xfrm>
-          <a:prstGeom prst="ellipse">
-            <a:avLst/>
-          </a:prstGeom>
-          <a:noFill/>
-          <a:ln w="28575">
-            <a:solidFill>
-              <a:schemeClr val="tx1"/>
-            </a:solidFill>
-          </a:ln>
-        </p:spPr>
-        <p:style>
-          <a:lnRef idx="2">
-            <a:schemeClr val="accent1">
-              <a:shade val="50000"/>
-            </a:schemeClr>
-          </a:lnRef>
-          <a:fillRef idx="1">
-            <a:schemeClr val="accent1"/>
-          </a:fillRef>
-          <a:effectRef idx="0">
-            <a:schemeClr val="accent1"/>
-          </a:effectRef>
-          <a:fontRef idx="minor">
-            <a:schemeClr val="lt1"/>
-          </a:fontRef>
-        </p:style>
-        <p:txBody>
-          <a:bodyPr rtlCol="0" anchor="ctr"/>
-          <a:lstStyle/>
-          <a:p>
-            <a:pPr algn="ctr"/>
-            <a:endParaRPr lang="pt-BR"/>
-          </a:p>
-        </p:txBody>
-      </p:sp>
-      <p:sp>
-        <p:nvSpPr>
-          <p:cNvPr id="16" name="Menos 15"/>
-          <p:cNvSpPr/>
-          <p:nvPr/>
-        </p:nvSpPr>
-        <p:spPr>
-          <a:xfrm>
-            <a:off x="4280122" y="3183791"/>
-            <a:ext cx="328311" cy="276139"/>
-          </a:xfrm>
-          <a:prstGeom prst="mathMinus">
-            <a:avLst/>
-          </a:prstGeom>
-        </p:spPr>
-        <p:style>
-          <a:lnRef idx="2">
-            <a:schemeClr val="dk1">
-              <a:shade val="50000"/>
-            </a:schemeClr>
-          </a:lnRef>
-          <a:fillRef idx="1">
-            <a:schemeClr val="dk1"/>
-          </a:fillRef>
-          <a:effectRef idx="0">
-            <a:schemeClr val="dk1"/>
-          </a:effectRef>
-          <a:fontRef idx="minor">
-            <a:schemeClr val="lt1"/>
-          </a:fontRef>
-        </p:style>
-        <p:txBody>
-          <a:bodyPr rtlCol="0" anchor="ctr"/>
-          <a:lstStyle/>
-          <a:p>
-            <a:pPr algn="ctr"/>
-            <a:endParaRPr lang="pt-BR"/>
-          </a:p>
-        </p:txBody>
-      </p:sp>
-      <mc:AlternateContent xmlns:mc="http://schemas.openxmlformats.org/markup-compatibility/2006" xmlns:a14="http://schemas.microsoft.com/office/drawing/2010/main">
-        <mc:Choice Requires="a14">
-          <p:sp>
-            <p:nvSpPr>
-              <p:cNvPr id="18" name="Retângulo 17"/>
-              <p:cNvSpPr/>
-              <p:nvPr/>
-            </p:nvSpPr>
-            <p:spPr>
-              <a:xfrm>
-                <a:off x="4970918" y="3016979"/>
-                <a:ext cx="986039" cy="523220"/>
-              </a:xfrm>
-              <a:prstGeom prst="rect">
-                <a:avLst/>
-              </a:prstGeom>
-            </p:spPr>
-            <p:txBody>
-              <a:bodyPr wrap="none">
-                <a:spAutoFit/>
-              </a:bodyPr>
-              <a:lstStyle/>
-              <a:p>
-                <a:pPr/>
-                <a14:m>
-                  <m:oMathPara xmlns:m="http://schemas.openxmlformats.org/officeDocument/2006/math">
-                    <m:oMathParaPr>
-                      <m:jc m:val="centerGroup"/>
-                    </m:oMathParaPr>
-                    <m:oMath xmlns:m="http://schemas.openxmlformats.org/officeDocument/2006/math">
-                      <m:r>
-                        <a:rPr lang="pt-BR" sz="2800" b="0" i="1" smtClean="0">
-                          <a:latin typeface="Cambria Math" panose="02040503050406030204" pitchFamily="18" charset="0"/>
-                        </a:rPr>
-                        <m:t>𝑒𝑟𝑟𝑜</m:t>
-                      </m:r>
-                    </m:oMath>
-                  </m:oMathPara>
-                </a14:m>
-                <a:endParaRPr lang="en-US" sz="2800" dirty="0"/>
-              </a:p>
-            </p:txBody>
-          </p:sp>
-        </mc:Choice>
-        <mc:Fallback xmlns="">
-          <p:sp>
-            <p:nvSpPr>
-              <p:cNvPr id="18" name="Retângulo 17"/>
-              <p:cNvSpPr>
-                <a:spLocks noRot="1" noChangeAspect="1" noMove="1" noResize="1" noEditPoints="1" noAdjustHandles="1" noChangeArrowheads="1" noChangeShapeType="1" noTextEdit="1"/>
-              </p:cNvSpPr>
-              <p:nvPr/>
-            </p:nvSpPr>
-            <p:spPr>
-              <a:xfrm>
-                <a:off x="4970918" y="3016979"/>
-                <a:ext cx="986039" cy="523220"/>
-              </a:xfrm>
-              <a:prstGeom prst="rect">
-                <a:avLst/>
-              </a:prstGeom>
-              <a:blipFill rotWithShape="0">
-                <a:blip r:embed="rId8"/>
-                <a:stretch>
-                  <a:fillRect/>
-                </a:stretch>
-              </a:blipFill>
-            </p:spPr>
-            <p:txBody>
-              <a:bodyPr/>
-              <a:lstStyle/>
-              <a:p>
-                <a:r>
-                  <a:rPr lang="pt-BR">
-                    <a:noFill/>
-                  </a:rPr>
-                  <a:t> </a:t>
-                </a:r>
-              </a:p>
-            </p:txBody>
-          </p:sp>
-        </mc:Fallback>
-      </mc:AlternateContent>
-      <p:cxnSp>
-        <p:nvCxnSpPr>
-          <p:cNvPr id="20" name="Conector de seta reta 19"/>
-          <p:cNvCxnSpPr>
-            <a:stCxn id="5" idx="3"/>
-            <a:endCxn id="15" idx="2"/>
-          </p:cNvCxnSpPr>
-          <p:nvPr/>
-        </p:nvCxnSpPr>
-        <p:spPr>
-          <a:xfrm flipV="1">
-            <a:off x="3199693" y="3321861"/>
-            <a:ext cx="1010727" cy="5938"/>
-          </a:xfrm>
-          <a:prstGeom prst="straightConnector1">
-            <a:avLst/>
-          </a:prstGeom>
-          <a:ln>
-            <a:solidFill>
-              <a:schemeClr val="tx1"/>
-            </a:solidFill>
-            <a:tailEnd type="triangle"/>
-          </a:ln>
-        </p:spPr>
-        <p:style>
-          <a:lnRef idx="1">
-            <a:schemeClr val="accent1"/>
-          </a:lnRef>
-          <a:fillRef idx="0">
-            <a:schemeClr val="accent1"/>
-          </a:fillRef>
-          <a:effectRef idx="0">
-            <a:schemeClr val="accent1"/>
-          </a:effectRef>
-          <a:fontRef idx="minor">
-            <a:schemeClr val="tx1"/>
-          </a:fontRef>
-        </p:style>
-      </p:cxnSp>
-      <p:cxnSp>
-        <p:nvCxnSpPr>
-          <p:cNvPr id="22" name="Conector de seta reta 21"/>
-          <p:cNvCxnSpPr>
-            <a:stCxn id="14" idx="2"/>
-            <a:endCxn id="15" idx="0"/>
-          </p:cNvCxnSpPr>
-          <p:nvPr/>
-        </p:nvCxnSpPr>
-        <p:spPr>
-          <a:xfrm>
-            <a:off x="4439684" y="2726299"/>
-            <a:ext cx="4736" cy="361562"/>
-          </a:xfrm>
-          <a:prstGeom prst="straightConnector1">
-            <a:avLst/>
-          </a:prstGeom>
-          <a:ln>
-            <a:solidFill>
-              <a:schemeClr val="tx1"/>
-            </a:solidFill>
-            <a:tailEnd type="triangle"/>
-          </a:ln>
-        </p:spPr>
-        <p:style>
-          <a:lnRef idx="1">
-            <a:schemeClr val="accent1"/>
-          </a:lnRef>
-          <a:fillRef idx="0">
-            <a:schemeClr val="accent1"/>
-          </a:fillRef>
-          <a:effectRef idx="0">
-            <a:schemeClr val="accent1"/>
-          </a:effectRef>
-          <a:fontRef idx="minor">
-            <a:schemeClr val="tx1"/>
-          </a:fontRef>
-        </p:style>
-      </p:cxnSp>
-      <p:cxnSp>
-        <p:nvCxnSpPr>
-          <p:cNvPr id="27" name="Conector de seta reta 26"/>
-          <p:cNvCxnSpPr/>
-          <p:nvPr/>
-        </p:nvCxnSpPr>
-        <p:spPr>
-          <a:xfrm flipV="1">
-            <a:off x="4700318" y="3321861"/>
-            <a:ext cx="360000" cy="1"/>
-          </a:xfrm>
-          <a:prstGeom prst="straightConnector1">
-            <a:avLst/>
-          </a:prstGeom>
-          <a:ln>
-            <a:solidFill>
-              <a:schemeClr val="tx1"/>
-            </a:solidFill>
-            <a:tailEnd type="triangle"/>
-          </a:ln>
-        </p:spPr>
-        <p:style>
-          <a:lnRef idx="1">
-            <a:schemeClr val="accent1"/>
-          </a:lnRef>
-          <a:fillRef idx="0">
-            <a:schemeClr val="accent1"/>
-          </a:fillRef>
-          <a:effectRef idx="0">
-            <a:schemeClr val="accent1"/>
-          </a:effectRef>
-          <a:fontRef idx="minor">
-            <a:schemeClr val="tx1"/>
-          </a:fontRef>
-        </p:style>
-      </p:cxnSp>
-      <p:cxnSp>
-        <p:nvCxnSpPr>
-          <p:cNvPr id="34" name="Conector angulado 33"/>
-          <p:cNvCxnSpPr>
-            <a:stCxn id="18" idx="2"/>
-          </p:cNvCxnSpPr>
-          <p:nvPr/>
-        </p:nvCxnSpPr>
-        <p:spPr>
-          <a:xfrm rot="5400000">
-            <a:off x="3039029" y="2060004"/>
-            <a:ext cx="944715" cy="3905104"/>
-          </a:xfrm>
-          <a:prstGeom prst="bentConnector2">
-            <a:avLst/>
-          </a:prstGeom>
-          <a:ln>
-            <a:solidFill>
-              <a:schemeClr val="tx1"/>
-            </a:solidFill>
-            <a:prstDash val="dash"/>
-            <a:headEnd type="none" w="med" len="med"/>
-            <a:tailEnd type="none" w="med" len="med"/>
-          </a:ln>
-        </p:spPr>
-        <p:style>
-          <a:lnRef idx="1">
-            <a:schemeClr val="accent1"/>
-          </a:lnRef>
-          <a:fillRef idx="0">
-            <a:schemeClr val="accent1"/>
-          </a:fillRef>
-          <a:effectRef idx="0">
-            <a:schemeClr val="accent1"/>
-          </a:effectRef>
-          <a:fontRef idx="minor">
-            <a:schemeClr val="tx1"/>
-          </a:fontRef>
-        </p:style>
-      </p:cxnSp>
-      <p:cxnSp>
-        <p:nvCxnSpPr>
-          <p:cNvPr id="36" name="Conector de seta reta 35"/>
-          <p:cNvCxnSpPr/>
-          <p:nvPr/>
-        </p:nvCxnSpPr>
-        <p:spPr>
-          <a:xfrm flipV="1">
-            <a:off x="1547239" y="2088150"/>
-            <a:ext cx="1478069" cy="2393451"/>
-          </a:xfrm>
-          <a:prstGeom prst="straightConnector1">
-            <a:avLst/>
-          </a:prstGeom>
-          <a:ln>
-            <a:solidFill>
-              <a:schemeClr val="tx1"/>
-            </a:solidFill>
-            <a:prstDash val="dash"/>
-            <a:tailEnd type="triangle"/>
-          </a:ln>
-        </p:spPr>
-        <p:style>
-          <a:lnRef idx="1">
-            <a:schemeClr val="accent1"/>
-          </a:lnRef>
-          <a:fillRef idx="0">
-            <a:schemeClr val="accent1"/>
-          </a:fillRef>
-          <a:effectRef idx="0">
-            <a:schemeClr val="accent1"/>
-          </a:effectRef>
-          <a:fontRef idx="minor">
-            <a:schemeClr val="tx1"/>
-          </a:fontRef>
-        </p:style>
-      </p:cxnSp>
-      <p:sp>
-        <p:nvSpPr>
-          <p:cNvPr id="37" name="Retângulo 36"/>
-          <p:cNvSpPr/>
-          <p:nvPr/>
-        </p:nvSpPr>
-        <p:spPr>
-          <a:xfrm>
-            <a:off x="2286273" y="1747419"/>
-            <a:ext cx="1510222" cy="400110"/>
-          </a:xfrm>
-          <a:prstGeom prst="rect">
-            <a:avLst/>
-          </a:prstGeom>
-        </p:spPr>
-        <p:txBody>
-          <a:bodyPr wrap="none">
-            <a:spAutoFit/>
-          </a:bodyPr>
-          <a:lstStyle/>
-          <a:p>
-            <a:r>
-              <a:rPr lang="pt-BR" sz="2000"/>
-              <a:t>Treinamento</a:t>
-            </a:r>
-          </a:p>
-        </p:txBody>
-      </p:sp>
-    </p:spTree>
-    <p:extLst>
-      <p:ext uri="{BB962C8B-B14F-4D97-AF65-F5344CB8AC3E}">
-        <p14:creationId xmlns:p14="http://schemas.microsoft.com/office/powerpoint/2010/main" val="2524151315"/>
       </p:ext>
     </p:extLst>
   </p:cSld>
